--- a/backend/generated_ppts/NDBS_SAP_Supply_Chain_AI_v2.0.pptx
+++ b/backend/generated_ppts/NDBS_SAP_Supply_Chain_AI_v2.0.pptx
@@ -39128,7 +39128,7 @@
                   <a:srgbClr val="FFFFFF"/>
                 </a:solidFill>
               </a:rPr>
-              <a:t>Industry Context — Automotive Trends</a:t>
+              <a:t>Toyota AU — Supply Chain Challenges</a:t>
             </a:r>
           </a:p>
         </p:txBody>
@@ -39162,7 +39162,7 @@
                   <a:srgbClr val="B8CFE8"/>
                 </a:solidFill>
               </a:rPr>
-              <a:t>Macro forces reshaping supply chains</a:t>
+              <a:t>Real pain points across 275 dealerships</a:t>
             </a:r>
           </a:p>
         </p:txBody>
@@ -41858,7 +41858,7 @@
                   <a:srgbClr val="FFFFFF"/>
                 </a:solidFill>
               </a:rPr>
-              <a:t>Industry Context — Automotive Supply Chain</a:t>
+              <a:t>Toyota Australia — Supply Chain Challenges</a:t>
             </a:r>
           </a:p>
         </p:txBody>
@@ -41892,7 +41892,7 @@
                   <a:srgbClr val="B8CFE8"/>
                 </a:solidFill>
               </a:rPr>
-              <a:t>Macro forces driving urgency for AI-powered supply chains</a:t>
+              <a:t>Real challenges across your 275 dealerships that AI can solve today</a:t>
             </a:r>
           </a:p>
         </p:txBody>
@@ -41992,7 +41992,7 @@
         <p:spPr>
           <a:xfrm>
             <a:off x="550000" y="1650000"/>
-            <a:ext cx="2400000" cy="450000"/>
+            <a:ext cx="2400000" cy="500000"/>
           </a:xfrm>
           <a:prstGeom prst="rect">
             <a:avLst/>
@@ -42012,7 +42012,7 @@
                   <a:srgbClr val="0078D4"/>
                 </a:solidFill>
               </a:rPr>
-              <a:t>Chip Shortage Aftermath</a:t>
+              <a:t>Demand Volatility</a:t>
             </a:r>
           </a:p>
         </p:txBody>
@@ -42025,8 +42025,8 @@
         </p:nvSpPr>
         <p:spPr>
           <a:xfrm>
-            <a:off x="550000" y="2200000"/>
-            <a:ext cx="2400000" cy="2300000"/>
+            <a:off x="550000" y="2250000"/>
+            <a:ext cx="2400000" cy="2250000"/>
           </a:xfrm>
           <a:prstGeom prst="rect">
             <a:avLst/>
@@ -42045,12 +42045,12 @@
               </a:spcAft>
             </a:pPr>
             <a:r>
-              <a:rPr sz="1000" b="0">
+              <a:rPr sz="1041" b="0">
                 <a:solidFill>
                   <a:srgbClr val="B8CFE8"/>
                 </a:solidFill>
               </a:rPr>
-              <a:t>Global semiconductor crisis exposed single-source dependencies.</a:t>
+              <a:t>RAV4 sales down 74% in early 2026</a:t>
             </a:r>
           </a:p>
           <a:p>
@@ -42060,12 +42060,87 @@
               </a:spcAft>
             </a:pPr>
             <a:r>
-              <a:rPr sz="1000" b="0">
+              <a:rPr sz="1333" b="0">
                 <a:solidFill>
                   <a:srgbClr val="B8CFE8"/>
                 </a:solidFill>
               </a:rPr>
-              <a:t>3-year recovery timeline. OEMs now demand multi-tier visibility.</a:t>
+              <a:t>due to model transition gaps.</a:t>
+            </a:r>
+          </a:p>
+          <a:p>
+            <a:pPr algn="l">
+              <a:spcAft>
+                <a:spcPts val="400"/>
+              </a:spcAft>
+            </a:pPr>
+            <a:r>
+              <a:rPr sz="1333" b="0">
+                <a:solidFill>
+                  <a:srgbClr val="B8CFE8"/>
+                </a:solidFill>
+              </a:rPr>
+              <a:t/>
+            </a:r>
+          </a:p>
+          <a:p>
+            <a:pPr algn="l">
+              <a:spcAft>
+                <a:spcPts val="400"/>
+              </a:spcAft>
+            </a:pPr>
+            <a:r>
+              <a:rPr sz="1333" b="0">
+                <a:solidFill>
+                  <a:srgbClr val="B8CFE8"/>
+                </a:solidFill>
+              </a:rPr>
+              <a:t>3–6 month wait times persist</a:t>
+            </a:r>
+          </a:p>
+          <a:p>
+            <a:pPr algn="l">
+              <a:spcAft>
+                <a:spcPts val="400"/>
+              </a:spcAft>
+            </a:pPr>
+            <a:r>
+              <a:rPr sz="1333" b="0">
+                <a:solidFill>
+                  <a:srgbClr val="B8CFE8"/>
+                </a:solidFill>
+              </a:rPr>
+              <a:t>across the range. 200K+ unit</a:t>
+            </a:r>
+          </a:p>
+          <a:p>
+            <a:pPr algn="l">
+              <a:spcAft>
+                <a:spcPts val="400"/>
+              </a:spcAft>
+            </a:pPr>
+            <a:r>
+              <a:rPr sz="1333" b="0">
+                <a:solidFill>
+                  <a:srgbClr val="B8CFE8"/>
+                </a:solidFill>
+              </a:rPr>
+              <a:t>target at risk without better</a:t>
+            </a:r>
+          </a:p>
+          <a:p>
+            <a:pPr algn="l">
+              <a:spcAft>
+                <a:spcPts val="400"/>
+              </a:spcAft>
+            </a:pPr>
+            <a:r>
+              <a:rPr sz="1333" b="0">
+                <a:solidFill>
+                  <a:srgbClr val="B8CFE8"/>
+                </a:solidFill>
+              </a:rPr>
+              <a:t>demand visibility.</a:t>
             </a:r>
           </a:p>
         </p:txBody>
@@ -42165,7 +42240,7 @@
         <p:spPr>
           <a:xfrm>
             <a:off x="3450000" y="1650000"/>
-            <a:ext cx="2400000" cy="450000"/>
+            <a:ext cx="2400000" cy="500000"/>
           </a:xfrm>
           <a:prstGeom prst="rect">
             <a:avLst/>
@@ -42185,7 +42260,8 @@
                   <a:srgbClr val="00B294"/>
                 </a:solidFill>
               </a:rPr>
-              <a:t>EV Transition</a:t>
+              <a:t>Parts Forecasting
+Gap</a:t>
             </a:r>
           </a:p>
         </p:txBody>
@@ -42198,8 +42274,8 @@
         </p:nvSpPr>
         <p:spPr>
           <a:xfrm>
-            <a:off x="3450000" y="2200000"/>
-            <a:ext cx="2400000" cy="2300000"/>
+            <a:off x="3450000" y="2250000"/>
+            <a:ext cx="2400000" cy="2250000"/>
           </a:xfrm>
           <a:prstGeom prst="rect">
             <a:avLst/>
@@ -42218,12 +42294,12 @@
               </a:spcAft>
             </a:pPr>
             <a:r>
-              <a:rPr sz="1000" b="0">
+              <a:rPr sz="1333" b="0">
                 <a:solidFill>
                   <a:srgbClr val="B8CFE8"/>
                 </a:solidFill>
               </a:rPr>
-              <a:t>Battery supply chains are 5× more complex than ICE.</a:t>
+              <a:t>No retail inventory management</a:t>
             </a:r>
           </a:p>
           <a:p>
@@ -42233,12 +42309,87 @@
               </a:spcAft>
             </a:pPr>
             <a:r>
-              <a:rPr sz="1000" b="0">
+              <a:rPr sz="1333" b="0">
                 <a:solidFill>
                   <a:srgbClr val="B8CFE8"/>
                 </a:solidFill>
               </a:rPr>
-              <a:t>New BOM structures require completely different planning models.</a:t>
+              <a:t>system across dealer network.</a:t>
+            </a:r>
+          </a:p>
+          <a:p>
+            <a:pPr algn="l">
+              <a:spcAft>
+                <a:spcPts val="400"/>
+              </a:spcAft>
+            </a:pPr>
+            <a:r>
+              <a:rPr sz="1333" b="0">
+                <a:solidFill>
+                  <a:srgbClr val="B8CFE8"/>
+                </a:solidFill>
+              </a:rPr>
+              <a:t/>
+            </a:r>
+          </a:p>
+          <a:p>
+            <a:pPr algn="l">
+              <a:spcAft>
+                <a:spcPts val="400"/>
+              </a:spcAft>
+            </a:pPr>
+            <a:r>
+              <a:rPr sz="1333" b="0">
+                <a:solidFill>
+                  <a:srgbClr val="B8CFE8"/>
+                </a:solidFill>
+              </a:rPr>
+              <a:t>Cannot distinguish real demand</a:t>
+            </a:r>
+          </a:p>
+          <a:p>
+            <a:pPr algn="l">
+              <a:spcAft>
+                <a:spcPts val="400"/>
+              </a:spcAft>
+            </a:pPr>
+            <a:r>
+              <a:rPr sz="1333" b="0">
+                <a:solidFill>
+                  <a:srgbClr val="B8CFE8"/>
+                </a:solidFill>
+              </a:rPr>
+              <a:t>from stock replenishment.</a:t>
+            </a:r>
+          </a:p>
+          <a:p>
+            <a:pPr algn="l">
+              <a:spcAft>
+                <a:spcPts val="400"/>
+              </a:spcAft>
+            </a:pPr>
+            <a:r>
+              <a:rPr sz="1333" b="0">
+                <a:solidFill>
+                  <a:srgbClr val="B8CFE8"/>
+                </a:solidFill>
+              </a:rPr>
+              <a:t>Parts forecasting still relies</a:t>
+            </a:r>
+          </a:p>
+          <a:p>
+            <a:pPr algn="l">
+              <a:spcAft>
+                <a:spcPts val="400"/>
+              </a:spcAft>
+            </a:pPr>
+            <a:r>
+              <a:rPr sz="1333" b="0">
+                <a:solidFill>
+                  <a:srgbClr val="B8CFE8"/>
+                </a:solidFill>
+              </a:rPr>
+              <a:t>on Excel and manual overrides.</a:t>
             </a:r>
           </a:p>
         </p:txBody>
@@ -42338,7 +42489,7 @@
         <p:spPr>
           <a:xfrm>
             <a:off x="6350000" y="1650000"/>
-            <a:ext cx="2400000" cy="450000"/>
+            <a:ext cx="2400000" cy="500000"/>
           </a:xfrm>
           <a:prstGeom prst="rect">
             <a:avLst/>
@@ -42358,7 +42509,8 @@
                   <a:srgbClr val="FFB900"/>
                 </a:solidFill>
               </a:rPr>
-              <a:t>Sustainability Mandates</a:t>
+              <a:t>Hybrid Supply
+Crunch</a:t>
             </a:r>
           </a:p>
         </p:txBody>
@@ -42371,8 +42523,8 @@
         </p:nvSpPr>
         <p:spPr>
           <a:xfrm>
-            <a:off x="6350000" y="2200000"/>
-            <a:ext cx="2400000" cy="2300000"/>
+            <a:off x="6350000" y="2250000"/>
+            <a:ext cx="2400000" cy="2250000"/>
           </a:xfrm>
           <a:prstGeom prst="rect">
             <a:avLst/>
@@ -42391,12 +42543,12 @@
               </a:spcAft>
             </a:pPr>
             <a:r>
-              <a:rPr sz="1000" b="0">
+              <a:rPr sz="1333" b="0">
                 <a:solidFill>
                   <a:srgbClr val="B8CFE8"/>
                 </a:solidFill>
               </a:rPr>
-              <a:t>EU CSRD &amp; CBAM regulations demand Scope 3 tracking.</a:t>
+              <a:t>Hybrid demand surged 3× in</a:t>
             </a:r>
           </a:p>
           <a:p>
@@ -42406,12 +42558,87 @@
               </a:spcAft>
             </a:pPr>
             <a:r>
-              <a:rPr sz="1000" b="0">
+              <a:rPr sz="1333" b="0">
                 <a:solidFill>
                   <a:srgbClr val="B8CFE8"/>
                 </a:solidFill>
               </a:rPr>
-              <a:t>Supply chain carbon footprint visibility is now mandatory.</a:t>
+              <a:t>5 years — outstripping supply.</a:t>
+            </a:r>
+          </a:p>
+          <a:p>
+            <a:pPr algn="l">
+              <a:spcAft>
+                <a:spcPts val="400"/>
+              </a:spcAft>
+            </a:pPr>
+            <a:r>
+              <a:rPr sz="1333" b="0">
+                <a:solidFill>
+                  <a:srgbClr val="B8CFE8"/>
+                </a:solidFill>
+              </a:rPr>
+              <a:t/>
+            </a:r>
+          </a:p>
+          <a:p>
+            <a:pPr algn="l">
+              <a:spcAft>
+                <a:spcPts val="400"/>
+              </a:spcAft>
+            </a:pPr>
+            <a:r>
+              <a:rPr sz="1333" b="0">
+                <a:solidFill>
+                  <a:srgbClr val="B8CFE8"/>
+                </a:solidFill>
+              </a:rPr>
+              <a:t>Aisin magnet &amp; Denso inverter</a:t>
+            </a:r>
+          </a:p>
+          <a:p>
+            <a:pPr algn="l">
+              <a:spcAft>
+                <a:spcPts val="400"/>
+              </a:spcAft>
+            </a:pPr>
+            <a:r>
+              <a:rPr sz="1333" b="0">
+                <a:solidFill>
+                  <a:srgbClr val="B8CFE8"/>
+                </a:solidFill>
+              </a:rPr>
+              <a:t>bottlenecks. All components</a:t>
+            </a:r>
+          </a:p>
+          <a:p>
+            <a:pPr algn="l">
+              <a:spcAft>
+                <a:spcPts val="400"/>
+              </a:spcAft>
+            </a:pPr>
+            <a:r>
+              <a:rPr sz="1333" b="0">
+                <a:solidFill>
+                  <a:srgbClr val="B8CFE8"/>
+                </a:solidFill>
+              </a:rPr>
+              <a:t>shipped from Japan — logistics</a:t>
+            </a:r>
+          </a:p>
+          <a:p>
+            <a:pPr algn="l">
+              <a:spcAft>
+                <a:spcPts val="400"/>
+              </a:spcAft>
+            </a:pPr>
+            <a:r>
+              <a:rPr sz="1333" b="0">
+                <a:solidFill>
+                  <a:srgbClr val="B8CFE8"/>
+                </a:solidFill>
+              </a:rPr>
+              <a:t>delays compound the problem.</a:t>
             </a:r>
           </a:p>
         </p:txBody>
@@ -42511,7 +42738,7 @@
         <p:spPr>
           <a:xfrm>
             <a:off x="9250000" y="1650000"/>
-            <a:ext cx="2400000" cy="450000"/>
+            <a:ext cx="2400000" cy="500000"/>
           </a:xfrm>
           <a:prstGeom prst="rect">
             <a:avLst/>
@@ -42531,7 +42758,8 @@
                   <a:srgbClr val="FF8C00"/>
                 </a:solidFill>
               </a:rPr>
-              <a:t>Nearshoring &amp; China+1</a:t>
+              <a:t>Distribution
+Complexity</a:t>
             </a:r>
           </a:p>
         </p:txBody>
@@ -42544,8 +42772,8 @@
         </p:nvSpPr>
         <p:spPr>
           <a:xfrm>
-            <a:off x="9250000" y="2200000"/>
-            <a:ext cx="2400000" cy="2300000"/>
+            <a:off x="9250000" y="2250000"/>
+            <a:ext cx="2400000" cy="2250000"/>
           </a:xfrm>
           <a:prstGeom prst="rect">
             <a:avLst/>
@@ -42564,12 +42792,12 @@
               </a:spcAft>
             </a:pPr>
             <a:r>
-              <a:rPr sz="1000" b="0">
+              <a:rPr sz="1333" b="0">
                 <a:solidFill>
                   <a:srgbClr val="B8CFE8"/>
                 </a:solidFill>
               </a:rPr>
-              <a:t>Manufacturers restructuring supplier base.</a:t>
+              <a:t>275 dealers across 8 states.</a:t>
             </a:r>
           </a:p>
           <a:p>
@@ -42579,12 +42807,87 @@
               </a:spcAft>
             </a:pPr>
             <a:r>
-              <a:rPr sz="1000" b="0">
+              <a:rPr sz="1333" b="0">
                 <a:solidFill>
                   <a:srgbClr val="B8CFE8"/>
                 </a:solidFill>
               </a:rPr>
-              <a:t>Dynamic network optimization required as geography shifts.</a:t>
+              <a:t>Vast geography from Darwin to</a:t>
+            </a:r>
+          </a:p>
+          <a:p>
+            <a:pPr algn="l">
+              <a:spcAft>
+                <a:spcPts val="400"/>
+              </a:spcAft>
+            </a:pPr>
+            <a:r>
+              <a:rPr sz="1333" b="0">
+                <a:solidFill>
+                  <a:srgbClr val="B8CFE8"/>
+                </a:solidFill>
+              </a:rPr>
+              <a:t>Melbourne adds transit time.</a:t>
+            </a:r>
+          </a:p>
+          <a:p>
+            <a:pPr algn="l">
+              <a:spcAft>
+                <a:spcPts val="400"/>
+              </a:spcAft>
+            </a:pPr>
+            <a:r>
+              <a:rPr sz="1333" b="0">
+                <a:solidFill>
+                  <a:srgbClr val="B8CFE8"/>
+                </a:solidFill>
+              </a:rPr>
+              <a:t/>
+            </a:r>
+          </a:p>
+          <a:p>
+            <a:pPr algn="l">
+              <a:spcAft>
+                <a:spcPts val="400"/>
+              </a:spcAft>
+            </a:pPr>
+            <a:r>
+              <a:rPr sz="1333" b="0">
+                <a:solidFill>
+                  <a:srgbClr val="B8CFE8"/>
+                </a:solidFill>
+              </a:rPr>
+              <a:t>Model transitions (Fortuner</a:t>
+            </a:r>
+          </a:p>
+          <a:p>
+            <a:pPr algn="l">
+              <a:spcAft>
+                <a:spcPts val="400"/>
+              </a:spcAft>
+            </a:pPr>
+            <a:r>
+              <a:rPr sz="1333" b="0">
+                <a:solidFill>
+                  <a:srgbClr val="B8CFE8"/>
+                </a:solidFill>
+              </a:rPr>
+              <a:t>exit, new-gen RAV4 &amp; HiLux)</a:t>
+            </a:r>
+          </a:p>
+          <a:p>
+            <a:pPr algn="l">
+              <a:spcAft>
+                <a:spcPts val="400"/>
+              </a:spcAft>
+            </a:pPr>
+            <a:r>
+              <a:rPr sz="1333" b="0">
+                <a:solidFill>
+                  <a:srgbClr val="B8CFE8"/>
+                </a:solidFill>
+              </a:rPr>
+              <a:t>need dynamic stock rebalancing.</a:t>
             </a:r>
           </a:p>
         </p:txBody>
@@ -42695,7 +42998,7 @@
                   <a:srgbClr val="E8F4FD"/>
                 </a:solidFill>
               </a:rPr>
-              <a:t>Toyota Australia runs SAP ECC6 with rich order, logistics and parts data — but lacks the AI layer to turn it into predictive, autonomous action. This is the gap NDBS fills.</a:t>
+              <a:t>Toyota AU's SAP ECC6 holds years of order, parts and logistics data — but no AI layer to predict, optimise and act autonomously. This is exactly what NDBS delivers.</a:t>
             </a:r>
           </a:p>
         </p:txBody>

--- a/backend/generated_ppts/NDBS_SAP_Supply_Chain_AI_v2.0.pptx
+++ b/backend/generated_ppts/NDBS_SAP_Supply_Chain_AI_v2.0.pptx
@@ -27,6 +27,7 @@
     <p:sldId id="2147481620" r:id="rId28"/>
     <p:sldId id="2147481621" r:id="rId29"/>
     <p:sldId id="2147481622" r:id="rId30"/>
+    <p:sldId id="2147481623" r:id="rId31"/>
     <p:sldId id="2147481409" r:id="rId16"/>
     <p:sldId id="2147481445" r:id="rId15"/>
   </p:sldIdLst>
@@ -34419,7 +34420,7 @@
                   <a:srgbClr val="FFFFFF"/>
                 </a:solidFill>
               </a:rPr>
-              <a:t>Consolidated ROI &amp; Business Case</a:t>
+              <a:t>Why NTT DATA Business Solutions?</a:t>
             </a:r>
           </a:p>
         </p:txBody>
@@ -34453,7 +34454,7 @@
                   <a:srgbClr val="B8CFE8"/>
                 </a:solidFill>
               </a:rPr>
-              <a:t>Combined impact across all four AI use cases</a:t>
+              <a:t>The only partner that connects your SAP data to autonomous AI action</a:t>
             </a:r>
           </a:p>
         </p:txBody>
@@ -34466,8 +34467,8 @@
         </p:nvSpPr>
         <p:spPr>
           <a:xfrm>
-            <a:off x="596000" y="1500000"/>
-            <a:ext cx="2600000" cy="1600000"/>
+            <a:off x="400000" y="1400000"/>
+            <a:ext cx="2700000" cy="4200000"/>
           </a:xfrm>
           <a:prstGeom prst="roundRect">
             <a:avLst/>
@@ -34503,107 +34504,20 @@
       </p:sp>
       <p:sp>
         <p:nvSpPr>
-          <p:cNvPr id="6" name="TextBox 5"/>
-          <p:cNvSpPr txBox="1"/>
-          <p:nvPr/>
-        </p:nvSpPr>
-        <p:spPr>
-          <a:xfrm>
-            <a:off x="596000" y="1600000"/>
-            <a:ext cx="2600000" cy="600000"/>
-          </a:xfrm>
-          <a:prstGeom prst="rect">
-            <a:avLst/>
-          </a:prstGeom>
-          <a:noFill/>
-        </p:spPr>
-        <p:txBody>
-          <a:bodyPr wrap="square">
-            <a:spAutoFit/>
-          </a:bodyPr>
-          <a:lstStyle/>
-          <a:p>
-            <a:pPr algn="ctr"/>
-            <a:r>
-              <a:rPr sz="4533" b="1" i="0">
-                <a:solidFill>
-                  <a:srgbClr val="0078D4"/>
-                </a:solidFill>
-              </a:rPr>
-              <a:t>3.2×</a:t>
-            </a:r>
-          </a:p>
-        </p:txBody>
-      </p:sp>
-      <p:sp>
-        <p:nvSpPr>
-          <p:cNvPr id="7" name="TextBox 6"/>
-          <p:cNvSpPr txBox="1"/>
-          <p:nvPr/>
-        </p:nvSpPr>
-        <p:spPr>
-          <a:xfrm>
-            <a:off x="696000" y="2250000"/>
-            <a:ext cx="2400000" cy="700000"/>
-          </a:xfrm>
-          <a:prstGeom prst="rect">
-            <a:avLst/>
-          </a:prstGeom>
-          <a:noFill/>
-        </p:spPr>
-        <p:txBody>
-          <a:bodyPr wrap="square">
-            <a:spAutoFit/>
-          </a:bodyPr>
-          <a:lstStyle/>
-          <a:p>
-            <a:pPr algn="ctr">
-              <a:spcAft>
-                <a:spcPts val="400"/>
-              </a:spcAft>
-            </a:pPr>
-            <a:r>
-              <a:rPr sz="1467" b="0">
-                <a:solidFill>
-                  <a:srgbClr val="B8CFE8"/>
-                </a:solidFill>
-              </a:rPr>
-              <a:t>Overall ROI</a:t>
-            </a:r>
-          </a:p>
-          <a:p>
-            <a:pPr algn="ctr">
-              <a:spcAft>
-                <a:spcPts val="400"/>
-              </a:spcAft>
-            </a:pPr>
-            <a:r>
-              <a:rPr sz="1467" b="0">
-                <a:solidFill>
-                  <a:srgbClr val="B8CFE8"/>
-                </a:solidFill>
-              </a:rPr>
-              <a:t>vs. manual planning</a:t>
-            </a:r>
-          </a:p>
-        </p:txBody>
-      </p:sp>
-      <p:sp>
-        <p:nvSpPr>
-          <p:cNvPr id="8" name="Rounded Rectangle 7"/>
+          <p:cNvPr id="6" name="Rounded Rectangle 5"/>
           <p:cNvSpPr/>
           <p:nvPr/>
         </p:nvSpPr>
         <p:spPr>
           <a:xfrm>
-            <a:off x="3396000" y="1500000"/>
-            <a:ext cx="2600000" cy="1600000"/>
+            <a:off x="400000" y="1400000"/>
+            <a:ext cx="2700000" cy="60000"/>
           </a:xfrm>
           <a:prstGeom prst="roundRect">
             <a:avLst/>
           </a:prstGeom>
           <a:solidFill>
-            <a:srgbClr val="0F1F38"/>
+            <a:srgbClr val="0078D4"/>
           </a:solidFill>
           <a:ln>
             <a:noFill/>
@@ -34633,14 +34547,83 @@
       </p:sp>
       <p:sp>
         <p:nvSpPr>
+          <p:cNvPr id="7" name="TextBox 6"/>
+          <p:cNvSpPr txBox="1"/>
+          <p:nvPr/>
+        </p:nvSpPr>
+        <p:spPr>
+          <a:xfrm>
+            <a:off x="550000" y="1520000"/>
+            <a:ext cx="2400000" cy="500000"/>
+          </a:xfrm>
+          <a:prstGeom prst="rect">
+            <a:avLst/>
+          </a:prstGeom>
+          <a:noFill/>
+        </p:spPr>
+        <p:txBody>
+          <a:bodyPr wrap="square">
+            <a:spAutoFit/>
+          </a:bodyPr>
+          <a:lstStyle/>
+          <a:p>
+            <a:pPr algn="l"/>
+            <a:r>
+              <a:rPr sz="1600" b="1" i="0">
+                <a:solidFill>
+                  <a:srgbClr val="0078D4"/>
+                </a:solidFill>
+              </a:rPr>
+              <a:t>SAP-Native
+Expertise</a:t>
+            </a:r>
+          </a:p>
+        </p:txBody>
+      </p:sp>
+      <p:sp>
+        <p:nvSpPr>
+          <p:cNvPr id="8" name="TextBox 7"/>
+          <p:cNvSpPr txBox="1"/>
+          <p:nvPr/>
+        </p:nvSpPr>
+        <p:spPr>
+          <a:xfrm>
+            <a:off x="550000" y="2050000"/>
+            <a:ext cx="2400000" cy="250000"/>
+          </a:xfrm>
+          <a:prstGeom prst="rect">
+            <a:avLst/>
+          </a:prstGeom>
+          <a:noFill/>
+        </p:spPr>
+        <p:txBody>
+          <a:bodyPr wrap="square">
+            <a:spAutoFit/>
+          </a:bodyPr>
+          <a:lstStyle/>
+          <a:p>
+            <a:pPr algn="l"/>
+            <a:r>
+              <a:rPr sz="1333" b="1" i="0">
+                <a:solidFill>
+                  <a:srgbClr val="FFB900"/>
+                </a:solidFill>
+              </a:rPr>
+              <a:t>Your Challenge</a:t>
+            </a:r>
+          </a:p>
+        </p:txBody>
+      </p:sp>
+      <p:sp>
+        <p:nvSpPr>
           <p:cNvPr id="9" name="TextBox 8"/>
           <p:cNvSpPr txBox="1"/>
           <p:nvPr/>
         </p:nvSpPr>
         <p:spPr>
           <a:xfrm>
-            <a:off x="3396000" y="1600000"/>
-            <a:ext cx="2600000" cy="600000"/>
+            <a:off x="550000" y="2300000"/>
+            <a:ext cx="2400000" cy="600000"/>
           </a:xfrm>
           <a:prstGeom prst="rect">
             <a:avLst/>
@@ -34653,81 +34636,179 @@
           </a:bodyPr>
           <a:lstStyle/>
           <a:p>
-            <a:pPr algn="ctr"/>
-            <a:r>
-              <a:rPr sz="4533" b="1" i="0">
-                <a:solidFill>
-                  <a:srgbClr val="FFB900"/>
-                </a:solidFill>
-              </a:rPr>
-              <a:t>$10-17M</a:t>
-            </a:r>
-          </a:p>
-        </p:txBody>
-      </p:sp>
-      <p:sp>
-        <p:nvSpPr>
-          <p:cNvPr id="10" name="TextBox 9"/>
-          <p:cNvSpPr txBox="1"/>
-          <p:nvPr/>
-        </p:nvSpPr>
-        <p:spPr>
-          <a:xfrm>
-            <a:off x="3496000" y="2250000"/>
-            <a:ext cx="2400000" cy="700000"/>
-          </a:xfrm>
-          <a:prstGeom prst="rect">
-            <a:avLst/>
-          </a:prstGeom>
-          <a:noFill/>
-        </p:spPr>
-        <p:txBody>
-          <a:bodyPr wrap="square">
-            <a:spAutoFit/>
-          </a:bodyPr>
-          <a:lstStyle/>
-          <a:p>
-            <a:pPr algn="ctr">
+            <a:pPr algn="l">
               <a:spcAft>
                 <a:spcPts val="400"/>
               </a:spcAft>
             </a:pPr>
             <a:r>
-              <a:rPr sz="1467" b="0">
-                <a:solidFill>
-                  <a:srgbClr val="B8CFE8"/>
+              <a:rPr sz="1333" b="0">
+                <a:solidFill>
+                  <a:srgbClr val="E8F4FD"/>
                 </a:solidFill>
               </a:rPr>
-              <a:t>Annual savings</a:t>
-            </a:r>
-          </a:p>
-          <a:p>
-            <a:pPr algn="ctr">
+              <a:t>SAP ECC6 data is locked</a:t>
+            </a:r>
+          </a:p>
+          <a:p>
+            <a:pPr algn="l">
               <a:spcAft>
                 <a:spcPts val="400"/>
               </a:spcAft>
             </a:pPr>
             <a:r>
-              <a:rPr sz="1467" b="0">
+              <a:rPr sz="1333" b="0">
+                <a:solidFill>
+                  <a:srgbClr val="E8F4FD"/>
+                </a:solidFill>
+              </a:rPr>
+              <a:t>inside legacy modules.</a:t>
+            </a:r>
+          </a:p>
+        </p:txBody>
+      </p:sp>
+      <p:sp>
+        <p:nvSpPr>
+          <p:cNvPr id="10" name="TextBox 9"/>
+          <p:cNvSpPr txBox="1"/>
+          <p:nvPr/>
+        </p:nvSpPr>
+        <p:spPr>
+          <a:xfrm>
+            <a:off x="550000" y="2950000"/>
+            <a:ext cx="2400000" cy="250000"/>
+          </a:xfrm>
+          <a:prstGeom prst="rect">
+            <a:avLst/>
+          </a:prstGeom>
+          <a:noFill/>
+        </p:spPr>
+        <p:txBody>
+          <a:bodyPr wrap="square">
+            <a:spAutoFit/>
+          </a:bodyPr>
+          <a:lstStyle/>
+          <a:p>
+            <a:pPr algn="l"/>
+            <a:r>
+              <a:rPr sz="1333" b="1" i="0">
+                <a:solidFill>
+                  <a:srgbClr val="00B294"/>
+                </a:solidFill>
+              </a:rPr>
+              <a:t>What We Bring</a:t>
+            </a:r>
+          </a:p>
+        </p:txBody>
+      </p:sp>
+      <p:sp>
+        <p:nvSpPr>
+          <p:cNvPr id="11" name="TextBox 10"/>
+          <p:cNvSpPr txBox="1"/>
+          <p:nvPr/>
+        </p:nvSpPr>
+        <p:spPr>
+          <a:xfrm>
+            <a:off x="550000" y="3200000"/>
+            <a:ext cx="2400000" cy="2200000"/>
+          </a:xfrm>
+          <a:prstGeom prst="rect">
+            <a:avLst/>
+          </a:prstGeom>
+          <a:noFill/>
+        </p:spPr>
+        <p:txBody>
+          <a:bodyPr wrap="square">
+            <a:spAutoFit/>
+          </a:bodyPr>
+          <a:lstStyle/>
+          <a:p>
+            <a:pPr algn="l">
+              <a:spcAft>
+                <a:spcPts val="400"/>
+              </a:spcAft>
+            </a:pPr>
+            <a:r>
+              <a:rPr sz="1333" b="0">
                 <a:solidFill>
                   <a:srgbClr val="B8CFE8"/>
                 </a:solidFill>
               </a:rPr>
-              <a:t>across supply chain</a:t>
-            </a:r>
-          </a:p>
-        </p:txBody>
-      </p:sp>
-      <p:sp>
-        <p:nvSpPr>
-          <p:cNvPr id="11" name="Rounded Rectangle 10"/>
+              <a:t>20+ years delivering SAP for</a:t>
+            </a:r>
+          </a:p>
+          <a:p>
+            <a:pPr algn="l">
+              <a:spcAft>
+                <a:spcPts val="400"/>
+              </a:spcAft>
+            </a:pPr>
+            <a:r>
+              <a:rPr sz="1333" b="0">
+                <a:solidFill>
+                  <a:srgbClr val="B8CFE8"/>
+                </a:solidFill>
+              </a:rPr>
+              <a:t>automotive OEMs. Pre-built</a:t>
+            </a:r>
+          </a:p>
+          <a:p>
+            <a:pPr algn="l">
+              <a:spcAft>
+                <a:spcPts val="400"/>
+              </a:spcAft>
+            </a:pPr>
+            <a:r>
+              <a:rPr sz="1333" b="0">
+                <a:solidFill>
+                  <a:srgbClr val="B8CFE8"/>
+                </a:solidFill>
+              </a:rPr>
+              <a:t>ODP/BAPI connectors for</a:t>
+            </a:r>
+          </a:p>
+          <a:p>
+            <a:pPr algn="l">
+              <a:spcAft>
+                <a:spcPts val="400"/>
+              </a:spcAft>
+            </a:pPr>
+            <a:r>
+              <a:rPr sz="1333" b="0">
+                <a:solidFill>
+                  <a:srgbClr val="B8CFE8"/>
+                </a:solidFill>
+              </a:rPr>
+              <a:t>MM, SD, PP, QM — no</a:t>
+            </a:r>
+          </a:p>
+          <a:p>
+            <a:pPr algn="l">
+              <a:spcAft>
+                <a:spcPts val="400"/>
+              </a:spcAft>
+            </a:pPr>
+            <a:r>
+              <a:rPr sz="1333" b="0">
+                <a:solidFill>
+                  <a:srgbClr val="B8CFE8"/>
+                </a:solidFill>
+              </a:rPr>
+              <a:t>custom ABAP required.</a:t>
+            </a:r>
+          </a:p>
+        </p:txBody>
+      </p:sp>
+      <p:sp>
+        <p:nvSpPr>
+          <p:cNvPr id="12" name="Rounded Rectangle 11"/>
           <p:cNvSpPr/>
           <p:nvPr/>
         </p:nvSpPr>
         <p:spPr>
           <a:xfrm>
-            <a:off x="6196000" y="1500000"/>
-            <a:ext cx="2600000" cy="1600000"/>
+            <a:off x="3300000" y="1400000"/>
+            <a:ext cx="2700000" cy="4200000"/>
           </a:xfrm>
           <a:prstGeom prst="roundRect">
             <a:avLst/>
@@ -34763,107 +34844,20 @@
       </p:sp>
       <p:sp>
         <p:nvSpPr>
-          <p:cNvPr id="12" name="TextBox 11"/>
-          <p:cNvSpPr txBox="1"/>
-          <p:nvPr/>
-        </p:nvSpPr>
-        <p:spPr>
-          <a:xfrm>
-            <a:off x="6196000" y="1600000"/>
-            <a:ext cx="2600000" cy="600000"/>
-          </a:xfrm>
-          <a:prstGeom prst="rect">
-            <a:avLst/>
-          </a:prstGeom>
-          <a:noFill/>
-        </p:spPr>
-        <p:txBody>
-          <a:bodyPr wrap="square">
-            <a:spAutoFit/>
-          </a:bodyPr>
-          <a:lstStyle/>
-          <a:p>
-            <a:pPr algn="ctr"/>
-            <a:r>
-              <a:rPr sz="4533" b="1" i="0">
-                <a:solidFill>
-                  <a:srgbClr val="00B294"/>
-                </a:solidFill>
-              </a:rPr>
-              <a:t>30-40%</a:t>
-            </a:r>
-          </a:p>
-        </p:txBody>
-      </p:sp>
-      <p:sp>
-        <p:nvSpPr>
-          <p:cNvPr id="13" name="TextBox 12"/>
-          <p:cNvSpPr txBox="1"/>
-          <p:nvPr/>
-        </p:nvSpPr>
-        <p:spPr>
-          <a:xfrm>
-            <a:off x="6296000" y="2250000"/>
-            <a:ext cx="2400000" cy="700000"/>
-          </a:xfrm>
-          <a:prstGeom prst="rect">
-            <a:avLst/>
-          </a:prstGeom>
-          <a:noFill/>
-        </p:spPr>
-        <p:txBody>
-          <a:bodyPr wrap="square">
-            <a:spAutoFit/>
-          </a:bodyPr>
-          <a:lstStyle/>
-          <a:p>
-            <a:pPr algn="ctr">
-              <a:spcAft>
-                <a:spcPts val="400"/>
-              </a:spcAft>
-            </a:pPr>
-            <a:r>
-              <a:rPr sz="1467" b="0">
-                <a:solidFill>
-                  <a:srgbClr val="B8CFE8"/>
-                </a:solidFill>
-              </a:rPr>
-              <a:t>Forecast error</a:t>
-            </a:r>
-          </a:p>
-          <a:p>
-            <a:pPr algn="ctr">
-              <a:spcAft>
-                <a:spcPts val="400"/>
-              </a:spcAft>
-            </a:pPr>
-            <a:r>
-              <a:rPr sz="1467" b="0">
-                <a:solidFill>
-                  <a:srgbClr val="B8CFE8"/>
-                </a:solidFill>
-              </a:rPr>
-              <a:t>reduction (MAPE)</a:t>
-            </a:r>
-          </a:p>
-        </p:txBody>
-      </p:sp>
-      <p:sp>
-        <p:nvSpPr>
-          <p:cNvPr id="14" name="Rounded Rectangle 13"/>
+          <p:cNvPr id="13" name="Rounded Rectangle 12"/>
           <p:cNvSpPr/>
           <p:nvPr/>
         </p:nvSpPr>
         <p:spPr>
           <a:xfrm>
-            <a:off x="8996000" y="1500000"/>
-            <a:ext cx="2600000" cy="1600000"/>
+            <a:off x="3300000" y="1400000"/>
+            <a:ext cx="2700000" cy="60000"/>
           </a:xfrm>
           <a:prstGeom prst="roundRect">
             <a:avLst/>
           </a:prstGeom>
           <a:solidFill>
-            <a:srgbClr val="0F1F38"/>
+            <a:srgbClr val="00B294"/>
           </a:solidFill>
           <a:ln>
             <a:noFill/>
@@ -34893,14 +34887,49 @@
       </p:sp>
       <p:sp>
         <p:nvSpPr>
+          <p:cNvPr id="14" name="TextBox 13"/>
+          <p:cNvSpPr txBox="1"/>
+          <p:nvPr/>
+        </p:nvSpPr>
+        <p:spPr>
+          <a:xfrm>
+            <a:off x="3450000" y="1520000"/>
+            <a:ext cx="2400000" cy="500000"/>
+          </a:xfrm>
+          <a:prstGeom prst="rect">
+            <a:avLst/>
+          </a:prstGeom>
+          <a:noFill/>
+        </p:spPr>
+        <p:txBody>
+          <a:bodyPr wrap="square">
+            <a:spAutoFit/>
+          </a:bodyPr>
+          <a:lstStyle/>
+          <a:p>
+            <a:pPr algn="l"/>
+            <a:r>
+              <a:rPr sz="1600" b="1" i="0">
+                <a:solidFill>
+                  <a:srgbClr val="00B294"/>
+                </a:solidFill>
+              </a:rPr>
+              <a:t>Microsoft AI
+Platform</a:t>
+            </a:r>
+          </a:p>
+        </p:txBody>
+      </p:sp>
+      <p:sp>
+        <p:nvSpPr>
           <p:cNvPr id="15" name="TextBox 14"/>
           <p:cNvSpPr txBox="1"/>
           <p:nvPr/>
         </p:nvSpPr>
         <p:spPr>
           <a:xfrm>
-            <a:off x="8996000" y="1600000"/>
-            <a:ext cx="2600000" cy="600000"/>
+            <a:off x="3450000" y="2050000"/>
+            <a:ext cx="2400000" cy="250000"/>
           </a:xfrm>
           <a:prstGeom prst="rect">
             <a:avLst/>
@@ -34913,14 +34942,14 @@
           </a:bodyPr>
           <a:lstStyle/>
           <a:p>
-            <a:pPr algn="ctr"/>
-            <a:r>
-              <a:rPr sz="4533" b="1" i="0">
-                <a:solidFill>
-                  <a:srgbClr val="FF8C00"/>
+            <a:pPr algn="l"/>
+            <a:r>
+              <a:rPr sz="1333" b="1" i="0">
+                <a:solidFill>
+                  <a:srgbClr val="FFB900"/>
                 </a:solidFill>
               </a:rPr>
-              <a:t>85%+</a:t>
+              <a:t>Your Challenge</a:t>
             </a:r>
           </a:p>
         </p:txBody>
@@ -34933,8 +34962,8 @@
         </p:nvSpPr>
         <p:spPr>
           <a:xfrm>
-            <a:off x="9096000" y="2250000"/>
-            <a:ext cx="2400000" cy="700000"/>
+            <a:off x="3450000" y="2300000"/>
+            <a:ext cx="2400000" cy="600000"/>
           </a:xfrm>
           <a:prstGeom prst="rect">
             <a:avLst/>
@@ -34947,47 +34976,179 @@
           </a:bodyPr>
           <a:lstStyle/>
           <a:p>
-            <a:pPr algn="ctr">
+            <a:pPr algn="l">
               <a:spcAft>
                 <a:spcPts val="400"/>
               </a:spcAft>
             </a:pPr>
             <a:r>
-              <a:rPr sz="1467" b="0">
-                <a:solidFill>
-                  <a:srgbClr val="B8CFE8"/>
+              <a:rPr sz="1333" b="0">
+                <a:solidFill>
+                  <a:srgbClr val="E8F4FD"/>
                 </a:solidFill>
               </a:rPr>
-              <a:t>On-time delivery</a:t>
-            </a:r>
-          </a:p>
-          <a:p>
-            <a:pPr algn="ctr">
+              <a:t>No analytics layer on top</a:t>
+            </a:r>
+          </a:p>
+          <a:p>
+            <a:pPr algn="l">
               <a:spcAft>
                 <a:spcPts val="400"/>
               </a:spcAft>
             </a:pPr>
             <a:r>
-              <a:rPr sz="1467" b="0">
+              <a:rPr sz="1333" b="0">
+                <a:solidFill>
+                  <a:srgbClr val="E8F4FD"/>
+                </a:solidFill>
+              </a:rPr>
+              <a:t>of SAP transactional data.</a:t>
+            </a:r>
+          </a:p>
+        </p:txBody>
+      </p:sp>
+      <p:sp>
+        <p:nvSpPr>
+          <p:cNvPr id="17" name="TextBox 16"/>
+          <p:cNvSpPr txBox="1"/>
+          <p:nvPr/>
+        </p:nvSpPr>
+        <p:spPr>
+          <a:xfrm>
+            <a:off x="3450000" y="2950000"/>
+            <a:ext cx="2400000" cy="250000"/>
+          </a:xfrm>
+          <a:prstGeom prst="rect">
+            <a:avLst/>
+          </a:prstGeom>
+          <a:noFill/>
+        </p:spPr>
+        <p:txBody>
+          <a:bodyPr wrap="square">
+            <a:spAutoFit/>
+          </a:bodyPr>
+          <a:lstStyle/>
+          <a:p>
+            <a:pPr algn="l"/>
+            <a:r>
+              <a:rPr sz="1333" b="1" i="0">
+                <a:solidFill>
+                  <a:srgbClr val="00B294"/>
+                </a:solidFill>
+              </a:rPr>
+              <a:t>What We Bring</a:t>
+            </a:r>
+          </a:p>
+        </p:txBody>
+      </p:sp>
+      <p:sp>
+        <p:nvSpPr>
+          <p:cNvPr id="18" name="TextBox 17"/>
+          <p:cNvSpPr txBox="1"/>
+          <p:nvPr/>
+        </p:nvSpPr>
+        <p:spPr>
+          <a:xfrm>
+            <a:off x="3450000" y="3200000"/>
+            <a:ext cx="2400000" cy="2200000"/>
+          </a:xfrm>
+          <a:prstGeom prst="rect">
+            <a:avLst/>
+          </a:prstGeom>
+          <a:noFill/>
+        </p:spPr>
+        <p:txBody>
+          <a:bodyPr wrap="square">
+            <a:spAutoFit/>
+          </a:bodyPr>
+          <a:lstStyle/>
+          <a:p>
+            <a:pPr algn="l">
+              <a:spcAft>
+                <a:spcPts val="400"/>
+              </a:spcAft>
+            </a:pPr>
+            <a:r>
+              <a:rPr sz="1333" b="0">
                 <a:solidFill>
                   <a:srgbClr val="B8CFE8"/>
                 </a:solidFill>
               </a:rPr>
-              <a:t>achievement</a:t>
-            </a:r>
-          </a:p>
-        </p:txBody>
-      </p:sp>
-      <p:sp>
-        <p:nvSpPr>
-          <p:cNvPr id="17" name="Rounded Rectangle 16"/>
+              <a:t>Microsoft Fabric + Azure AI</a:t>
+            </a:r>
+          </a:p>
+          <a:p>
+            <a:pPr algn="l">
+              <a:spcAft>
+                <a:spcPts val="400"/>
+              </a:spcAft>
+            </a:pPr>
+            <a:r>
+              <a:rPr sz="1333" b="0">
+                <a:solidFill>
+                  <a:srgbClr val="B8CFE8"/>
+                </a:solidFill>
+              </a:rPr>
+              <a:t>Foundry. Medallion architecture</a:t>
+            </a:r>
+          </a:p>
+          <a:p>
+            <a:pPr algn="l">
+              <a:spcAft>
+                <a:spcPts val="400"/>
+              </a:spcAft>
+            </a:pPr>
+            <a:r>
+              <a:rPr sz="1333" b="0">
+                <a:solidFill>
+                  <a:srgbClr val="B8CFE8"/>
+                </a:solidFill>
+              </a:rPr>
+              <a:t>(Bronze → Gold) with built-in</a:t>
+            </a:r>
+          </a:p>
+          <a:p>
+            <a:pPr algn="l">
+              <a:spcAft>
+                <a:spcPts val="400"/>
+              </a:spcAft>
+            </a:pPr>
+            <a:r>
+              <a:rPr sz="1333" b="0">
+                <a:solidFill>
+                  <a:srgbClr val="B8CFE8"/>
+                </a:solidFill>
+              </a:rPr>
+              <a:t>governance. Copilot Studio</a:t>
+            </a:r>
+          </a:p>
+          <a:p>
+            <a:pPr algn="l">
+              <a:spcAft>
+                <a:spcPts val="400"/>
+              </a:spcAft>
+            </a:pPr>
+            <a:r>
+              <a:rPr sz="1333" b="0">
+                <a:solidFill>
+                  <a:srgbClr val="B8CFE8"/>
+                </a:solidFill>
+              </a:rPr>
+              <a:t>for natural-language access.</a:t>
+            </a:r>
+          </a:p>
+        </p:txBody>
+      </p:sp>
+      <p:sp>
+        <p:nvSpPr>
+          <p:cNvPr id="19" name="Rounded Rectangle 18"/>
           <p:cNvSpPr/>
           <p:nvPr/>
         </p:nvSpPr>
         <p:spPr>
           <a:xfrm>
-            <a:off x="400000" y="3500000"/>
-            <a:ext cx="11400000" cy="2200000"/>
+            <a:off x="6200000" y="1400000"/>
+            <a:ext cx="2700000" cy="4200000"/>
           </a:xfrm>
           <a:prstGeom prst="roundRect">
             <a:avLst/>
@@ -35023,156 +35184,20 @@
       </p:sp>
       <p:sp>
         <p:nvSpPr>
-          <p:cNvPr id="18" name="TextBox 17"/>
-          <p:cNvSpPr txBox="1"/>
-          <p:nvPr/>
-        </p:nvSpPr>
-        <p:spPr>
-          <a:xfrm>
-            <a:off x="500000" y="3600000"/>
-            <a:ext cx="2700000" cy="350000"/>
-          </a:xfrm>
-          <a:prstGeom prst="rect">
-            <a:avLst/>
-          </a:prstGeom>
-          <a:noFill/>
-        </p:spPr>
-        <p:txBody>
-          <a:bodyPr wrap="square">
-            <a:spAutoFit/>
-          </a:bodyPr>
-          <a:lstStyle/>
-          <a:p>
-            <a:pPr algn="l"/>
-            <a:r>
-              <a:rPr sz="1467" b="1" i="0">
-                <a:solidFill>
-                  <a:srgbClr val="50E6FF"/>
-                </a:solidFill>
-              </a:rPr>
-              <a:t>Use Case</a:t>
-            </a:r>
-          </a:p>
-        </p:txBody>
-      </p:sp>
-      <p:sp>
-        <p:nvSpPr>
-          <p:cNvPr id="19" name="TextBox 18"/>
-          <p:cNvSpPr txBox="1"/>
-          <p:nvPr/>
-        </p:nvSpPr>
-        <p:spPr>
-          <a:xfrm>
-            <a:off x="3350000" y="3600000"/>
-            <a:ext cx="2700000" cy="350000"/>
-          </a:xfrm>
-          <a:prstGeom prst="rect">
-            <a:avLst/>
-          </a:prstGeom>
-          <a:noFill/>
-        </p:spPr>
-        <p:txBody>
-          <a:bodyPr wrap="square">
-            <a:spAutoFit/>
-          </a:bodyPr>
-          <a:lstStyle/>
-          <a:p>
-            <a:pPr algn="l"/>
-            <a:r>
-              <a:rPr sz="1467" b="1" i="0">
-                <a:solidFill>
-                  <a:srgbClr val="50E6FF"/>
-                </a:solidFill>
-              </a:rPr>
-              <a:t>Key Metric</a:t>
-            </a:r>
-          </a:p>
-        </p:txBody>
-      </p:sp>
-      <p:sp>
-        <p:nvSpPr>
-          <p:cNvPr id="20" name="TextBox 19"/>
-          <p:cNvSpPr txBox="1"/>
-          <p:nvPr/>
-        </p:nvSpPr>
-        <p:spPr>
-          <a:xfrm>
-            <a:off x="6200000" y="3600000"/>
-            <a:ext cx="2700000" cy="350000"/>
-          </a:xfrm>
-          <a:prstGeom prst="rect">
-            <a:avLst/>
-          </a:prstGeom>
-          <a:noFill/>
-        </p:spPr>
-        <p:txBody>
-          <a:bodyPr wrap="square">
-            <a:spAutoFit/>
-          </a:bodyPr>
-          <a:lstStyle/>
-          <a:p>
-            <a:pPr algn="l"/>
-            <a:r>
-              <a:rPr sz="1467" b="1" i="0">
-                <a:solidFill>
-                  <a:srgbClr val="50E6FF"/>
-                </a:solidFill>
-              </a:rPr>
-              <a:t>Financial Impact</a:t>
-            </a:r>
-          </a:p>
-        </p:txBody>
-      </p:sp>
-      <p:sp>
-        <p:nvSpPr>
-          <p:cNvPr id="21" name="TextBox 20"/>
-          <p:cNvSpPr txBox="1"/>
-          <p:nvPr/>
-        </p:nvSpPr>
-        <p:spPr>
-          <a:xfrm>
-            <a:off x="9050000" y="3600000"/>
-            <a:ext cx="2700000" cy="350000"/>
-          </a:xfrm>
-          <a:prstGeom prst="rect">
-            <a:avLst/>
-          </a:prstGeom>
-          <a:noFill/>
-        </p:spPr>
-        <p:txBody>
-          <a:bodyPr wrap="square">
-            <a:spAutoFit/>
-          </a:bodyPr>
-          <a:lstStyle/>
-          <a:p>
-            <a:pPr algn="l"/>
-            <a:r>
-              <a:rPr sz="1467" b="1" i="0">
-                <a:solidFill>
-                  <a:srgbClr val="50E6FF"/>
-                </a:solidFill>
-              </a:rPr>
-              <a:t>Time to Value</a:t>
-            </a:r>
-          </a:p>
-        </p:txBody>
-      </p:sp>
-      <p:sp>
-        <p:nvSpPr>
-          <p:cNvPr id="22" name="Rounded Rectangle 21"/>
+          <p:cNvPr id="20" name="Rounded Rectangle 19"/>
           <p:cNvSpPr/>
           <p:nvPr/>
         </p:nvSpPr>
         <p:spPr>
           <a:xfrm>
-            <a:off x="500000" y="3950000"/>
-            <a:ext cx="11100000" cy="3000"/>
+            <a:off x="6200000" y="1400000"/>
+            <a:ext cx="2700000" cy="60000"/>
           </a:xfrm>
           <a:prstGeom prst="roundRect">
             <a:avLst/>
           </a:prstGeom>
           <a:solidFill>
-            <a:srgbClr val="50E6FF"/>
+            <a:srgbClr val="FFB900"/>
           </a:solidFill>
           <a:ln>
             <a:noFill/>
@@ -35202,14 +35227,83 @@
       </p:sp>
       <p:sp>
         <p:nvSpPr>
+          <p:cNvPr id="21" name="TextBox 20"/>
+          <p:cNvSpPr txBox="1"/>
+          <p:nvPr/>
+        </p:nvSpPr>
+        <p:spPr>
+          <a:xfrm>
+            <a:off x="6350000" y="1520000"/>
+            <a:ext cx="2400000" cy="500000"/>
+          </a:xfrm>
+          <a:prstGeom prst="rect">
+            <a:avLst/>
+          </a:prstGeom>
+          <a:noFill/>
+        </p:spPr>
+        <p:txBody>
+          <a:bodyPr wrap="square">
+            <a:spAutoFit/>
+          </a:bodyPr>
+          <a:lstStyle/>
+          <a:p>
+            <a:pPr algn="l"/>
+            <a:r>
+              <a:rPr sz="1600" b="1" i="0">
+                <a:solidFill>
+                  <a:srgbClr val="FFB900"/>
+                </a:solidFill>
+              </a:rPr>
+              <a:t>Automotive
+Domain IP</a:t>
+            </a:r>
+          </a:p>
+        </p:txBody>
+      </p:sp>
+      <p:sp>
+        <p:nvSpPr>
+          <p:cNvPr id="22" name="TextBox 21"/>
+          <p:cNvSpPr txBox="1"/>
+          <p:nvPr/>
+        </p:nvSpPr>
+        <p:spPr>
+          <a:xfrm>
+            <a:off x="6350000" y="2050000"/>
+            <a:ext cx="2400000" cy="250000"/>
+          </a:xfrm>
+          <a:prstGeom prst="rect">
+            <a:avLst/>
+          </a:prstGeom>
+          <a:noFill/>
+        </p:spPr>
+        <p:txBody>
+          <a:bodyPr wrap="square">
+            <a:spAutoFit/>
+          </a:bodyPr>
+          <a:lstStyle/>
+          <a:p>
+            <a:pPr algn="l"/>
+            <a:r>
+              <a:rPr sz="1333" b="1" i="0">
+                <a:solidFill>
+                  <a:srgbClr val="FFB900"/>
+                </a:solidFill>
+              </a:rPr>
+              <a:t>Your Challenge</a:t>
+            </a:r>
+          </a:p>
+        </p:txBody>
+      </p:sp>
+      <p:sp>
+        <p:nvSpPr>
           <p:cNvPr id="23" name="TextBox 22"/>
           <p:cNvSpPr txBox="1"/>
           <p:nvPr/>
         </p:nvSpPr>
         <p:spPr>
           <a:xfrm>
-            <a:off x="500000" y="4050000"/>
-            <a:ext cx="2700000" cy="350000"/>
+            <a:off x="6350000" y="2300000"/>
+            <a:ext cx="2400000" cy="600000"/>
           </a:xfrm>
           <a:prstGeom prst="rect">
             <a:avLst/>
@@ -35222,14 +35316,33 @@
           </a:bodyPr>
           <a:lstStyle/>
           <a:p>
-            <a:pPr algn="l"/>
-            <a:r>
-              <a:rPr sz="1333" b="1" i="0">
-                <a:solidFill>
-                  <a:srgbClr val="0078D4"/>
+            <a:pPr algn="l">
+              <a:spcAft>
+                <a:spcPts val="400"/>
+              </a:spcAft>
+            </a:pPr>
+            <a:r>
+              <a:rPr sz="1333" b="0">
+                <a:solidFill>
+                  <a:srgbClr val="E8F4FD"/>
                 </a:solidFill>
               </a:rPr>
-              <a:t>Demand Forecasting</a:t>
+              <a:t>Generic AI tools don't</a:t>
+            </a:r>
+          </a:p>
+          <a:p>
+            <a:pPr algn="l">
+              <a:spcAft>
+                <a:spcPts val="400"/>
+              </a:spcAft>
+            </a:pPr>
+            <a:r>
+              <a:rPr sz="1333" b="0">
+                <a:solidFill>
+                  <a:srgbClr val="E8F4FD"/>
+                </a:solidFill>
+              </a:rPr>
+              <a:t>understand auto supply chains.</a:t>
             </a:r>
           </a:p>
         </p:txBody>
@@ -35242,8 +35355,8 @@
         </p:nvSpPr>
         <p:spPr>
           <a:xfrm>
-            <a:off x="3350000" y="4050000"/>
-            <a:ext cx="2700000" cy="350000"/>
+            <a:off x="6350000" y="2950000"/>
+            <a:ext cx="2400000" cy="250000"/>
           </a:xfrm>
           <a:prstGeom prst="rect">
             <a:avLst/>
@@ -35258,12 +35371,12 @@
           <a:p>
             <a:pPr algn="l"/>
             <a:r>
-              <a:rPr sz="1333" b="0" i="0">
-                <a:solidFill>
-                  <a:srgbClr val="B8CFE8"/>
+              <a:rPr sz="1333" b="1" i="0">
+                <a:solidFill>
+                  <a:srgbClr val="00B294"/>
                 </a:solidFill>
               </a:rPr>
-              <a:t>30-40% ↓ forecast error</a:t>
+              <a:t>What We Bring</a:t>
             </a:r>
           </a:p>
         </p:txBody>
@@ -35276,8 +35389,8 @@
         </p:nvSpPr>
         <p:spPr>
           <a:xfrm>
-            <a:off x="6200000" y="4050000"/>
-            <a:ext cx="2700000" cy="350000"/>
+            <a:off x="6350000" y="3200000"/>
+            <a:ext cx="2400000" cy="2200000"/>
           </a:xfrm>
           <a:prstGeom prst="rect">
             <a:avLst/>
@@ -35290,28 +35403,178 @@
           </a:bodyPr>
           <a:lstStyle/>
           <a:p>
-            <a:pPr algn="l"/>
-            <a:r>
-              <a:rPr sz="1333" b="0" i="0">
+            <a:pPr algn="l">
+              <a:spcAft>
+                <a:spcPts val="400"/>
+              </a:spcAft>
+            </a:pPr>
+            <a:r>
+              <a:rPr sz="1333" b="0">
                 <a:solidFill>
                   <a:srgbClr val="B8CFE8"/>
                 </a:solidFill>
               </a:rPr>
-              <a:t>$1.3-3.3M freed/depot</a:t>
-            </a:r>
-          </a:p>
-        </p:txBody>
-      </p:sp>
-      <p:sp>
-        <p:nvSpPr>
-          <p:cNvPr id="26" name="TextBox 25"/>
+              <a:t>Pre-trained models for parts</a:t>
+            </a:r>
+          </a:p>
+          <a:p>
+            <a:pPr algn="l">
+              <a:spcAft>
+                <a:spcPts val="400"/>
+              </a:spcAft>
+            </a:pPr>
+            <a:r>
+              <a:rPr sz="1333" b="0">
+                <a:solidFill>
+                  <a:srgbClr val="B8CFE8"/>
+                </a:solidFill>
+              </a:rPr>
+              <a:t>demand, dealer ordering</a:t>
+            </a:r>
+          </a:p>
+          <a:p>
+            <a:pPr algn="l">
+              <a:spcAft>
+                <a:spcPts val="400"/>
+              </a:spcAft>
+            </a:pPr>
+            <a:r>
+              <a:rPr sz="1333" b="0">
+                <a:solidFill>
+                  <a:srgbClr val="B8CFE8"/>
+                </a:solidFill>
+              </a:rPr>
+              <a:t>patterns &amp; logistics across</a:t>
+            </a:r>
+          </a:p>
+          <a:p>
+            <a:pPr algn="l">
+              <a:spcAft>
+                <a:spcPts val="400"/>
+              </a:spcAft>
+            </a:pPr>
+            <a:r>
+              <a:rPr sz="1333" b="0">
+                <a:solidFill>
+                  <a:srgbClr val="B8CFE8"/>
+                </a:solidFill>
+              </a:rPr>
+              <a:t>AU geography. Calibrated on</a:t>
+            </a:r>
+          </a:p>
+          <a:p>
+            <a:pPr algn="l">
+              <a:spcAft>
+                <a:spcPts val="400"/>
+              </a:spcAft>
+            </a:pPr>
+            <a:r>
+              <a:rPr sz="1333" b="0">
+                <a:solidFill>
+                  <a:srgbClr val="B8CFE8"/>
+                </a:solidFill>
+              </a:rPr>
+              <a:t>automotive-specific KPIs.</a:t>
+            </a:r>
+          </a:p>
+        </p:txBody>
+      </p:sp>
+      <p:sp>
+        <p:nvSpPr>
+          <p:cNvPr id="26" name="Rounded Rectangle 25"/>
+          <p:cNvSpPr/>
+          <p:nvPr/>
+        </p:nvSpPr>
+        <p:spPr>
+          <a:xfrm>
+            <a:off x="9100000" y="1400000"/>
+            <a:ext cx="2700000" cy="4200000"/>
+          </a:xfrm>
+          <a:prstGeom prst="roundRect">
+            <a:avLst/>
+          </a:prstGeom>
+          <a:solidFill>
+            <a:srgbClr val="0F1F38"/>
+          </a:solidFill>
+          <a:ln>
+            <a:noFill/>
+          </a:ln>
+        </p:spPr>
+        <p:style>
+          <a:lnRef idx="1">
+            <a:schemeClr val="accent1"/>
+          </a:lnRef>
+          <a:fillRef idx="3">
+            <a:schemeClr val="accent1"/>
+          </a:fillRef>
+          <a:effectRef idx="2">
+            <a:schemeClr val="accent1"/>
+          </a:effectRef>
+          <a:fontRef idx="minor">
+            <a:schemeClr val="lt1"/>
+          </a:fontRef>
+        </p:style>
+        <p:txBody>
+          <a:bodyPr rtlCol="0" anchor="ctr"/>
+          <a:lstStyle/>
+          <a:p>
+            <a:pPr algn="ctr"/>
+          </a:p>
+        </p:txBody>
+      </p:sp>
+      <p:sp>
+        <p:nvSpPr>
+          <p:cNvPr id="27" name="Rounded Rectangle 26"/>
+          <p:cNvSpPr/>
+          <p:nvPr/>
+        </p:nvSpPr>
+        <p:spPr>
+          <a:xfrm>
+            <a:off x="9100000" y="1400000"/>
+            <a:ext cx="2700000" cy="60000"/>
+          </a:xfrm>
+          <a:prstGeom prst="roundRect">
+            <a:avLst/>
+          </a:prstGeom>
+          <a:solidFill>
+            <a:srgbClr val="FF8C00"/>
+          </a:solidFill>
+          <a:ln>
+            <a:noFill/>
+          </a:ln>
+        </p:spPr>
+        <p:style>
+          <a:lnRef idx="1">
+            <a:schemeClr val="accent1"/>
+          </a:lnRef>
+          <a:fillRef idx="3">
+            <a:schemeClr val="accent1"/>
+          </a:fillRef>
+          <a:effectRef idx="2">
+            <a:schemeClr val="accent1"/>
+          </a:effectRef>
+          <a:fontRef idx="minor">
+            <a:schemeClr val="lt1"/>
+          </a:fontRef>
+        </p:style>
+        <p:txBody>
+          <a:bodyPr rtlCol="0" anchor="ctr"/>
+          <a:lstStyle/>
+          <a:p>
+            <a:pPr algn="ctr"/>
+          </a:p>
+        </p:txBody>
+      </p:sp>
+      <p:sp>
+        <p:nvSpPr>
+          <p:cNvPr id="28" name="TextBox 27"/>
           <p:cNvSpPr txBox="1"/>
           <p:nvPr/>
         </p:nvSpPr>
         <p:spPr>
           <a:xfrm>
-            <a:off x="9050000" y="4050000"/>
-            <a:ext cx="2700000" cy="350000"/>
+            <a:off x="9250000" y="1520000"/>
+            <a:ext cx="2400000" cy="500000"/>
           </a:xfrm>
           <a:prstGeom prst="rect">
             <a:avLst/>
@@ -35326,26 +35589,27 @@
           <a:p>
             <a:pPr algn="l"/>
             <a:r>
-              <a:rPr sz="1333" b="0" i="0">
-                <a:solidFill>
-                  <a:srgbClr val="B8CFE8"/>
+              <a:rPr sz="1600" b="1" i="0">
+                <a:solidFill>
+                  <a:srgbClr val="FF8C00"/>
                 </a:solidFill>
               </a:rPr>
-              <a:t>8 weeks</a:t>
-            </a:r>
-          </a:p>
-        </p:txBody>
-      </p:sp>
-      <p:sp>
-        <p:nvSpPr>
-          <p:cNvPr id="27" name="TextBox 26"/>
+              <a:t>Rapid Time
+to Value</a:t>
+            </a:r>
+          </a:p>
+        </p:txBody>
+      </p:sp>
+      <p:sp>
+        <p:nvSpPr>
+          <p:cNvPr id="29" name="TextBox 28"/>
           <p:cNvSpPr txBox="1"/>
           <p:nvPr/>
         </p:nvSpPr>
         <p:spPr>
           <a:xfrm>
-            <a:off x="500000" y="4450000"/>
-            <a:ext cx="2700000" cy="350000"/>
+            <a:off x="9250000" y="2050000"/>
+            <a:ext cx="2400000" cy="250000"/>
           </a:xfrm>
           <a:prstGeom prst="rect">
             <a:avLst/>
@@ -35365,21 +35629,21 @@
                   <a:srgbClr val="FFB900"/>
                 </a:solidFill>
               </a:rPr>
-              <a:t>Inventory Optimisation</a:t>
-            </a:r>
-          </a:p>
-        </p:txBody>
-      </p:sp>
-      <p:sp>
-        <p:nvSpPr>
-          <p:cNvPr id="28" name="TextBox 27"/>
+              <a:t>Your Challenge</a:t>
+            </a:r>
+          </a:p>
+        </p:txBody>
+      </p:sp>
+      <p:sp>
+        <p:nvSpPr>
+          <p:cNvPr id="30" name="TextBox 29"/>
           <p:cNvSpPr txBox="1"/>
           <p:nvPr/>
         </p:nvSpPr>
         <p:spPr>
           <a:xfrm>
-            <a:off x="3350000" y="4450000"/>
-            <a:ext cx="2700000" cy="350000"/>
+            <a:off x="9250000" y="2300000"/>
+            <a:ext cx="2400000" cy="600000"/>
           </a:xfrm>
           <a:prstGeom prst="rect">
             <a:avLst/>
@@ -35392,28 +35656,47 @@
           </a:bodyPr>
           <a:lstStyle/>
           <a:p>
-            <a:pPr algn="l"/>
-            <a:r>
-              <a:rPr sz="1333" b="0" i="0">
-                <a:solidFill>
-                  <a:srgbClr val="B8CFE8"/>
+            <a:pPr algn="l">
+              <a:spcAft>
+                <a:spcPts val="400"/>
+              </a:spcAft>
+            </a:pPr>
+            <a:r>
+              <a:rPr sz="1333" b="0">
+                <a:solidFill>
+                  <a:srgbClr val="E8F4FD"/>
                 </a:solidFill>
               </a:rPr>
-              <a:t>25% ↓ excess stock</a:t>
-            </a:r>
-          </a:p>
-        </p:txBody>
-      </p:sp>
-      <p:sp>
-        <p:nvSpPr>
-          <p:cNvPr id="29" name="TextBox 28"/>
+              <a:t>Can't wait 12+ months for</a:t>
+            </a:r>
+          </a:p>
+          <a:p>
+            <a:pPr algn="l">
+              <a:spcAft>
+                <a:spcPts val="400"/>
+              </a:spcAft>
+            </a:pPr>
+            <a:r>
+              <a:rPr sz="1333" b="0">
+                <a:solidFill>
+                  <a:srgbClr val="E8F4FD"/>
+                </a:solidFill>
+              </a:rPr>
+              <a:t>a traditional BI programme.</a:t>
+            </a:r>
+          </a:p>
+        </p:txBody>
+      </p:sp>
+      <p:sp>
+        <p:nvSpPr>
+          <p:cNvPr id="31" name="TextBox 30"/>
           <p:cNvSpPr txBox="1"/>
           <p:nvPr/>
         </p:nvSpPr>
         <p:spPr>
           <a:xfrm>
-            <a:off x="6200000" y="4450000"/>
-            <a:ext cx="2700000" cy="350000"/>
+            <a:off x="9250000" y="2950000"/>
+            <a:ext cx="2400000" cy="250000"/>
           </a:xfrm>
           <a:prstGeom prst="rect">
             <a:avLst/>
@@ -35428,26 +35711,26 @@
           <a:p>
             <a:pPr algn="l"/>
             <a:r>
-              <a:rPr sz="1333" b="0" i="0">
-                <a:solidFill>
-                  <a:srgbClr val="B8CFE8"/>
+              <a:rPr sz="1333" b="1" i="0">
+                <a:solidFill>
+                  <a:srgbClr val="00B294"/>
                 </a:solidFill>
               </a:rPr>
-              <a:t>$2-5.3M saved</a:t>
-            </a:r>
-          </a:p>
-        </p:txBody>
-      </p:sp>
-      <p:sp>
-        <p:nvSpPr>
-          <p:cNvPr id="30" name="TextBox 29"/>
+              <a:t>What We Bring</a:t>
+            </a:r>
+          </a:p>
+        </p:txBody>
+      </p:sp>
+      <p:sp>
+        <p:nvSpPr>
+          <p:cNvPr id="32" name="TextBox 31"/>
           <p:cNvSpPr txBox="1"/>
           <p:nvPr/>
         </p:nvSpPr>
         <p:spPr>
           <a:xfrm>
-            <a:off x="9050000" y="4450000"/>
-            <a:ext cx="2700000" cy="350000"/>
+            <a:off x="9250000" y="3200000"/>
+            <a:ext cx="2400000" cy="2200000"/>
           </a:xfrm>
           <a:prstGeom prst="rect">
             <a:avLst/>
@@ -35460,320 +35743,78 @@
           </a:bodyPr>
           <a:lstStyle/>
           <a:p>
-            <a:pPr algn="l"/>
-            <a:r>
-              <a:rPr sz="1333" b="0" i="0">
+            <a:pPr algn="l">
+              <a:spcAft>
+                <a:spcPts val="400"/>
+              </a:spcAft>
+            </a:pPr>
+            <a:r>
+              <a:rPr sz="1333" b="0">
                 <a:solidFill>
                   <a:srgbClr val="B8CFE8"/>
                 </a:solidFill>
               </a:rPr>
-              <a:t>6 weeks</a:t>
-            </a:r>
-          </a:p>
-        </p:txBody>
-      </p:sp>
-      <p:sp>
-        <p:nvSpPr>
-          <p:cNvPr id="31" name="TextBox 30"/>
-          <p:cNvSpPr txBox="1"/>
-          <p:nvPr/>
-        </p:nvSpPr>
-        <p:spPr>
-          <a:xfrm>
-            <a:off x="500000" y="4850000"/>
-            <a:ext cx="2700000" cy="350000"/>
-          </a:xfrm>
-          <a:prstGeom prst="rect">
-            <a:avLst/>
-          </a:prstGeom>
-          <a:noFill/>
-        </p:spPr>
-        <p:txBody>
-          <a:bodyPr wrap="square">
-            <a:spAutoFit/>
-          </a:bodyPr>
-          <a:lstStyle/>
-          <a:p>
-            <a:pPr algn="l"/>
-            <a:r>
-              <a:rPr sz="1333" b="1" i="0">
-                <a:solidFill>
-                  <a:srgbClr val="00B294"/>
+              <a:t>12-week delivery: first value</a:t>
+            </a:r>
+          </a:p>
+          <a:p>
+            <a:pPr algn="l">
+              <a:spcAft>
+                <a:spcPts val="400"/>
+              </a:spcAft>
+            </a:pPr>
+            <a:r>
+              <a:rPr sz="1333" b="0">
+                <a:solidFill>
+                  <a:srgbClr val="B8CFE8"/>
                 </a:solidFill>
               </a:rPr>
-              <a:t>Supply Planning</a:t>
-            </a:r>
-          </a:p>
-        </p:txBody>
-      </p:sp>
-      <p:sp>
-        <p:nvSpPr>
-          <p:cNvPr id="32" name="TextBox 31"/>
-          <p:cNvSpPr txBox="1"/>
-          <p:nvPr/>
-        </p:nvSpPr>
-        <p:spPr>
-          <a:xfrm>
-            <a:off x="3350000" y="4850000"/>
-            <a:ext cx="2700000" cy="350000"/>
-          </a:xfrm>
-          <a:prstGeom prst="rect">
-            <a:avLst/>
-          </a:prstGeom>
-          <a:noFill/>
-        </p:spPr>
-        <p:txBody>
-          <a:bodyPr wrap="square">
-            <a:spAutoFit/>
-          </a:bodyPr>
-          <a:lstStyle/>
-          <a:p>
-            <a:pPr algn="l"/>
-            <a:r>
-              <a:rPr sz="1333" b="0" i="0">
+              <a:t>at Week 6. Proven accelerators</a:t>
+            </a:r>
+          </a:p>
+          <a:p>
+            <a:pPr algn="l">
+              <a:spcAft>
+                <a:spcPts val="400"/>
+              </a:spcAft>
+            </a:pPr>
+            <a:r>
+              <a:rPr sz="1333" b="0">
                 <a:solidFill>
                   <a:srgbClr val="B8CFE8"/>
                 </a:solidFill>
               </a:rPr>
-              <a:t>40% faster S&amp;OP cycle</a:t>
-            </a:r>
-          </a:p>
-        </p:txBody>
-      </p:sp>
-      <p:sp>
-        <p:nvSpPr>
-          <p:cNvPr id="33" name="TextBox 32"/>
-          <p:cNvSpPr txBox="1"/>
-          <p:nvPr/>
-        </p:nvSpPr>
-        <p:spPr>
-          <a:xfrm>
-            <a:off x="6200000" y="4850000"/>
-            <a:ext cx="2700000" cy="350000"/>
-          </a:xfrm>
-          <a:prstGeom prst="rect">
-            <a:avLst/>
-          </a:prstGeom>
-          <a:noFill/>
-        </p:spPr>
-        <p:txBody>
-          <a:bodyPr wrap="square">
-            <a:spAutoFit/>
-          </a:bodyPr>
-          <a:lstStyle/>
-          <a:p>
-            <a:pPr algn="l"/>
-            <a:r>
-              <a:rPr sz="1333" b="0" i="0">
+              <a:t>for SAP-to-Fabric ingestion.</a:t>
+            </a:r>
+          </a:p>
+          <a:p>
+            <a:pPr algn="l">
+              <a:spcAft>
+                <a:spcPts val="400"/>
+              </a:spcAft>
+            </a:pPr>
+            <a:r>
+              <a:rPr sz="1333" b="0">
                 <a:solidFill>
                   <a:srgbClr val="B8CFE8"/>
                 </a:solidFill>
               </a:rPr>
-              <a:t>$1.3-2.7M risk avoided</a:t>
-            </a:r>
-          </a:p>
-        </p:txBody>
-      </p:sp>
-      <p:sp>
-        <p:nvSpPr>
-          <p:cNvPr id="34" name="TextBox 33"/>
-          <p:cNvSpPr txBox="1"/>
-          <p:nvPr/>
-        </p:nvSpPr>
-        <p:spPr>
-          <a:xfrm>
-            <a:off x="9050000" y="4850000"/>
-            <a:ext cx="2700000" cy="350000"/>
-          </a:xfrm>
-          <a:prstGeom prst="rect">
-            <a:avLst/>
-          </a:prstGeom>
-          <a:noFill/>
-        </p:spPr>
-        <p:txBody>
-          <a:bodyPr wrap="square">
-            <a:spAutoFit/>
-          </a:bodyPr>
-          <a:lstStyle/>
-          <a:p>
-            <a:pPr algn="l"/>
-            <a:r>
-              <a:rPr sz="1333" b="0" i="0">
+              <a:t>POC in 6 weeks with live</a:t>
+            </a:r>
+          </a:p>
+          <a:p>
+            <a:pPr algn="l">
+              <a:spcAft>
+                <a:spcPts val="400"/>
+              </a:spcAft>
+            </a:pPr>
+            <a:r>
+              <a:rPr sz="1333" b="0">
                 <a:solidFill>
                   <a:srgbClr val="B8CFE8"/>
                 </a:solidFill>
               </a:rPr>
-              <a:t>8 weeks</a:t>
-            </a:r>
-          </a:p>
-        </p:txBody>
-      </p:sp>
-      <p:sp>
-        <p:nvSpPr>
-          <p:cNvPr id="35" name="TextBox 34"/>
-          <p:cNvSpPr txBox="1"/>
-          <p:nvPr/>
-        </p:nvSpPr>
-        <p:spPr>
-          <a:xfrm>
-            <a:off x="500000" y="5250000"/>
-            <a:ext cx="2700000" cy="350000"/>
-          </a:xfrm>
-          <a:prstGeom prst="rect">
-            <a:avLst/>
-          </a:prstGeom>
-          <a:noFill/>
-        </p:spPr>
-        <p:txBody>
-          <a:bodyPr wrap="square">
-            <a:spAutoFit/>
-          </a:bodyPr>
-          <a:lstStyle/>
-          <a:p>
-            <a:pPr algn="l"/>
-            <a:r>
-              <a:rPr sz="1333" b="1" i="0">
-                <a:solidFill>
-                  <a:srgbClr val="FF8C00"/>
-                </a:solidFill>
-              </a:rPr>
-              <a:t>Logistics Optimisation</a:t>
-            </a:r>
-          </a:p>
-        </p:txBody>
-      </p:sp>
-      <p:sp>
-        <p:nvSpPr>
-          <p:cNvPr id="36" name="TextBox 35"/>
-          <p:cNvSpPr txBox="1"/>
-          <p:nvPr/>
-        </p:nvSpPr>
-        <p:spPr>
-          <a:xfrm>
-            <a:off x="3350000" y="5250000"/>
-            <a:ext cx="2700000" cy="350000"/>
-          </a:xfrm>
-          <a:prstGeom prst="rect">
-            <a:avLst/>
-          </a:prstGeom>
-          <a:noFill/>
-        </p:spPr>
-        <p:txBody>
-          <a:bodyPr wrap="square">
-            <a:spAutoFit/>
-          </a:bodyPr>
-          <a:lstStyle/>
-          <a:p>
-            <a:pPr algn="l"/>
-            <a:r>
-              <a:rPr sz="1333" b="0" i="0">
-                <a:solidFill>
-                  <a:srgbClr val="B8CFE8"/>
-                </a:solidFill>
-              </a:rPr>
-              <a:t>12% ↓ transport cost</a:t>
-            </a:r>
-          </a:p>
-        </p:txBody>
-      </p:sp>
-      <p:sp>
-        <p:nvSpPr>
-          <p:cNvPr id="37" name="TextBox 36"/>
-          <p:cNvSpPr txBox="1"/>
-          <p:nvPr/>
-        </p:nvSpPr>
-        <p:spPr>
-          <a:xfrm>
-            <a:off x="6200000" y="5250000"/>
-            <a:ext cx="2700000" cy="350000"/>
-          </a:xfrm>
-          <a:prstGeom prst="rect">
-            <a:avLst/>
-          </a:prstGeom>
-          <a:noFill/>
-        </p:spPr>
-        <p:txBody>
-          <a:bodyPr wrap="square">
-            <a:spAutoFit/>
-          </a:bodyPr>
-          <a:lstStyle/>
-          <a:p>
-            <a:pPr algn="l"/>
-            <a:r>
-              <a:rPr sz="1333" b="0" i="0">
-                <a:solidFill>
-                  <a:srgbClr val="B8CFE8"/>
-                </a:solidFill>
-              </a:rPr>
-              <a:t>$3.3-5.3M logistics saved</a:t>
-            </a:r>
-          </a:p>
-        </p:txBody>
-      </p:sp>
-      <p:sp>
-        <p:nvSpPr>
-          <p:cNvPr id="38" name="TextBox 37"/>
-          <p:cNvSpPr txBox="1"/>
-          <p:nvPr/>
-        </p:nvSpPr>
-        <p:spPr>
-          <a:xfrm>
-            <a:off x="9050000" y="5250000"/>
-            <a:ext cx="2700000" cy="350000"/>
-          </a:xfrm>
-          <a:prstGeom prst="rect">
-            <a:avLst/>
-          </a:prstGeom>
-          <a:noFill/>
-        </p:spPr>
-        <p:txBody>
-          <a:bodyPr wrap="square">
-            <a:spAutoFit/>
-          </a:bodyPr>
-          <a:lstStyle/>
-          <a:p>
-            <a:pPr algn="l"/>
-            <a:r>
-              <a:rPr sz="1333" b="0" i="0">
-                <a:solidFill>
-                  <a:srgbClr val="B8CFE8"/>
-                </a:solidFill>
-              </a:rPr>
-              <a:t>10 weeks</a:t>
-            </a:r>
-          </a:p>
-        </p:txBody>
-      </p:sp>
-      <p:sp>
-        <p:nvSpPr>
-          <p:cNvPr id="39" name="TextBox 38"/>
-          <p:cNvSpPr txBox="1"/>
-          <p:nvPr/>
-        </p:nvSpPr>
-        <p:spPr>
-          <a:xfrm>
-            <a:off x="400000" y="5800000"/>
-            <a:ext cx="11400000" cy="300000"/>
-          </a:xfrm>
-          <a:prstGeom prst="rect">
-            <a:avLst/>
-          </a:prstGeom>
-          <a:noFill/>
-        </p:spPr>
-        <p:txBody>
-          <a:bodyPr wrap="square">
-            <a:spAutoFit/>
-          </a:bodyPr>
-          <a:lstStyle/>
-          <a:p>
-            <a:pPr algn="l"/>
-            <a:r>
-              <a:rPr sz="866" i="1">
-                <a:solidFill>
-                  <a:srgbClr val="8099B3"/>
-                </a:solidFill>
-              </a:rPr>
-              <a:t>Estimates based on Toyota AU revenue of AUD $12.95B (FY2025) and 275 dealerships  |  Sources: Toyota AU Annual Report, Gartner, McKinsey</a:t>
+              <a:t>Toyota AU data.</a:t>
             </a:r>
           </a:p>
         </p:txBody>
@@ -35850,7 +35891,7 @@
                   <a:srgbClr val="FFFFFF"/>
                 </a:solidFill>
               </a:rPr>
-              <a:t>Implementation Roadmap</a:t>
+              <a:t>Consolidated ROI &amp; Business Case</a:t>
             </a:r>
           </a:p>
         </p:txBody>
@@ -35884,7 +35925,7 @@
                   <a:srgbClr val="B8CFE8"/>
                 </a:solidFill>
               </a:rPr>
-              <a:t>12-week phased delivery — fast time to first value</a:t>
+              <a:t>Combined impact across all four AI use cases</a:t>
             </a:r>
           </a:p>
         </p:txBody>
@@ -35897,8 +35938,8 @@
         </p:nvSpPr>
         <p:spPr>
           <a:xfrm>
-            <a:off x="546000" y="1500000"/>
-            <a:ext cx="3500000" cy="4000000"/>
+            <a:off x="596000" y="1500000"/>
+            <a:ext cx="2600000" cy="1600000"/>
           </a:xfrm>
           <a:prstGeom prst="roundRect">
             <a:avLst/>
@@ -35934,20 +35975,107 @@
       </p:sp>
       <p:sp>
         <p:nvSpPr>
-          <p:cNvPr id="6" name="Rounded Rectangle 5"/>
+          <p:cNvPr id="6" name="TextBox 5"/>
+          <p:cNvSpPr txBox="1"/>
+          <p:nvPr/>
+        </p:nvSpPr>
+        <p:spPr>
+          <a:xfrm>
+            <a:off x="596000" y="1600000"/>
+            <a:ext cx="2600000" cy="600000"/>
+          </a:xfrm>
+          <a:prstGeom prst="rect">
+            <a:avLst/>
+          </a:prstGeom>
+          <a:noFill/>
+        </p:spPr>
+        <p:txBody>
+          <a:bodyPr wrap="square">
+            <a:spAutoFit/>
+          </a:bodyPr>
+          <a:lstStyle/>
+          <a:p>
+            <a:pPr algn="ctr"/>
+            <a:r>
+              <a:rPr sz="4533" b="1" i="0">
+                <a:solidFill>
+                  <a:srgbClr val="0078D4"/>
+                </a:solidFill>
+              </a:rPr>
+              <a:t>3.2×</a:t>
+            </a:r>
+          </a:p>
+        </p:txBody>
+      </p:sp>
+      <p:sp>
+        <p:nvSpPr>
+          <p:cNvPr id="7" name="TextBox 6"/>
+          <p:cNvSpPr txBox="1"/>
+          <p:nvPr/>
+        </p:nvSpPr>
+        <p:spPr>
+          <a:xfrm>
+            <a:off x="696000" y="2250000"/>
+            <a:ext cx="2400000" cy="700000"/>
+          </a:xfrm>
+          <a:prstGeom prst="rect">
+            <a:avLst/>
+          </a:prstGeom>
+          <a:noFill/>
+        </p:spPr>
+        <p:txBody>
+          <a:bodyPr wrap="square">
+            <a:spAutoFit/>
+          </a:bodyPr>
+          <a:lstStyle/>
+          <a:p>
+            <a:pPr algn="ctr">
+              <a:spcAft>
+                <a:spcPts val="400"/>
+              </a:spcAft>
+            </a:pPr>
+            <a:r>
+              <a:rPr sz="1467" b="0">
+                <a:solidFill>
+                  <a:srgbClr val="B8CFE8"/>
+                </a:solidFill>
+              </a:rPr>
+              <a:t>Overall ROI</a:t>
+            </a:r>
+          </a:p>
+          <a:p>
+            <a:pPr algn="ctr">
+              <a:spcAft>
+                <a:spcPts val="400"/>
+              </a:spcAft>
+            </a:pPr>
+            <a:r>
+              <a:rPr sz="1467" b="0">
+                <a:solidFill>
+                  <a:srgbClr val="B8CFE8"/>
+                </a:solidFill>
+              </a:rPr>
+              <a:t>vs. manual planning</a:t>
+            </a:r>
+          </a:p>
+        </p:txBody>
+      </p:sp>
+      <p:sp>
+        <p:nvSpPr>
+          <p:cNvPr id="8" name="Rounded Rectangle 7"/>
           <p:cNvSpPr/>
           <p:nvPr/>
         </p:nvSpPr>
         <p:spPr>
           <a:xfrm>
-            <a:off x="546000" y="1500000"/>
-            <a:ext cx="3500000" cy="60000"/>
+            <a:off x="3396000" y="1500000"/>
+            <a:ext cx="2600000" cy="1600000"/>
           </a:xfrm>
           <a:prstGeom prst="roundRect">
             <a:avLst/>
           </a:prstGeom>
           <a:solidFill>
-            <a:srgbClr val="0078D4"/>
+            <a:srgbClr val="0F1F38"/>
           </a:solidFill>
           <a:ln>
             <a:noFill/>
@@ -35977,14 +36105,14 @@
       </p:sp>
       <p:sp>
         <p:nvSpPr>
-          <p:cNvPr id="7" name="TextBox 6"/>
+          <p:cNvPr id="9" name="TextBox 8"/>
           <p:cNvSpPr txBox="1"/>
           <p:nvPr/>
         </p:nvSpPr>
         <p:spPr>
           <a:xfrm>
-            <a:off x="696000" y="1650000"/>
-            <a:ext cx="3200000" cy="350000"/>
+            <a:off x="3396000" y="1600000"/>
+            <a:ext cx="2600000" cy="600000"/>
           </a:xfrm>
           <a:prstGeom prst="rect">
             <a:avLst/>
@@ -35997,28 +36125,28 @@
           </a:bodyPr>
           <a:lstStyle/>
           <a:p>
-            <a:pPr algn="l"/>
-            <a:r>
-              <a:rPr sz="1467" b="1" i="0">
-                <a:solidFill>
-                  <a:srgbClr val="0078D4"/>
+            <a:pPr algn="ctr"/>
+            <a:r>
+              <a:rPr sz="4533" b="1" i="0">
+                <a:solidFill>
+                  <a:srgbClr val="FFB900"/>
                 </a:solidFill>
               </a:rPr>
-              <a:t>Phase 1  |  Weeks 1–4</a:t>
-            </a:r>
-          </a:p>
-        </p:txBody>
-      </p:sp>
-      <p:sp>
-        <p:nvSpPr>
-          <p:cNvPr id="8" name="TextBox 7"/>
+              <a:t>$10-17M</a:t>
+            </a:r>
+          </a:p>
+        </p:txBody>
+      </p:sp>
+      <p:sp>
+        <p:nvSpPr>
+          <p:cNvPr id="10" name="TextBox 9"/>
           <p:cNvSpPr txBox="1"/>
           <p:nvPr/>
         </p:nvSpPr>
         <p:spPr>
           <a:xfrm>
-            <a:off x="696000" y="2000000"/>
-            <a:ext cx="3200000" cy="400000"/>
+            <a:off x="3496000" y="2250000"/>
+            <a:ext cx="2400000" cy="700000"/>
           </a:xfrm>
           <a:prstGeom prst="rect">
             <a:avLst/>
@@ -36031,117 +36159,53 @@
           </a:bodyPr>
           <a:lstStyle/>
           <a:p>
-            <a:pPr algn="l"/>
-            <a:r>
-              <a:rPr sz="1600" b="1" i="0">
-                <a:solidFill>
-                  <a:srgbClr val="FFFFFF"/>
-                </a:solidFill>
-              </a:rPr>
-              <a:t>Data Foundation</a:t>
-            </a:r>
-          </a:p>
-        </p:txBody>
-      </p:sp>
-      <p:sp>
-        <p:nvSpPr>
-          <p:cNvPr id="9" name="TextBox 8"/>
-          <p:cNvSpPr txBox="1"/>
-          <p:nvPr/>
-        </p:nvSpPr>
-        <p:spPr>
-          <a:xfrm>
-            <a:off x="696000" y="2500000"/>
-            <a:ext cx="3200000" cy="2800000"/>
-          </a:xfrm>
-          <a:prstGeom prst="rect">
-            <a:avLst/>
-          </a:prstGeom>
-          <a:noFill/>
-        </p:spPr>
-        <p:txBody>
-          <a:bodyPr wrap="square">
-            <a:spAutoFit/>
-          </a:bodyPr>
-          <a:lstStyle/>
-          <a:p>
-            <a:pPr algn="l">
+            <a:pPr algn="ctr">
               <a:spcAft>
                 <a:spcPts val="400"/>
               </a:spcAft>
             </a:pPr>
             <a:r>
-              <a:rPr sz="1333" b="0">
+              <a:rPr sz="1467" b="0">
                 <a:solidFill>
                   <a:srgbClr val="B8CFE8"/>
                 </a:solidFill>
               </a:rPr>
-              <a:t>  SAP connector setup (ODP/BAPI)</a:t>
-            </a:r>
-          </a:p>
-          <a:p>
-            <a:pPr algn="l">
+              <a:t>Annual savings</a:t>
+            </a:r>
+          </a:p>
+          <a:p>
+            <a:pPr algn="ctr">
               <a:spcAft>
                 <a:spcPts val="400"/>
               </a:spcAft>
             </a:pPr>
             <a:r>
-              <a:rPr sz="1333" b="0">
+              <a:rPr sz="1467" b="0">
                 <a:solidFill>
                   <a:srgbClr val="B8CFE8"/>
                 </a:solidFill>
               </a:rPr>
-              <a:t>  Fabric Lakehouse provisioning</a:t>
-            </a:r>
-          </a:p>
-          <a:p>
-            <a:pPr algn="l">
-              <a:spcAft>
-                <a:spcPts val="400"/>
-              </a:spcAft>
-            </a:pPr>
-            <a:r>
-              <a:rPr sz="1333" b="0">
-                <a:solidFill>
-                  <a:srgbClr val="B8CFE8"/>
-                </a:solidFill>
-              </a:rPr>
-              <a:t>  Bronze/Silver/Gold zone build</a:t>
-            </a:r>
-          </a:p>
-          <a:p>
-            <a:pPr algn="l">
-              <a:spcAft>
-                <a:spcPts val="400"/>
-              </a:spcAft>
-            </a:pPr>
-            <a:r>
-              <a:rPr sz="1333" b="0">
-                <a:solidFill>
-                  <a:srgbClr val="B8CFE8"/>
-                </a:solidFill>
-              </a:rPr>
-              <a:t>  Data quality &amp; governance setup</a:t>
-            </a:r>
-          </a:p>
-        </p:txBody>
-      </p:sp>
-      <p:sp>
-        <p:nvSpPr>
-          <p:cNvPr id="10" name="Chevron 9"/>
+              <a:t>across supply chain</a:t>
+            </a:r>
+          </a:p>
+        </p:txBody>
+      </p:sp>
+      <p:sp>
+        <p:nvSpPr>
+          <p:cNvPr id="11" name="Rounded Rectangle 10"/>
           <p:cNvSpPr/>
           <p:nvPr/>
         </p:nvSpPr>
         <p:spPr>
           <a:xfrm>
-            <a:off x="4076000" y="3000000"/>
-            <a:ext cx="240000" cy="500000"/>
-          </a:xfrm>
-          <a:prstGeom prst="chevron">
+            <a:off x="6196000" y="1500000"/>
+            <a:ext cx="2600000" cy="1600000"/>
+          </a:xfrm>
+          <a:prstGeom prst="roundRect">
             <a:avLst/>
           </a:prstGeom>
           <a:solidFill>
-            <a:srgbClr val="0078D4"/>
+            <a:srgbClr val="0F1F38"/>
           </a:solidFill>
           <a:ln>
             <a:noFill/>
@@ -36171,14 +36235,101 @@
       </p:sp>
       <p:sp>
         <p:nvSpPr>
-          <p:cNvPr id="11" name="Rounded Rectangle 10"/>
+          <p:cNvPr id="12" name="TextBox 11"/>
+          <p:cNvSpPr txBox="1"/>
+          <p:nvPr/>
+        </p:nvSpPr>
+        <p:spPr>
+          <a:xfrm>
+            <a:off x="6196000" y="1600000"/>
+            <a:ext cx="2600000" cy="600000"/>
+          </a:xfrm>
+          <a:prstGeom prst="rect">
+            <a:avLst/>
+          </a:prstGeom>
+          <a:noFill/>
+        </p:spPr>
+        <p:txBody>
+          <a:bodyPr wrap="square">
+            <a:spAutoFit/>
+          </a:bodyPr>
+          <a:lstStyle/>
+          <a:p>
+            <a:pPr algn="ctr"/>
+            <a:r>
+              <a:rPr sz="4533" b="1" i="0">
+                <a:solidFill>
+                  <a:srgbClr val="00B294"/>
+                </a:solidFill>
+              </a:rPr>
+              <a:t>30-40%</a:t>
+            </a:r>
+          </a:p>
+        </p:txBody>
+      </p:sp>
+      <p:sp>
+        <p:nvSpPr>
+          <p:cNvPr id="13" name="TextBox 12"/>
+          <p:cNvSpPr txBox="1"/>
+          <p:nvPr/>
+        </p:nvSpPr>
+        <p:spPr>
+          <a:xfrm>
+            <a:off x="6296000" y="2250000"/>
+            <a:ext cx="2400000" cy="700000"/>
+          </a:xfrm>
+          <a:prstGeom prst="rect">
+            <a:avLst/>
+          </a:prstGeom>
+          <a:noFill/>
+        </p:spPr>
+        <p:txBody>
+          <a:bodyPr wrap="square">
+            <a:spAutoFit/>
+          </a:bodyPr>
+          <a:lstStyle/>
+          <a:p>
+            <a:pPr algn="ctr">
+              <a:spcAft>
+                <a:spcPts val="400"/>
+              </a:spcAft>
+            </a:pPr>
+            <a:r>
+              <a:rPr sz="1467" b="0">
+                <a:solidFill>
+                  <a:srgbClr val="B8CFE8"/>
+                </a:solidFill>
+              </a:rPr>
+              <a:t>Forecast error</a:t>
+            </a:r>
+          </a:p>
+          <a:p>
+            <a:pPr algn="ctr">
+              <a:spcAft>
+                <a:spcPts val="400"/>
+              </a:spcAft>
+            </a:pPr>
+            <a:r>
+              <a:rPr sz="1467" b="0">
+                <a:solidFill>
+                  <a:srgbClr val="B8CFE8"/>
+                </a:solidFill>
+              </a:rPr>
+              <a:t>reduction (MAPE)</a:t>
+            </a:r>
+          </a:p>
+        </p:txBody>
+      </p:sp>
+      <p:sp>
+        <p:nvSpPr>
+          <p:cNvPr id="14" name="Rounded Rectangle 13"/>
           <p:cNvSpPr/>
           <p:nvPr/>
         </p:nvSpPr>
         <p:spPr>
           <a:xfrm>
-            <a:off x="4346000" y="1500000"/>
-            <a:ext cx="3500000" cy="4000000"/>
+            <a:off x="8996000" y="1500000"/>
+            <a:ext cx="2600000" cy="1600000"/>
           </a:xfrm>
           <a:prstGeom prst="roundRect">
             <a:avLst/>
@@ -36214,20 +36365,107 @@
       </p:sp>
       <p:sp>
         <p:nvSpPr>
-          <p:cNvPr id="12" name="Rounded Rectangle 11"/>
+          <p:cNvPr id="15" name="TextBox 14"/>
+          <p:cNvSpPr txBox="1"/>
+          <p:nvPr/>
+        </p:nvSpPr>
+        <p:spPr>
+          <a:xfrm>
+            <a:off x="8996000" y="1600000"/>
+            <a:ext cx="2600000" cy="600000"/>
+          </a:xfrm>
+          <a:prstGeom prst="rect">
+            <a:avLst/>
+          </a:prstGeom>
+          <a:noFill/>
+        </p:spPr>
+        <p:txBody>
+          <a:bodyPr wrap="square">
+            <a:spAutoFit/>
+          </a:bodyPr>
+          <a:lstStyle/>
+          <a:p>
+            <a:pPr algn="ctr"/>
+            <a:r>
+              <a:rPr sz="4533" b="1" i="0">
+                <a:solidFill>
+                  <a:srgbClr val="FF8C00"/>
+                </a:solidFill>
+              </a:rPr>
+              <a:t>85%+</a:t>
+            </a:r>
+          </a:p>
+        </p:txBody>
+      </p:sp>
+      <p:sp>
+        <p:nvSpPr>
+          <p:cNvPr id="16" name="TextBox 15"/>
+          <p:cNvSpPr txBox="1"/>
+          <p:nvPr/>
+        </p:nvSpPr>
+        <p:spPr>
+          <a:xfrm>
+            <a:off x="9096000" y="2250000"/>
+            <a:ext cx="2400000" cy="700000"/>
+          </a:xfrm>
+          <a:prstGeom prst="rect">
+            <a:avLst/>
+          </a:prstGeom>
+          <a:noFill/>
+        </p:spPr>
+        <p:txBody>
+          <a:bodyPr wrap="square">
+            <a:spAutoFit/>
+          </a:bodyPr>
+          <a:lstStyle/>
+          <a:p>
+            <a:pPr algn="ctr">
+              <a:spcAft>
+                <a:spcPts val="400"/>
+              </a:spcAft>
+            </a:pPr>
+            <a:r>
+              <a:rPr sz="1467" b="0">
+                <a:solidFill>
+                  <a:srgbClr val="B8CFE8"/>
+                </a:solidFill>
+              </a:rPr>
+              <a:t>On-time delivery</a:t>
+            </a:r>
+          </a:p>
+          <a:p>
+            <a:pPr algn="ctr">
+              <a:spcAft>
+                <a:spcPts val="400"/>
+              </a:spcAft>
+            </a:pPr>
+            <a:r>
+              <a:rPr sz="1467" b="0">
+                <a:solidFill>
+                  <a:srgbClr val="B8CFE8"/>
+                </a:solidFill>
+              </a:rPr>
+              <a:t>achievement</a:t>
+            </a:r>
+          </a:p>
+        </p:txBody>
+      </p:sp>
+      <p:sp>
+        <p:nvSpPr>
+          <p:cNvPr id="17" name="Rounded Rectangle 16"/>
           <p:cNvSpPr/>
           <p:nvPr/>
         </p:nvSpPr>
         <p:spPr>
           <a:xfrm>
-            <a:off x="4346000" y="1500000"/>
-            <a:ext cx="3500000" cy="60000"/>
+            <a:off x="400000" y="3500000"/>
+            <a:ext cx="11400000" cy="2200000"/>
           </a:xfrm>
           <a:prstGeom prst="roundRect">
             <a:avLst/>
           </a:prstGeom>
           <a:solidFill>
-            <a:srgbClr val="00B294"/>
+            <a:srgbClr val="0F1F38"/>
           </a:solidFill>
           <a:ln>
             <a:noFill/>
@@ -36257,14 +36495,14 @@
       </p:sp>
       <p:sp>
         <p:nvSpPr>
-          <p:cNvPr id="13" name="TextBox 12"/>
+          <p:cNvPr id="18" name="TextBox 17"/>
           <p:cNvSpPr txBox="1"/>
           <p:nvPr/>
         </p:nvSpPr>
         <p:spPr>
           <a:xfrm>
-            <a:off x="4496000" y="1650000"/>
-            <a:ext cx="3200000" cy="350000"/>
+            <a:off x="500000" y="3600000"/>
+            <a:ext cx="2700000" cy="350000"/>
           </a:xfrm>
           <a:prstGeom prst="rect">
             <a:avLst/>
@@ -36281,24 +36519,24 @@
             <a:r>
               <a:rPr sz="1467" b="1" i="0">
                 <a:solidFill>
-                  <a:srgbClr val="00B294"/>
+                  <a:srgbClr val="50E6FF"/>
                 </a:solidFill>
               </a:rPr>
-              <a:t>Phase 2  |  Weeks 5–8</a:t>
-            </a:r>
-          </a:p>
-        </p:txBody>
-      </p:sp>
-      <p:sp>
-        <p:nvSpPr>
-          <p:cNvPr id="14" name="TextBox 13"/>
+              <a:t>Use Case</a:t>
+            </a:r>
+          </a:p>
+        </p:txBody>
+      </p:sp>
+      <p:sp>
+        <p:nvSpPr>
+          <p:cNvPr id="19" name="TextBox 18"/>
           <p:cNvSpPr txBox="1"/>
           <p:nvPr/>
         </p:nvSpPr>
         <p:spPr>
           <a:xfrm>
-            <a:off x="4496000" y="2000000"/>
-            <a:ext cx="3200000" cy="400000"/>
+            <a:off x="3350000" y="3600000"/>
+            <a:ext cx="2700000" cy="350000"/>
           </a:xfrm>
           <a:prstGeom prst="rect">
             <a:avLst/>
@@ -36313,26 +36551,26 @@
           <a:p>
             <a:pPr algn="l"/>
             <a:r>
-              <a:rPr sz="1600" b="1" i="0">
-                <a:solidFill>
-                  <a:srgbClr val="FFFFFF"/>
+              <a:rPr sz="1467" b="1" i="0">
+                <a:solidFill>
+                  <a:srgbClr val="50E6FF"/>
                 </a:solidFill>
               </a:rPr>
-              <a:t>AI Models &amp; Analytics</a:t>
-            </a:r>
-          </a:p>
-        </p:txBody>
-      </p:sp>
-      <p:sp>
-        <p:nvSpPr>
-          <p:cNvPr id="15" name="TextBox 14"/>
+              <a:t>Key Metric</a:t>
+            </a:r>
+          </a:p>
+        </p:txBody>
+      </p:sp>
+      <p:sp>
+        <p:nvSpPr>
+          <p:cNvPr id="20" name="TextBox 19"/>
           <p:cNvSpPr txBox="1"/>
           <p:nvPr/>
         </p:nvSpPr>
         <p:spPr>
           <a:xfrm>
-            <a:off x="4496000" y="2500000"/>
-            <a:ext cx="3200000" cy="2800000"/>
+            <a:off x="6200000" y="3600000"/>
+            <a:ext cx="2700000" cy="350000"/>
           </a:xfrm>
           <a:prstGeom prst="rect">
             <a:avLst/>
@@ -36345,83 +36583,68 @@
           </a:bodyPr>
           <a:lstStyle/>
           <a:p>
-            <a:pPr algn="l">
-              <a:spcAft>
-                <a:spcPts val="400"/>
-              </a:spcAft>
-            </a:pPr>
-            <a:r>
-              <a:rPr sz="1333" b="0">
-                <a:solidFill>
-                  <a:srgbClr val="B8CFE8"/>
+            <a:pPr algn="l"/>
+            <a:r>
+              <a:rPr sz="1467" b="1" i="0">
+                <a:solidFill>
+                  <a:srgbClr val="50E6FF"/>
                 </a:solidFill>
               </a:rPr>
-              <a:t>  Demand forecasting model training</a:t>
-            </a:r>
-          </a:p>
-          <a:p>
-            <a:pPr algn="l">
-              <a:spcAft>
-                <a:spcPts val="400"/>
-              </a:spcAft>
-            </a:pPr>
-            <a:r>
-              <a:rPr sz="1333" b="0">
-                <a:solidFill>
-                  <a:srgbClr val="B8CFE8"/>
+              <a:t>Financial Impact</a:t>
+            </a:r>
+          </a:p>
+        </p:txBody>
+      </p:sp>
+      <p:sp>
+        <p:nvSpPr>
+          <p:cNvPr id="21" name="TextBox 20"/>
+          <p:cNvSpPr txBox="1"/>
+          <p:nvPr/>
+        </p:nvSpPr>
+        <p:spPr>
+          <a:xfrm>
+            <a:off x="9050000" y="3600000"/>
+            <a:ext cx="2700000" cy="350000"/>
+          </a:xfrm>
+          <a:prstGeom prst="rect">
+            <a:avLst/>
+          </a:prstGeom>
+          <a:noFill/>
+        </p:spPr>
+        <p:txBody>
+          <a:bodyPr wrap="square">
+            <a:spAutoFit/>
+          </a:bodyPr>
+          <a:lstStyle/>
+          <a:p>
+            <a:pPr algn="l"/>
+            <a:r>
+              <a:rPr sz="1467" b="1" i="0">
+                <a:solidFill>
+                  <a:srgbClr val="50E6FF"/>
                 </a:solidFill>
               </a:rPr>
-              <a:t>  Inventory optimization engine</a:t>
-            </a:r>
-          </a:p>
-          <a:p>
-            <a:pPr algn="l">
-              <a:spcAft>
-                <a:spcPts val="400"/>
-              </a:spcAft>
-            </a:pPr>
-            <a:r>
-              <a:rPr sz="1333" b="0">
-                <a:solidFill>
-                  <a:srgbClr val="B8CFE8"/>
-                </a:solidFill>
-              </a:rPr>
-              <a:t>  Supply planning algorithms</a:t>
-            </a:r>
-          </a:p>
-          <a:p>
-            <a:pPr algn="l">
-              <a:spcAft>
-                <a:spcPts val="400"/>
-              </a:spcAft>
-            </a:pPr>
-            <a:r>
-              <a:rPr sz="1333" b="0">
-                <a:solidFill>
-                  <a:srgbClr val="B8CFE8"/>
-                </a:solidFill>
-              </a:rPr>
-              <a:t>  Power BI semantic models</a:t>
-            </a:r>
-          </a:p>
-        </p:txBody>
-      </p:sp>
-      <p:sp>
-        <p:nvSpPr>
-          <p:cNvPr id="16" name="Chevron 15"/>
+              <a:t>Time to Value</a:t>
+            </a:r>
+          </a:p>
+        </p:txBody>
+      </p:sp>
+      <p:sp>
+        <p:nvSpPr>
+          <p:cNvPr id="22" name="Rounded Rectangle 21"/>
           <p:cNvSpPr/>
           <p:nvPr/>
         </p:nvSpPr>
         <p:spPr>
           <a:xfrm>
-            <a:off x="7876000" y="3000000"/>
-            <a:ext cx="240000" cy="500000"/>
-          </a:xfrm>
-          <a:prstGeom prst="chevron">
+            <a:off x="500000" y="3950000"/>
+            <a:ext cx="11100000" cy="3000"/>
+          </a:xfrm>
+          <a:prstGeom prst="roundRect">
             <a:avLst/>
           </a:prstGeom>
           <a:solidFill>
-            <a:srgbClr val="00B294"/>
+            <a:srgbClr val="50E6FF"/>
           </a:solidFill>
           <a:ln>
             <a:noFill/>
@@ -36451,100 +36674,14 @@
       </p:sp>
       <p:sp>
         <p:nvSpPr>
-          <p:cNvPr id="17" name="Rounded Rectangle 16"/>
-          <p:cNvSpPr/>
-          <p:nvPr/>
-        </p:nvSpPr>
-        <p:spPr>
-          <a:xfrm>
-            <a:off x="8146000" y="1500000"/>
-            <a:ext cx="3500000" cy="4000000"/>
-          </a:xfrm>
-          <a:prstGeom prst="roundRect">
-            <a:avLst/>
-          </a:prstGeom>
-          <a:solidFill>
-            <a:srgbClr val="0F1F38"/>
-          </a:solidFill>
-          <a:ln>
-            <a:noFill/>
-          </a:ln>
-        </p:spPr>
-        <p:style>
-          <a:lnRef idx="1">
-            <a:schemeClr val="accent1"/>
-          </a:lnRef>
-          <a:fillRef idx="3">
-            <a:schemeClr val="accent1"/>
-          </a:fillRef>
-          <a:effectRef idx="2">
-            <a:schemeClr val="accent1"/>
-          </a:effectRef>
-          <a:fontRef idx="minor">
-            <a:schemeClr val="lt1"/>
-          </a:fontRef>
-        </p:style>
-        <p:txBody>
-          <a:bodyPr rtlCol="0" anchor="ctr"/>
-          <a:lstStyle/>
-          <a:p>
-            <a:pPr algn="ctr"/>
-          </a:p>
-        </p:txBody>
-      </p:sp>
-      <p:sp>
-        <p:nvSpPr>
-          <p:cNvPr id="18" name="Rounded Rectangle 17"/>
-          <p:cNvSpPr/>
-          <p:nvPr/>
-        </p:nvSpPr>
-        <p:spPr>
-          <a:xfrm>
-            <a:off x="8146000" y="1500000"/>
-            <a:ext cx="3500000" cy="60000"/>
-          </a:xfrm>
-          <a:prstGeom prst="roundRect">
-            <a:avLst/>
-          </a:prstGeom>
-          <a:solidFill>
-            <a:srgbClr val="FFB900"/>
-          </a:solidFill>
-          <a:ln>
-            <a:noFill/>
-          </a:ln>
-        </p:spPr>
-        <p:style>
-          <a:lnRef idx="1">
-            <a:schemeClr val="accent1"/>
-          </a:lnRef>
-          <a:fillRef idx="3">
-            <a:schemeClr val="accent1"/>
-          </a:fillRef>
-          <a:effectRef idx="2">
-            <a:schemeClr val="accent1"/>
-          </a:effectRef>
-          <a:fontRef idx="minor">
-            <a:schemeClr val="lt1"/>
-          </a:fontRef>
-        </p:style>
-        <p:txBody>
-          <a:bodyPr rtlCol="0" anchor="ctr"/>
-          <a:lstStyle/>
-          <a:p>
-            <a:pPr algn="ctr"/>
-          </a:p>
-        </p:txBody>
-      </p:sp>
-      <p:sp>
-        <p:nvSpPr>
-          <p:cNvPr id="19" name="TextBox 18"/>
+          <p:cNvPr id="23" name="TextBox 22"/>
           <p:cNvSpPr txBox="1"/>
           <p:nvPr/>
         </p:nvSpPr>
         <p:spPr>
           <a:xfrm>
-            <a:off x="8296000" y="1650000"/>
-            <a:ext cx="3200000" cy="350000"/>
+            <a:off x="500000" y="4050000"/>
+            <a:ext cx="2700000" cy="350000"/>
           </a:xfrm>
           <a:prstGeom prst="rect">
             <a:avLst/>
@@ -36559,26 +36696,26 @@
           <a:p>
             <a:pPr algn="l"/>
             <a:r>
-              <a:rPr sz="1467" b="1" i="0">
-                <a:solidFill>
-                  <a:srgbClr val="FFB900"/>
+              <a:rPr sz="1333" b="1" i="0">
+                <a:solidFill>
+                  <a:srgbClr val="0078D4"/>
                 </a:solidFill>
               </a:rPr>
-              <a:t>Phase 3  |  Weeks 9–12</a:t>
-            </a:r>
-          </a:p>
-        </p:txBody>
-      </p:sp>
-      <p:sp>
-        <p:nvSpPr>
-          <p:cNvPr id="20" name="TextBox 19"/>
+              <a:t>Demand Forecasting</a:t>
+            </a:r>
+          </a:p>
+        </p:txBody>
+      </p:sp>
+      <p:sp>
+        <p:nvSpPr>
+          <p:cNvPr id="24" name="TextBox 23"/>
           <p:cNvSpPr txBox="1"/>
           <p:nvPr/>
         </p:nvSpPr>
         <p:spPr>
           <a:xfrm>
-            <a:off x="8296000" y="2000000"/>
-            <a:ext cx="3200000" cy="400000"/>
+            <a:off x="3350000" y="4050000"/>
+            <a:ext cx="2700000" cy="350000"/>
           </a:xfrm>
           <a:prstGeom prst="rect">
             <a:avLst/>
@@ -36593,26 +36730,26 @@
           <a:p>
             <a:pPr algn="l"/>
             <a:r>
-              <a:rPr sz="1600" b="1" i="0">
-                <a:solidFill>
-                  <a:srgbClr val="FFFFFF"/>
+              <a:rPr sz="1333" b="0" i="0">
+                <a:solidFill>
+                  <a:srgbClr val="B8CFE8"/>
                 </a:solidFill>
               </a:rPr>
-              <a:t>Agentic AI &amp; Go-Live</a:t>
-            </a:r>
-          </a:p>
-        </p:txBody>
-      </p:sp>
-      <p:sp>
-        <p:nvSpPr>
-          <p:cNvPr id="21" name="TextBox 20"/>
+              <a:t>30-40% ↓ forecast error</a:t>
+            </a:r>
+          </a:p>
+        </p:txBody>
+      </p:sp>
+      <p:sp>
+        <p:nvSpPr>
+          <p:cNvPr id="25" name="TextBox 24"/>
           <p:cNvSpPr txBox="1"/>
           <p:nvPr/>
         </p:nvSpPr>
         <p:spPr>
           <a:xfrm>
-            <a:off x="8296000" y="2500000"/>
-            <a:ext cx="3200000" cy="2800000"/>
+            <a:off x="6200000" y="4050000"/>
+            <a:ext cx="2700000" cy="350000"/>
           </a:xfrm>
           <a:prstGeom prst="rect">
             <a:avLst/>
@@ -36625,120 +36762,28 @@
           </a:bodyPr>
           <a:lstStyle/>
           <a:p>
-            <a:pPr algn="l">
-              <a:spcAft>
-                <a:spcPts val="400"/>
-              </a:spcAft>
-            </a:pPr>
-            <a:r>
-              <a:rPr sz="1333" b="0">
+            <a:pPr algn="l"/>
+            <a:r>
+              <a:rPr sz="1333" b="0" i="0">
                 <a:solidFill>
                   <a:srgbClr val="B8CFE8"/>
                 </a:solidFill>
               </a:rPr>
-              <a:t>  Copilot Studio bot deployment</a:t>
-            </a:r>
-          </a:p>
-          <a:p>
-            <a:pPr algn="l">
-              <a:spcAft>
-                <a:spcPts val="400"/>
-              </a:spcAft>
-            </a:pPr>
-            <a:r>
-              <a:rPr sz="1333" b="0">
-                <a:solidFill>
-                  <a:srgbClr val="B8CFE8"/>
-                </a:solidFill>
-              </a:rPr>
-              <a:t>  Agent orchestration layer</a:t>
-            </a:r>
-          </a:p>
-          <a:p>
-            <a:pPr algn="l">
-              <a:spcAft>
-                <a:spcPts val="400"/>
-              </a:spcAft>
-            </a:pPr>
-            <a:r>
-              <a:rPr sz="1333" b="0">
-                <a:solidFill>
-                  <a:srgbClr val="B8CFE8"/>
-                </a:solidFill>
-              </a:rPr>
-              <a:t>  SAP back-write integration</a:t>
-            </a:r>
-          </a:p>
-          <a:p>
-            <a:pPr algn="l">
-              <a:spcAft>
-                <a:spcPts val="400"/>
-              </a:spcAft>
-            </a:pPr>
-            <a:r>
-              <a:rPr sz="1333" b="0">
-                <a:solidFill>
-                  <a:srgbClr val="B8CFE8"/>
-                </a:solidFill>
-              </a:rPr>
-              <a:t>  UAT, training &amp; go-live</a:t>
-            </a:r>
-          </a:p>
-        </p:txBody>
-      </p:sp>
-      <p:sp>
-        <p:nvSpPr>
-          <p:cNvPr id="22" name="Rounded Rectangle 21"/>
-          <p:cNvSpPr/>
-          <p:nvPr/>
-        </p:nvSpPr>
-        <p:spPr>
-          <a:xfrm>
-            <a:off x="546000" y="5800000"/>
-            <a:ext cx="11100000" cy="550000"/>
-          </a:xfrm>
-          <a:prstGeom prst="roundRect">
-            <a:avLst/>
-          </a:prstGeom>
-          <a:solidFill>
-            <a:srgbClr val="122540"/>
-          </a:solidFill>
-          <a:ln>
-            <a:noFill/>
-          </a:ln>
-        </p:spPr>
-        <p:style>
-          <a:lnRef idx="1">
-            <a:schemeClr val="accent1"/>
-          </a:lnRef>
-          <a:fillRef idx="3">
-            <a:schemeClr val="accent1"/>
-          </a:fillRef>
-          <a:effectRef idx="2">
-            <a:schemeClr val="accent1"/>
-          </a:effectRef>
-          <a:fontRef idx="minor">
-            <a:schemeClr val="lt1"/>
-          </a:fontRef>
-        </p:style>
-        <p:txBody>
-          <a:bodyPr rtlCol="0" anchor="ctr"/>
-          <a:lstStyle/>
-          <a:p>
-            <a:pPr algn="ctr"/>
-          </a:p>
-        </p:txBody>
-      </p:sp>
-      <p:sp>
-        <p:nvSpPr>
-          <p:cNvPr id="23" name="TextBox 22"/>
+              <a:t>$1.3-3.3M freed/depot</a:t>
+            </a:r>
+          </a:p>
+        </p:txBody>
+      </p:sp>
+      <p:sp>
+        <p:nvSpPr>
+          <p:cNvPr id="26" name="TextBox 25"/>
           <p:cNvSpPr txBox="1"/>
           <p:nvPr/>
         </p:nvSpPr>
         <p:spPr>
           <a:xfrm>
-            <a:off x="746000" y="5850000"/>
-            <a:ext cx="10700000" cy="450000"/>
+            <a:off x="9050000" y="4050000"/>
+            <a:ext cx="2700000" cy="350000"/>
           </a:xfrm>
           <a:prstGeom prst="rect">
             <a:avLst/>
@@ -36751,14 +36796,456 @@
           </a:bodyPr>
           <a:lstStyle/>
           <a:p>
-            <a:pPr algn="ctr"/>
+            <a:pPr algn="l"/>
             <a:r>
               <a:rPr sz="1333" b="0" i="0">
                 <a:solidFill>
-                  <a:srgbClr val="E8F4FD"/>
+                  <a:srgbClr val="B8CFE8"/>
                 </a:solidFill>
               </a:rPr>
-              <a:t>First value visible in Week 6 (demand forecast MVP)  ·  Full production by Week 12  ·  Ongoing optimization post go-live</a:t>
+              <a:t>8 weeks</a:t>
+            </a:r>
+          </a:p>
+        </p:txBody>
+      </p:sp>
+      <p:sp>
+        <p:nvSpPr>
+          <p:cNvPr id="27" name="TextBox 26"/>
+          <p:cNvSpPr txBox="1"/>
+          <p:nvPr/>
+        </p:nvSpPr>
+        <p:spPr>
+          <a:xfrm>
+            <a:off x="500000" y="4450000"/>
+            <a:ext cx="2700000" cy="350000"/>
+          </a:xfrm>
+          <a:prstGeom prst="rect">
+            <a:avLst/>
+          </a:prstGeom>
+          <a:noFill/>
+        </p:spPr>
+        <p:txBody>
+          <a:bodyPr wrap="square">
+            <a:spAutoFit/>
+          </a:bodyPr>
+          <a:lstStyle/>
+          <a:p>
+            <a:pPr algn="l"/>
+            <a:r>
+              <a:rPr sz="1333" b="1" i="0">
+                <a:solidFill>
+                  <a:srgbClr val="FFB900"/>
+                </a:solidFill>
+              </a:rPr>
+              <a:t>Inventory Optimisation</a:t>
+            </a:r>
+          </a:p>
+        </p:txBody>
+      </p:sp>
+      <p:sp>
+        <p:nvSpPr>
+          <p:cNvPr id="28" name="TextBox 27"/>
+          <p:cNvSpPr txBox="1"/>
+          <p:nvPr/>
+        </p:nvSpPr>
+        <p:spPr>
+          <a:xfrm>
+            <a:off x="3350000" y="4450000"/>
+            <a:ext cx="2700000" cy="350000"/>
+          </a:xfrm>
+          <a:prstGeom prst="rect">
+            <a:avLst/>
+          </a:prstGeom>
+          <a:noFill/>
+        </p:spPr>
+        <p:txBody>
+          <a:bodyPr wrap="square">
+            <a:spAutoFit/>
+          </a:bodyPr>
+          <a:lstStyle/>
+          <a:p>
+            <a:pPr algn="l"/>
+            <a:r>
+              <a:rPr sz="1333" b="0" i="0">
+                <a:solidFill>
+                  <a:srgbClr val="B8CFE8"/>
+                </a:solidFill>
+              </a:rPr>
+              <a:t>25% ↓ excess stock</a:t>
+            </a:r>
+          </a:p>
+        </p:txBody>
+      </p:sp>
+      <p:sp>
+        <p:nvSpPr>
+          <p:cNvPr id="29" name="TextBox 28"/>
+          <p:cNvSpPr txBox="1"/>
+          <p:nvPr/>
+        </p:nvSpPr>
+        <p:spPr>
+          <a:xfrm>
+            <a:off x="6200000" y="4450000"/>
+            <a:ext cx="2700000" cy="350000"/>
+          </a:xfrm>
+          <a:prstGeom prst="rect">
+            <a:avLst/>
+          </a:prstGeom>
+          <a:noFill/>
+        </p:spPr>
+        <p:txBody>
+          <a:bodyPr wrap="square">
+            <a:spAutoFit/>
+          </a:bodyPr>
+          <a:lstStyle/>
+          <a:p>
+            <a:pPr algn="l"/>
+            <a:r>
+              <a:rPr sz="1333" b="0" i="0">
+                <a:solidFill>
+                  <a:srgbClr val="B8CFE8"/>
+                </a:solidFill>
+              </a:rPr>
+              <a:t>$2-5.3M saved</a:t>
+            </a:r>
+          </a:p>
+        </p:txBody>
+      </p:sp>
+      <p:sp>
+        <p:nvSpPr>
+          <p:cNvPr id="30" name="TextBox 29"/>
+          <p:cNvSpPr txBox="1"/>
+          <p:nvPr/>
+        </p:nvSpPr>
+        <p:spPr>
+          <a:xfrm>
+            <a:off x="9050000" y="4450000"/>
+            <a:ext cx="2700000" cy="350000"/>
+          </a:xfrm>
+          <a:prstGeom prst="rect">
+            <a:avLst/>
+          </a:prstGeom>
+          <a:noFill/>
+        </p:spPr>
+        <p:txBody>
+          <a:bodyPr wrap="square">
+            <a:spAutoFit/>
+          </a:bodyPr>
+          <a:lstStyle/>
+          <a:p>
+            <a:pPr algn="l"/>
+            <a:r>
+              <a:rPr sz="1333" b="0" i="0">
+                <a:solidFill>
+                  <a:srgbClr val="B8CFE8"/>
+                </a:solidFill>
+              </a:rPr>
+              <a:t>6 weeks</a:t>
+            </a:r>
+          </a:p>
+        </p:txBody>
+      </p:sp>
+      <p:sp>
+        <p:nvSpPr>
+          <p:cNvPr id="31" name="TextBox 30"/>
+          <p:cNvSpPr txBox="1"/>
+          <p:nvPr/>
+        </p:nvSpPr>
+        <p:spPr>
+          <a:xfrm>
+            <a:off x="500000" y="4850000"/>
+            <a:ext cx="2700000" cy="350000"/>
+          </a:xfrm>
+          <a:prstGeom prst="rect">
+            <a:avLst/>
+          </a:prstGeom>
+          <a:noFill/>
+        </p:spPr>
+        <p:txBody>
+          <a:bodyPr wrap="square">
+            <a:spAutoFit/>
+          </a:bodyPr>
+          <a:lstStyle/>
+          <a:p>
+            <a:pPr algn="l"/>
+            <a:r>
+              <a:rPr sz="1333" b="1" i="0">
+                <a:solidFill>
+                  <a:srgbClr val="00B294"/>
+                </a:solidFill>
+              </a:rPr>
+              <a:t>Supply Planning</a:t>
+            </a:r>
+          </a:p>
+        </p:txBody>
+      </p:sp>
+      <p:sp>
+        <p:nvSpPr>
+          <p:cNvPr id="32" name="TextBox 31"/>
+          <p:cNvSpPr txBox="1"/>
+          <p:nvPr/>
+        </p:nvSpPr>
+        <p:spPr>
+          <a:xfrm>
+            <a:off x="3350000" y="4850000"/>
+            <a:ext cx="2700000" cy="350000"/>
+          </a:xfrm>
+          <a:prstGeom prst="rect">
+            <a:avLst/>
+          </a:prstGeom>
+          <a:noFill/>
+        </p:spPr>
+        <p:txBody>
+          <a:bodyPr wrap="square">
+            <a:spAutoFit/>
+          </a:bodyPr>
+          <a:lstStyle/>
+          <a:p>
+            <a:pPr algn="l"/>
+            <a:r>
+              <a:rPr sz="1333" b="0" i="0">
+                <a:solidFill>
+                  <a:srgbClr val="B8CFE8"/>
+                </a:solidFill>
+              </a:rPr>
+              <a:t>40% faster S&amp;OP cycle</a:t>
+            </a:r>
+          </a:p>
+        </p:txBody>
+      </p:sp>
+      <p:sp>
+        <p:nvSpPr>
+          <p:cNvPr id="33" name="TextBox 32"/>
+          <p:cNvSpPr txBox="1"/>
+          <p:nvPr/>
+        </p:nvSpPr>
+        <p:spPr>
+          <a:xfrm>
+            <a:off x="6200000" y="4850000"/>
+            <a:ext cx="2700000" cy="350000"/>
+          </a:xfrm>
+          <a:prstGeom prst="rect">
+            <a:avLst/>
+          </a:prstGeom>
+          <a:noFill/>
+        </p:spPr>
+        <p:txBody>
+          <a:bodyPr wrap="square">
+            <a:spAutoFit/>
+          </a:bodyPr>
+          <a:lstStyle/>
+          <a:p>
+            <a:pPr algn="l"/>
+            <a:r>
+              <a:rPr sz="1333" b="0" i="0">
+                <a:solidFill>
+                  <a:srgbClr val="B8CFE8"/>
+                </a:solidFill>
+              </a:rPr>
+              <a:t>$1.3-2.7M risk avoided</a:t>
+            </a:r>
+          </a:p>
+        </p:txBody>
+      </p:sp>
+      <p:sp>
+        <p:nvSpPr>
+          <p:cNvPr id="34" name="TextBox 33"/>
+          <p:cNvSpPr txBox="1"/>
+          <p:nvPr/>
+        </p:nvSpPr>
+        <p:spPr>
+          <a:xfrm>
+            <a:off x="9050000" y="4850000"/>
+            <a:ext cx="2700000" cy="350000"/>
+          </a:xfrm>
+          <a:prstGeom prst="rect">
+            <a:avLst/>
+          </a:prstGeom>
+          <a:noFill/>
+        </p:spPr>
+        <p:txBody>
+          <a:bodyPr wrap="square">
+            <a:spAutoFit/>
+          </a:bodyPr>
+          <a:lstStyle/>
+          <a:p>
+            <a:pPr algn="l"/>
+            <a:r>
+              <a:rPr sz="1333" b="0" i="0">
+                <a:solidFill>
+                  <a:srgbClr val="B8CFE8"/>
+                </a:solidFill>
+              </a:rPr>
+              <a:t>8 weeks</a:t>
+            </a:r>
+          </a:p>
+        </p:txBody>
+      </p:sp>
+      <p:sp>
+        <p:nvSpPr>
+          <p:cNvPr id="35" name="TextBox 34"/>
+          <p:cNvSpPr txBox="1"/>
+          <p:nvPr/>
+        </p:nvSpPr>
+        <p:spPr>
+          <a:xfrm>
+            <a:off x="500000" y="5250000"/>
+            <a:ext cx="2700000" cy="350000"/>
+          </a:xfrm>
+          <a:prstGeom prst="rect">
+            <a:avLst/>
+          </a:prstGeom>
+          <a:noFill/>
+        </p:spPr>
+        <p:txBody>
+          <a:bodyPr wrap="square">
+            <a:spAutoFit/>
+          </a:bodyPr>
+          <a:lstStyle/>
+          <a:p>
+            <a:pPr algn="l"/>
+            <a:r>
+              <a:rPr sz="1333" b="1" i="0">
+                <a:solidFill>
+                  <a:srgbClr val="FF8C00"/>
+                </a:solidFill>
+              </a:rPr>
+              <a:t>Logistics Optimisation</a:t>
+            </a:r>
+          </a:p>
+        </p:txBody>
+      </p:sp>
+      <p:sp>
+        <p:nvSpPr>
+          <p:cNvPr id="36" name="TextBox 35"/>
+          <p:cNvSpPr txBox="1"/>
+          <p:nvPr/>
+        </p:nvSpPr>
+        <p:spPr>
+          <a:xfrm>
+            <a:off x="3350000" y="5250000"/>
+            <a:ext cx="2700000" cy="350000"/>
+          </a:xfrm>
+          <a:prstGeom prst="rect">
+            <a:avLst/>
+          </a:prstGeom>
+          <a:noFill/>
+        </p:spPr>
+        <p:txBody>
+          <a:bodyPr wrap="square">
+            <a:spAutoFit/>
+          </a:bodyPr>
+          <a:lstStyle/>
+          <a:p>
+            <a:pPr algn="l"/>
+            <a:r>
+              <a:rPr sz="1333" b="0" i="0">
+                <a:solidFill>
+                  <a:srgbClr val="B8CFE8"/>
+                </a:solidFill>
+              </a:rPr>
+              <a:t>12% ↓ transport cost</a:t>
+            </a:r>
+          </a:p>
+        </p:txBody>
+      </p:sp>
+      <p:sp>
+        <p:nvSpPr>
+          <p:cNvPr id="37" name="TextBox 36"/>
+          <p:cNvSpPr txBox="1"/>
+          <p:nvPr/>
+        </p:nvSpPr>
+        <p:spPr>
+          <a:xfrm>
+            <a:off x="6200000" y="5250000"/>
+            <a:ext cx="2700000" cy="350000"/>
+          </a:xfrm>
+          <a:prstGeom prst="rect">
+            <a:avLst/>
+          </a:prstGeom>
+          <a:noFill/>
+        </p:spPr>
+        <p:txBody>
+          <a:bodyPr wrap="square">
+            <a:spAutoFit/>
+          </a:bodyPr>
+          <a:lstStyle/>
+          <a:p>
+            <a:pPr algn="l"/>
+            <a:r>
+              <a:rPr sz="1333" b="0" i="0">
+                <a:solidFill>
+                  <a:srgbClr val="B8CFE8"/>
+                </a:solidFill>
+              </a:rPr>
+              <a:t>$3.3-5.3M logistics saved</a:t>
+            </a:r>
+          </a:p>
+        </p:txBody>
+      </p:sp>
+      <p:sp>
+        <p:nvSpPr>
+          <p:cNvPr id="38" name="TextBox 37"/>
+          <p:cNvSpPr txBox="1"/>
+          <p:nvPr/>
+        </p:nvSpPr>
+        <p:spPr>
+          <a:xfrm>
+            <a:off x="9050000" y="5250000"/>
+            <a:ext cx="2700000" cy="350000"/>
+          </a:xfrm>
+          <a:prstGeom prst="rect">
+            <a:avLst/>
+          </a:prstGeom>
+          <a:noFill/>
+        </p:spPr>
+        <p:txBody>
+          <a:bodyPr wrap="square">
+            <a:spAutoFit/>
+          </a:bodyPr>
+          <a:lstStyle/>
+          <a:p>
+            <a:pPr algn="l"/>
+            <a:r>
+              <a:rPr sz="1333" b="0" i="0">
+                <a:solidFill>
+                  <a:srgbClr val="B8CFE8"/>
+                </a:solidFill>
+              </a:rPr>
+              <a:t>10 weeks</a:t>
+            </a:r>
+          </a:p>
+        </p:txBody>
+      </p:sp>
+      <p:sp>
+        <p:nvSpPr>
+          <p:cNvPr id="39" name="TextBox 38"/>
+          <p:cNvSpPr txBox="1"/>
+          <p:nvPr/>
+        </p:nvSpPr>
+        <p:spPr>
+          <a:xfrm>
+            <a:off x="400000" y="5800000"/>
+            <a:ext cx="11400000" cy="300000"/>
+          </a:xfrm>
+          <a:prstGeom prst="rect">
+            <a:avLst/>
+          </a:prstGeom>
+          <a:noFill/>
+        </p:spPr>
+        <p:txBody>
+          <a:bodyPr wrap="square">
+            <a:spAutoFit/>
+          </a:bodyPr>
+          <a:lstStyle/>
+          <a:p>
+            <a:pPr algn="l"/>
+            <a:r>
+              <a:rPr sz="866" i="1">
+                <a:solidFill>
+                  <a:srgbClr val="8099B3"/>
+                </a:solidFill>
+              </a:rPr>
+              <a:t>Estimates based on Toyota AU revenue of AUD $12.95B (FY2025) and 275 dealerships  |  Sources: Toyota AU Annual Report, Gartner, McKinsey</a:t>
             </a:r>
           </a:p>
         </p:txBody>
@@ -36835,7 +37322,7 @@
                   <a:srgbClr val="FFFFFF"/>
                 </a:solidFill>
               </a:rPr>
-              <a:t>Next Steps</a:t>
+              <a:t>Implementation Roadmap</a:t>
             </a:r>
           </a:p>
         </p:txBody>
@@ -36869,7 +37356,7 @@
                   <a:srgbClr val="B8CFE8"/>
                 </a:solidFill>
               </a:rPr>
-              <a:t>How we move from presentation to production</a:t>
+              <a:t>12-week phased delivery — fast time to first value</a:t>
             </a:r>
           </a:p>
         </p:txBody>
@@ -36882,8 +37369,8 @@
         </p:nvSpPr>
         <p:spPr>
           <a:xfrm>
-            <a:off x="596000" y="1500000"/>
-            <a:ext cx="2600000" cy="3800000"/>
+            <a:off x="546000" y="1500000"/>
+            <a:ext cx="3500000" cy="4000000"/>
           </a:xfrm>
           <a:prstGeom prst="roundRect">
             <a:avLst/>
@@ -36925,8 +37412,8 @@
         </p:nvSpPr>
         <p:spPr>
           <a:xfrm>
-            <a:off x="596000" y="1500000"/>
-            <a:ext cx="2600000" cy="60000"/>
+            <a:off x="546000" y="1500000"/>
+            <a:ext cx="3500000" cy="60000"/>
           </a:xfrm>
           <a:prstGeom prst="roundRect">
             <a:avLst/>
@@ -36962,16 +37449,167 @@
       </p:sp>
       <p:sp>
         <p:nvSpPr>
-          <p:cNvPr id="7" name="Oval 6"/>
+          <p:cNvPr id="7" name="TextBox 6"/>
+          <p:cNvSpPr txBox="1"/>
+          <p:nvPr/>
+        </p:nvSpPr>
+        <p:spPr>
+          <a:xfrm>
+            <a:off x="696000" y="1650000"/>
+            <a:ext cx="3200000" cy="350000"/>
+          </a:xfrm>
+          <a:prstGeom prst="rect">
+            <a:avLst/>
+          </a:prstGeom>
+          <a:noFill/>
+        </p:spPr>
+        <p:txBody>
+          <a:bodyPr wrap="square">
+            <a:spAutoFit/>
+          </a:bodyPr>
+          <a:lstStyle/>
+          <a:p>
+            <a:pPr algn="l"/>
+            <a:r>
+              <a:rPr sz="1467" b="1" i="0">
+                <a:solidFill>
+                  <a:srgbClr val="0078D4"/>
+                </a:solidFill>
+              </a:rPr>
+              <a:t>Phase 1  |  Weeks 1–4</a:t>
+            </a:r>
+          </a:p>
+        </p:txBody>
+      </p:sp>
+      <p:sp>
+        <p:nvSpPr>
+          <p:cNvPr id="8" name="TextBox 7"/>
+          <p:cNvSpPr txBox="1"/>
+          <p:nvPr/>
+        </p:nvSpPr>
+        <p:spPr>
+          <a:xfrm>
+            <a:off x="696000" y="2000000"/>
+            <a:ext cx="3200000" cy="400000"/>
+          </a:xfrm>
+          <a:prstGeom prst="rect">
+            <a:avLst/>
+          </a:prstGeom>
+          <a:noFill/>
+        </p:spPr>
+        <p:txBody>
+          <a:bodyPr wrap="square">
+            <a:spAutoFit/>
+          </a:bodyPr>
+          <a:lstStyle/>
+          <a:p>
+            <a:pPr algn="l"/>
+            <a:r>
+              <a:rPr sz="1600" b="1" i="0">
+                <a:solidFill>
+                  <a:srgbClr val="FFFFFF"/>
+                </a:solidFill>
+              </a:rPr>
+              <a:t>Data Foundation</a:t>
+            </a:r>
+          </a:p>
+        </p:txBody>
+      </p:sp>
+      <p:sp>
+        <p:nvSpPr>
+          <p:cNvPr id="9" name="TextBox 8"/>
+          <p:cNvSpPr txBox="1"/>
+          <p:nvPr/>
+        </p:nvSpPr>
+        <p:spPr>
+          <a:xfrm>
+            <a:off x="696000" y="2500000"/>
+            <a:ext cx="3200000" cy="2800000"/>
+          </a:xfrm>
+          <a:prstGeom prst="rect">
+            <a:avLst/>
+          </a:prstGeom>
+          <a:noFill/>
+        </p:spPr>
+        <p:txBody>
+          <a:bodyPr wrap="square">
+            <a:spAutoFit/>
+          </a:bodyPr>
+          <a:lstStyle/>
+          <a:p>
+            <a:pPr algn="l">
+              <a:spcAft>
+                <a:spcPts val="400"/>
+              </a:spcAft>
+            </a:pPr>
+            <a:r>
+              <a:rPr sz="1333" b="0">
+                <a:solidFill>
+                  <a:srgbClr val="B8CFE8"/>
+                </a:solidFill>
+              </a:rPr>
+              <a:t>  SAP connector setup (ODP/BAPI)</a:t>
+            </a:r>
+          </a:p>
+          <a:p>
+            <a:pPr algn="l">
+              <a:spcAft>
+                <a:spcPts val="400"/>
+              </a:spcAft>
+            </a:pPr>
+            <a:r>
+              <a:rPr sz="1333" b="0">
+                <a:solidFill>
+                  <a:srgbClr val="B8CFE8"/>
+                </a:solidFill>
+              </a:rPr>
+              <a:t>  Fabric Lakehouse provisioning</a:t>
+            </a:r>
+          </a:p>
+          <a:p>
+            <a:pPr algn="l">
+              <a:spcAft>
+                <a:spcPts val="400"/>
+              </a:spcAft>
+            </a:pPr>
+            <a:r>
+              <a:rPr sz="1333" b="0">
+                <a:solidFill>
+                  <a:srgbClr val="B8CFE8"/>
+                </a:solidFill>
+              </a:rPr>
+              <a:t>  Bronze/Silver/Gold zone build</a:t>
+            </a:r>
+          </a:p>
+          <a:p>
+            <a:pPr algn="l">
+              <a:spcAft>
+                <a:spcPts val="400"/>
+              </a:spcAft>
+            </a:pPr>
+            <a:r>
+              <a:rPr sz="1333" b="0">
+                <a:solidFill>
+                  <a:srgbClr val="B8CFE8"/>
+                </a:solidFill>
+              </a:rPr>
+              <a:t>  Data quality &amp; governance setup</a:t>
+            </a:r>
+          </a:p>
+        </p:txBody>
+      </p:sp>
+      <p:sp>
+        <p:nvSpPr>
+          <p:cNvPr id="10" name="Chevron 9"/>
           <p:cNvSpPr/>
           <p:nvPr/>
         </p:nvSpPr>
         <p:spPr>
           <a:xfrm>
-            <a:off x="1646000" y="1700000"/>
-            <a:ext cx="500000" cy="500000"/>
-          </a:xfrm>
-          <a:prstGeom prst="ellipse">
+            <a:off x="4076000" y="3000000"/>
+            <a:ext cx="240000" cy="500000"/>
+          </a:xfrm>
+          <a:prstGeom prst="chevron">
             <a:avLst/>
           </a:prstGeom>
           <a:solidFill>
@@ -37005,184 +37643,14 @@
       </p:sp>
       <p:sp>
         <p:nvSpPr>
-          <p:cNvPr id="8" name="TextBox 7"/>
-          <p:cNvSpPr txBox="1"/>
-          <p:nvPr/>
-        </p:nvSpPr>
-        <p:spPr>
-          <a:xfrm>
-            <a:off x="1646000" y="1760000"/>
-            <a:ext cx="500000" cy="400000"/>
-          </a:xfrm>
-          <a:prstGeom prst="rect">
-            <a:avLst/>
-          </a:prstGeom>
-          <a:noFill/>
-        </p:spPr>
-        <p:txBody>
-          <a:bodyPr wrap="square">
-            <a:spAutoFit/>
-          </a:bodyPr>
-          <a:lstStyle/>
-          <a:p>
-            <a:pPr algn="ctr"/>
-            <a:r>
-              <a:rPr sz="1600" b="1" i="0">
-                <a:solidFill>
-                  <a:srgbClr val="FFFFFF"/>
-                </a:solidFill>
-              </a:rPr>
-              <a:t>01</a:t>
-            </a:r>
-          </a:p>
-        </p:txBody>
-      </p:sp>
-      <p:sp>
-        <p:nvSpPr>
-          <p:cNvPr id="9" name="TextBox 8"/>
-          <p:cNvSpPr txBox="1"/>
-          <p:nvPr/>
-        </p:nvSpPr>
-        <p:spPr>
-          <a:xfrm>
-            <a:off x="696000" y="2300000"/>
-            <a:ext cx="2400000" cy="400000"/>
-          </a:xfrm>
-          <a:prstGeom prst="rect">
-            <a:avLst/>
-          </a:prstGeom>
-          <a:noFill/>
-        </p:spPr>
-        <p:txBody>
-          <a:bodyPr wrap="square">
-            <a:spAutoFit/>
-          </a:bodyPr>
-          <a:lstStyle/>
-          <a:p>
-            <a:pPr algn="ctr"/>
-            <a:r>
-              <a:rPr sz="1600" b="1" i="0">
-                <a:solidFill>
-                  <a:srgbClr val="FFFFFF"/>
-                </a:solidFill>
-              </a:rPr>
-              <a:t>Discovery Workshop</a:t>
-            </a:r>
-          </a:p>
-        </p:txBody>
-      </p:sp>
-      <p:sp>
-        <p:nvSpPr>
-          <p:cNvPr id="10" name="TextBox 9"/>
-          <p:cNvSpPr txBox="1"/>
-          <p:nvPr/>
-        </p:nvSpPr>
-        <p:spPr>
-          <a:xfrm>
-            <a:off x="696000" y="2700000"/>
-            <a:ext cx="2400000" cy="300000"/>
-          </a:xfrm>
-          <a:prstGeom prst="rect">
-            <a:avLst/>
-          </a:prstGeom>
-          <a:noFill/>
-        </p:spPr>
-        <p:txBody>
-          <a:bodyPr wrap="square">
-            <a:spAutoFit/>
-          </a:bodyPr>
-          <a:lstStyle/>
-          <a:p>
-            <a:pPr algn="ctr"/>
-            <a:r>
-              <a:rPr sz="1333" b="1" i="0">
-                <a:solidFill>
-                  <a:srgbClr val="0078D4"/>
-                </a:solidFill>
-              </a:rPr>
-              <a:t>Week 1-2</a:t>
-            </a:r>
-          </a:p>
-        </p:txBody>
-      </p:sp>
-      <p:sp>
-        <p:nvSpPr>
-          <p:cNvPr id="11" name="TextBox 10"/>
-          <p:cNvSpPr txBox="1"/>
-          <p:nvPr/>
-        </p:nvSpPr>
-        <p:spPr>
-          <a:xfrm>
-            <a:off x="696000" y="3100000"/>
-            <a:ext cx="2400000" cy="2000000"/>
-          </a:xfrm>
-          <a:prstGeom prst="rect">
-            <a:avLst/>
-          </a:prstGeom>
-          <a:noFill/>
-        </p:spPr>
-        <p:txBody>
-          <a:bodyPr wrap="square">
-            <a:spAutoFit/>
-          </a:bodyPr>
-          <a:lstStyle/>
-          <a:p>
-            <a:pPr algn="l">
-              <a:spcAft>
-                <a:spcPts val="400"/>
-              </a:spcAft>
-            </a:pPr>
-            <a:r>
-              <a:rPr sz="1000" b="0">
-                <a:solidFill>
-                  <a:srgbClr val="B8CFE8"/>
-                </a:solidFill>
-              </a:rPr>
-              <a:t>2-day workshop to map your SAP landscape,</a:t>
-            </a:r>
-          </a:p>
-          <a:p>
-            <a:pPr algn="l">
-              <a:spcAft>
-                <a:spcPts val="400"/>
-              </a:spcAft>
-            </a:pPr>
-            <a:r>
-              <a:rPr sz="1000" b="0">
-                <a:solidFill>
-                  <a:srgbClr val="B8CFE8"/>
-                </a:solidFill>
-              </a:rPr>
-              <a:t>prioritise use cases, and define success metrics.</a:t>
-            </a:r>
-          </a:p>
-          <a:p>
-            <a:pPr algn="l">
-              <a:spcAft>
-                <a:spcPts val="400"/>
-              </a:spcAft>
-            </a:pPr>
-            <a:r>
-              <a:rPr sz="1000" b="0">
-                <a:solidFill>
-                  <a:srgbClr val="B8CFE8"/>
-                </a:solidFill>
-              </a:rPr>
-              <a:t>Includes stakeholder interviews &amp; data audit.</a:t>
-            </a:r>
-          </a:p>
-        </p:txBody>
-      </p:sp>
-      <p:sp>
-        <p:nvSpPr>
-          <p:cNvPr id="12" name="Rounded Rectangle 11"/>
+          <p:cNvPr id="11" name="Rounded Rectangle 10"/>
           <p:cNvSpPr/>
           <p:nvPr/>
         </p:nvSpPr>
         <p:spPr>
           <a:xfrm>
-            <a:off x="3396000" y="1500000"/>
-            <a:ext cx="2600000" cy="3800000"/>
+            <a:off x="4346000" y="1500000"/>
+            <a:ext cx="3500000" cy="4000000"/>
           </a:xfrm>
           <a:prstGeom prst="roundRect">
             <a:avLst/>
@@ -37218,14 +37686,14 @@
       </p:sp>
       <p:sp>
         <p:nvSpPr>
-          <p:cNvPr id="13" name="Rounded Rectangle 12"/>
+          <p:cNvPr id="12" name="Rounded Rectangle 11"/>
           <p:cNvSpPr/>
           <p:nvPr/>
         </p:nvSpPr>
         <p:spPr>
           <a:xfrm>
-            <a:off x="3396000" y="1500000"/>
-            <a:ext cx="2600000" cy="60000"/>
+            <a:off x="4346000" y="1500000"/>
+            <a:ext cx="3500000" cy="60000"/>
           </a:xfrm>
           <a:prstGeom prst="roundRect">
             <a:avLst/>
@@ -37261,16 +37729,167 @@
       </p:sp>
       <p:sp>
         <p:nvSpPr>
-          <p:cNvPr id="14" name="Oval 13"/>
+          <p:cNvPr id="13" name="TextBox 12"/>
+          <p:cNvSpPr txBox="1"/>
+          <p:nvPr/>
+        </p:nvSpPr>
+        <p:spPr>
+          <a:xfrm>
+            <a:off x="4496000" y="1650000"/>
+            <a:ext cx="3200000" cy="350000"/>
+          </a:xfrm>
+          <a:prstGeom prst="rect">
+            <a:avLst/>
+          </a:prstGeom>
+          <a:noFill/>
+        </p:spPr>
+        <p:txBody>
+          <a:bodyPr wrap="square">
+            <a:spAutoFit/>
+          </a:bodyPr>
+          <a:lstStyle/>
+          <a:p>
+            <a:pPr algn="l"/>
+            <a:r>
+              <a:rPr sz="1467" b="1" i="0">
+                <a:solidFill>
+                  <a:srgbClr val="00B294"/>
+                </a:solidFill>
+              </a:rPr>
+              <a:t>Phase 2  |  Weeks 5–8</a:t>
+            </a:r>
+          </a:p>
+        </p:txBody>
+      </p:sp>
+      <p:sp>
+        <p:nvSpPr>
+          <p:cNvPr id="14" name="TextBox 13"/>
+          <p:cNvSpPr txBox="1"/>
+          <p:nvPr/>
+        </p:nvSpPr>
+        <p:spPr>
+          <a:xfrm>
+            <a:off x="4496000" y="2000000"/>
+            <a:ext cx="3200000" cy="400000"/>
+          </a:xfrm>
+          <a:prstGeom prst="rect">
+            <a:avLst/>
+          </a:prstGeom>
+          <a:noFill/>
+        </p:spPr>
+        <p:txBody>
+          <a:bodyPr wrap="square">
+            <a:spAutoFit/>
+          </a:bodyPr>
+          <a:lstStyle/>
+          <a:p>
+            <a:pPr algn="l"/>
+            <a:r>
+              <a:rPr sz="1600" b="1" i="0">
+                <a:solidFill>
+                  <a:srgbClr val="FFFFFF"/>
+                </a:solidFill>
+              </a:rPr>
+              <a:t>AI Models &amp; Analytics</a:t>
+            </a:r>
+          </a:p>
+        </p:txBody>
+      </p:sp>
+      <p:sp>
+        <p:nvSpPr>
+          <p:cNvPr id="15" name="TextBox 14"/>
+          <p:cNvSpPr txBox="1"/>
+          <p:nvPr/>
+        </p:nvSpPr>
+        <p:spPr>
+          <a:xfrm>
+            <a:off x="4496000" y="2500000"/>
+            <a:ext cx="3200000" cy="2800000"/>
+          </a:xfrm>
+          <a:prstGeom prst="rect">
+            <a:avLst/>
+          </a:prstGeom>
+          <a:noFill/>
+        </p:spPr>
+        <p:txBody>
+          <a:bodyPr wrap="square">
+            <a:spAutoFit/>
+          </a:bodyPr>
+          <a:lstStyle/>
+          <a:p>
+            <a:pPr algn="l">
+              <a:spcAft>
+                <a:spcPts val="400"/>
+              </a:spcAft>
+            </a:pPr>
+            <a:r>
+              <a:rPr sz="1333" b="0">
+                <a:solidFill>
+                  <a:srgbClr val="B8CFE8"/>
+                </a:solidFill>
+              </a:rPr>
+              <a:t>  Demand forecasting model training</a:t>
+            </a:r>
+          </a:p>
+          <a:p>
+            <a:pPr algn="l">
+              <a:spcAft>
+                <a:spcPts val="400"/>
+              </a:spcAft>
+            </a:pPr>
+            <a:r>
+              <a:rPr sz="1333" b="0">
+                <a:solidFill>
+                  <a:srgbClr val="B8CFE8"/>
+                </a:solidFill>
+              </a:rPr>
+              <a:t>  Inventory optimization engine</a:t>
+            </a:r>
+          </a:p>
+          <a:p>
+            <a:pPr algn="l">
+              <a:spcAft>
+                <a:spcPts val="400"/>
+              </a:spcAft>
+            </a:pPr>
+            <a:r>
+              <a:rPr sz="1333" b="0">
+                <a:solidFill>
+                  <a:srgbClr val="B8CFE8"/>
+                </a:solidFill>
+              </a:rPr>
+              <a:t>  Supply planning algorithms</a:t>
+            </a:r>
+          </a:p>
+          <a:p>
+            <a:pPr algn="l">
+              <a:spcAft>
+                <a:spcPts val="400"/>
+              </a:spcAft>
+            </a:pPr>
+            <a:r>
+              <a:rPr sz="1333" b="0">
+                <a:solidFill>
+                  <a:srgbClr val="B8CFE8"/>
+                </a:solidFill>
+              </a:rPr>
+              <a:t>  Power BI semantic models</a:t>
+            </a:r>
+          </a:p>
+        </p:txBody>
+      </p:sp>
+      <p:sp>
+        <p:nvSpPr>
+          <p:cNvPr id="16" name="Chevron 15"/>
           <p:cNvSpPr/>
           <p:nvPr/>
         </p:nvSpPr>
         <p:spPr>
           <a:xfrm>
-            <a:off x="4446000" y="1700000"/>
-            <a:ext cx="500000" cy="500000"/>
-          </a:xfrm>
-          <a:prstGeom prst="ellipse">
+            <a:off x="7876000" y="3000000"/>
+            <a:ext cx="240000" cy="500000"/>
+          </a:xfrm>
+          <a:prstGeom prst="chevron">
             <a:avLst/>
           </a:prstGeom>
           <a:solidFill>
@@ -37304,184 +37923,14 @@
       </p:sp>
       <p:sp>
         <p:nvSpPr>
-          <p:cNvPr id="15" name="TextBox 14"/>
-          <p:cNvSpPr txBox="1"/>
-          <p:nvPr/>
-        </p:nvSpPr>
-        <p:spPr>
-          <a:xfrm>
-            <a:off x="4446000" y="1760000"/>
-            <a:ext cx="500000" cy="400000"/>
-          </a:xfrm>
-          <a:prstGeom prst="rect">
-            <a:avLst/>
-          </a:prstGeom>
-          <a:noFill/>
-        </p:spPr>
-        <p:txBody>
-          <a:bodyPr wrap="square">
-            <a:spAutoFit/>
-          </a:bodyPr>
-          <a:lstStyle/>
-          <a:p>
-            <a:pPr algn="ctr"/>
-            <a:r>
-              <a:rPr sz="1600" b="1" i="0">
-                <a:solidFill>
-                  <a:srgbClr val="FFFFFF"/>
-                </a:solidFill>
-              </a:rPr>
-              <a:t>02</a:t>
-            </a:r>
-          </a:p>
-        </p:txBody>
-      </p:sp>
-      <p:sp>
-        <p:nvSpPr>
-          <p:cNvPr id="16" name="TextBox 15"/>
-          <p:cNvSpPr txBox="1"/>
-          <p:nvPr/>
-        </p:nvSpPr>
-        <p:spPr>
-          <a:xfrm>
-            <a:off x="3496000" y="2300000"/>
-            <a:ext cx="2400000" cy="400000"/>
-          </a:xfrm>
-          <a:prstGeom prst="rect">
-            <a:avLst/>
-          </a:prstGeom>
-          <a:noFill/>
-        </p:spPr>
-        <p:txBody>
-          <a:bodyPr wrap="square">
-            <a:spAutoFit/>
-          </a:bodyPr>
-          <a:lstStyle/>
-          <a:p>
-            <a:pPr algn="ctr"/>
-            <a:r>
-              <a:rPr sz="1600" b="1" i="0">
-                <a:solidFill>
-                  <a:srgbClr val="FFFFFF"/>
-                </a:solidFill>
-              </a:rPr>
-              <a:t>POC Scope &amp; Agreement</a:t>
-            </a:r>
-          </a:p>
-        </p:txBody>
-      </p:sp>
-      <p:sp>
-        <p:nvSpPr>
-          <p:cNvPr id="17" name="TextBox 16"/>
-          <p:cNvSpPr txBox="1"/>
-          <p:nvPr/>
-        </p:nvSpPr>
-        <p:spPr>
-          <a:xfrm>
-            <a:off x="3496000" y="2700000"/>
-            <a:ext cx="2400000" cy="300000"/>
-          </a:xfrm>
-          <a:prstGeom prst="rect">
-            <a:avLst/>
-          </a:prstGeom>
-          <a:noFill/>
-        </p:spPr>
-        <p:txBody>
-          <a:bodyPr wrap="square">
-            <a:spAutoFit/>
-          </a:bodyPr>
-          <a:lstStyle/>
-          <a:p>
-            <a:pPr algn="ctr"/>
-            <a:r>
-              <a:rPr sz="1333" b="1" i="0">
-                <a:solidFill>
-                  <a:srgbClr val="00B294"/>
-                </a:solidFill>
-              </a:rPr>
-              <a:t>Week 3</a:t>
-            </a:r>
-          </a:p>
-        </p:txBody>
-      </p:sp>
-      <p:sp>
-        <p:nvSpPr>
-          <p:cNvPr id="18" name="TextBox 17"/>
-          <p:cNvSpPr txBox="1"/>
-          <p:nvPr/>
-        </p:nvSpPr>
-        <p:spPr>
-          <a:xfrm>
-            <a:off x="3496000" y="3100000"/>
-            <a:ext cx="2400000" cy="2000000"/>
-          </a:xfrm>
-          <a:prstGeom prst="rect">
-            <a:avLst/>
-          </a:prstGeom>
-          <a:noFill/>
-        </p:spPr>
-        <p:txBody>
-          <a:bodyPr wrap="square">
-            <a:spAutoFit/>
-          </a:bodyPr>
-          <a:lstStyle/>
-          <a:p>
-            <a:pPr algn="l">
-              <a:spcAft>
-                <a:spcPts val="400"/>
-              </a:spcAft>
-            </a:pPr>
-            <a:r>
-              <a:rPr sz="1000" b="0">
-                <a:solidFill>
-                  <a:srgbClr val="B8CFE8"/>
-                </a:solidFill>
-              </a:rPr>
-              <a:t>Define POC boundaries — typically 1 use case</a:t>
-            </a:r>
-          </a:p>
-          <a:p>
-            <a:pPr algn="l">
-              <a:spcAft>
-                <a:spcPts val="400"/>
-              </a:spcAft>
-            </a:pPr>
-            <a:r>
-              <a:rPr sz="1000" b="0">
-                <a:solidFill>
-                  <a:srgbClr val="B8CFE8"/>
-                </a:solidFill>
-              </a:rPr>
-              <a:t>(Demand Forecasting recommended as highest ROI).</a:t>
-            </a:r>
-          </a:p>
-          <a:p>
-            <a:pPr algn="l">
-              <a:spcAft>
-                <a:spcPts val="400"/>
-              </a:spcAft>
-            </a:pPr>
-            <a:r>
-              <a:rPr sz="1333" b="0">
-                <a:solidFill>
-                  <a:srgbClr val="B8CFE8"/>
-                </a:solidFill>
-              </a:rPr>
-              <a:t>Fixed-price, 6-week delivery.</a:t>
-            </a:r>
-          </a:p>
-        </p:txBody>
-      </p:sp>
-      <p:sp>
-        <p:nvSpPr>
-          <p:cNvPr id="19" name="Rounded Rectangle 18"/>
+          <p:cNvPr id="17" name="Rounded Rectangle 16"/>
           <p:cNvSpPr/>
           <p:nvPr/>
         </p:nvSpPr>
         <p:spPr>
           <a:xfrm>
-            <a:off x="6196000" y="1500000"/>
-            <a:ext cx="2600000" cy="3800000"/>
+            <a:off x="8146000" y="1500000"/>
+            <a:ext cx="3500000" cy="4000000"/>
           </a:xfrm>
           <a:prstGeom prst="roundRect">
             <a:avLst/>
@@ -37517,14 +37966,14 @@
       </p:sp>
       <p:sp>
         <p:nvSpPr>
-          <p:cNvPr id="20" name="Rounded Rectangle 19"/>
+          <p:cNvPr id="18" name="Rounded Rectangle 17"/>
           <p:cNvSpPr/>
           <p:nvPr/>
         </p:nvSpPr>
         <p:spPr>
           <a:xfrm>
-            <a:off x="6196000" y="1500000"/>
-            <a:ext cx="2600000" cy="60000"/>
+            <a:off x="8146000" y="1500000"/>
+            <a:ext cx="3500000" cy="60000"/>
           </a:xfrm>
           <a:prstGeom prst="roundRect">
             <a:avLst/>
@@ -37560,20 +38009,171 @@
       </p:sp>
       <p:sp>
         <p:nvSpPr>
-          <p:cNvPr id="21" name="Oval 20"/>
+          <p:cNvPr id="19" name="TextBox 18"/>
+          <p:cNvSpPr txBox="1"/>
+          <p:nvPr/>
+        </p:nvSpPr>
+        <p:spPr>
+          <a:xfrm>
+            <a:off x="8296000" y="1650000"/>
+            <a:ext cx="3200000" cy="350000"/>
+          </a:xfrm>
+          <a:prstGeom prst="rect">
+            <a:avLst/>
+          </a:prstGeom>
+          <a:noFill/>
+        </p:spPr>
+        <p:txBody>
+          <a:bodyPr wrap="square">
+            <a:spAutoFit/>
+          </a:bodyPr>
+          <a:lstStyle/>
+          <a:p>
+            <a:pPr algn="l"/>
+            <a:r>
+              <a:rPr sz="1467" b="1" i="0">
+                <a:solidFill>
+                  <a:srgbClr val="FFB900"/>
+                </a:solidFill>
+              </a:rPr>
+              <a:t>Phase 3  |  Weeks 9–12</a:t>
+            </a:r>
+          </a:p>
+        </p:txBody>
+      </p:sp>
+      <p:sp>
+        <p:nvSpPr>
+          <p:cNvPr id="20" name="TextBox 19"/>
+          <p:cNvSpPr txBox="1"/>
+          <p:nvPr/>
+        </p:nvSpPr>
+        <p:spPr>
+          <a:xfrm>
+            <a:off x="8296000" y="2000000"/>
+            <a:ext cx="3200000" cy="400000"/>
+          </a:xfrm>
+          <a:prstGeom prst="rect">
+            <a:avLst/>
+          </a:prstGeom>
+          <a:noFill/>
+        </p:spPr>
+        <p:txBody>
+          <a:bodyPr wrap="square">
+            <a:spAutoFit/>
+          </a:bodyPr>
+          <a:lstStyle/>
+          <a:p>
+            <a:pPr algn="l"/>
+            <a:r>
+              <a:rPr sz="1600" b="1" i="0">
+                <a:solidFill>
+                  <a:srgbClr val="FFFFFF"/>
+                </a:solidFill>
+              </a:rPr>
+              <a:t>Agentic AI &amp; Go-Live</a:t>
+            </a:r>
+          </a:p>
+        </p:txBody>
+      </p:sp>
+      <p:sp>
+        <p:nvSpPr>
+          <p:cNvPr id="21" name="TextBox 20"/>
+          <p:cNvSpPr txBox="1"/>
+          <p:nvPr/>
+        </p:nvSpPr>
+        <p:spPr>
+          <a:xfrm>
+            <a:off x="8296000" y="2500000"/>
+            <a:ext cx="3200000" cy="2800000"/>
+          </a:xfrm>
+          <a:prstGeom prst="rect">
+            <a:avLst/>
+          </a:prstGeom>
+          <a:noFill/>
+        </p:spPr>
+        <p:txBody>
+          <a:bodyPr wrap="square">
+            <a:spAutoFit/>
+          </a:bodyPr>
+          <a:lstStyle/>
+          <a:p>
+            <a:pPr algn="l">
+              <a:spcAft>
+                <a:spcPts val="400"/>
+              </a:spcAft>
+            </a:pPr>
+            <a:r>
+              <a:rPr sz="1333" b="0">
+                <a:solidFill>
+                  <a:srgbClr val="B8CFE8"/>
+                </a:solidFill>
+              </a:rPr>
+              <a:t>  Copilot Studio bot deployment</a:t>
+            </a:r>
+          </a:p>
+          <a:p>
+            <a:pPr algn="l">
+              <a:spcAft>
+                <a:spcPts val="400"/>
+              </a:spcAft>
+            </a:pPr>
+            <a:r>
+              <a:rPr sz="1333" b="0">
+                <a:solidFill>
+                  <a:srgbClr val="B8CFE8"/>
+                </a:solidFill>
+              </a:rPr>
+              <a:t>  Agent orchestration layer</a:t>
+            </a:r>
+          </a:p>
+          <a:p>
+            <a:pPr algn="l">
+              <a:spcAft>
+                <a:spcPts val="400"/>
+              </a:spcAft>
+            </a:pPr>
+            <a:r>
+              <a:rPr sz="1333" b="0">
+                <a:solidFill>
+                  <a:srgbClr val="B8CFE8"/>
+                </a:solidFill>
+              </a:rPr>
+              <a:t>  SAP back-write integration</a:t>
+            </a:r>
+          </a:p>
+          <a:p>
+            <a:pPr algn="l">
+              <a:spcAft>
+                <a:spcPts val="400"/>
+              </a:spcAft>
+            </a:pPr>
+            <a:r>
+              <a:rPr sz="1333" b="0">
+                <a:solidFill>
+                  <a:srgbClr val="B8CFE8"/>
+                </a:solidFill>
+              </a:rPr>
+              <a:t>  UAT, training &amp; go-live</a:t>
+            </a:r>
+          </a:p>
+        </p:txBody>
+      </p:sp>
+      <p:sp>
+        <p:nvSpPr>
+          <p:cNvPr id="22" name="Rounded Rectangle 21"/>
           <p:cNvSpPr/>
           <p:nvPr/>
         </p:nvSpPr>
         <p:spPr>
           <a:xfrm>
-            <a:off x="7246000" y="1700000"/>
-            <a:ext cx="500000" cy="500000"/>
-          </a:xfrm>
-          <a:prstGeom prst="ellipse">
+            <a:off x="546000" y="5800000"/>
+            <a:ext cx="11100000" cy="550000"/>
+          </a:xfrm>
+          <a:prstGeom prst="roundRect">
             <a:avLst/>
           </a:prstGeom>
           <a:solidFill>
-            <a:srgbClr val="FFB900"/>
+            <a:srgbClr val="122540"/>
           </a:solidFill>
           <a:ln>
             <a:noFill/>
@@ -37603,14 +38203,14 @@
       </p:sp>
       <p:sp>
         <p:nvSpPr>
-          <p:cNvPr id="22" name="TextBox 21"/>
+          <p:cNvPr id="23" name="TextBox 22"/>
           <p:cNvSpPr txBox="1"/>
           <p:nvPr/>
         </p:nvSpPr>
         <p:spPr>
           <a:xfrm>
-            <a:off x="7246000" y="1760000"/>
-            <a:ext cx="500000" cy="400000"/>
+            <a:off x="746000" y="5850000"/>
+            <a:ext cx="10700000" cy="450000"/>
           </a:xfrm>
           <a:prstGeom prst="rect">
             <a:avLst/>
@@ -37625,26 +38225,69 @@
           <a:p>
             <a:pPr algn="ctr"/>
             <a:r>
-              <a:rPr sz="1600" b="1" i="0">
-                <a:solidFill>
-                  <a:srgbClr val="FFFFFF"/>
+              <a:rPr sz="1333" b="0" i="0">
+                <a:solidFill>
+                  <a:srgbClr val="E8F4FD"/>
                 </a:solidFill>
               </a:rPr>
-              <a:t>03</a:t>
-            </a:r>
-          </a:p>
-        </p:txBody>
-      </p:sp>
-      <p:sp>
-        <p:nvSpPr>
-          <p:cNvPr id="23" name="TextBox 22"/>
+              <a:t>First value visible in Week 6 (demand forecast MVP)  ·  Full production by Week 12  ·  Ongoing optimization post go-live</a:t>
+            </a:r>
+          </a:p>
+        </p:txBody>
+      </p:sp>
+    </p:spTree>
+  </p:cSld>
+  <p:clrMapOvr>
+    <a:masterClrMapping/>
+  </p:clrMapOvr>
+</p:sld>
+</file>
+
+<file path=ppt/slides/slide16.xml><?xml version="1.0" encoding="utf-8"?>
+<p:sld xmlns:a="http://schemas.openxmlformats.org/drawingml/2006/main" xmlns:p="http://schemas.openxmlformats.org/presentationml/2006/main" xmlns:r="http://schemas.openxmlformats.org/officeDocument/2006/relationships">
+  <p:cSld>
+    <p:bg>
+      <p:bgPr>
+        <a:solidFill>
+          <a:srgbClr val="0A1628"/>
+        </a:solidFill>
+        <a:effectLst/>
+      </p:bgPr>
+    </p:bg>
+    <p:spTree>
+      <p:nvGrpSpPr>
+        <p:cNvPr id="1" name=""/>
+        <p:cNvGrpSpPr/>
+        <p:nvPr/>
+      </p:nvGrpSpPr>
+      <p:grpSpPr/>
+      <p:sp>
+        <p:nvSpPr>
+          <p:cNvPr id="2" name="Title 1"/>
+          <p:cNvSpPr>
+            <a:spLocks noGrp="1"/>
+          </p:cNvSpPr>
+          <p:nvPr>
+            <p:ph type="title"/>
+          </p:nvPr>
+        </p:nvSpPr>
+        <p:spPr/>
+        <p:txBody>
+          <a:bodyPr/>
+          <a:lstStyle/>
+          <a:p/>
+        </p:txBody>
+      </p:sp>
+      <p:sp>
+        <p:nvSpPr>
+          <p:cNvPr id="3" name="TextBox 2"/>
           <p:cNvSpPr txBox="1"/>
           <p:nvPr/>
         </p:nvSpPr>
         <p:spPr>
           <a:xfrm>
-            <a:off x="6296000" y="2300000"/>
-            <a:ext cx="2400000" cy="400000"/>
+            <a:off x="609600" y="300000"/>
+            <a:ext cx="10000000" cy="600000"/>
           </a:xfrm>
           <a:prstGeom prst="rect">
             <a:avLst/>
@@ -37657,28 +38300,28 @@
           </a:bodyPr>
           <a:lstStyle/>
           <a:p>
-            <a:pPr algn="ctr"/>
-            <a:r>
-              <a:rPr sz="1600" b="1" i="0">
+            <a:pPr algn="l"/>
+            <a:r>
+              <a:rPr sz="3467" b="1" i="0">
                 <a:solidFill>
                   <a:srgbClr val="FFFFFF"/>
                 </a:solidFill>
               </a:rPr>
-              <a:t>POC Delivery</a:t>
-            </a:r>
-          </a:p>
-        </p:txBody>
-      </p:sp>
-      <p:sp>
-        <p:nvSpPr>
-          <p:cNvPr id="24" name="TextBox 23"/>
+              <a:t>Next Steps</a:t>
+            </a:r>
+          </a:p>
+        </p:txBody>
+      </p:sp>
+      <p:sp>
+        <p:nvSpPr>
+          <p:cNvPr id="4" name="TextBox 3"/>
           <p:cNvSpPr txBox="1"/>
           <p:nvPr/>
         </p:nvSpPr>
         <p:spPr>
           <a:xfrm>
-            <a:off x="6296000" y="2700000"/>
-            <a:ext cx="2400000" cy="300000"/>
+            <a:off x="609600" y="850000"/>
+            <a:ext cx="10000000" cy="350000"/>
           </a:xfrm>
           <a:prstGeom prst="rect">
             <a:avLst/>
@@ -37691,95 +38334,27 @@
           </a:bodyPr>
           <a:lstStyle/>
           <a:p>
-            <a:pPr algn="ctr"/>
-            <a:r>
-              <a:rPr sz="1333" b="1" i="0">
-                <a:solidFill>
-                  <a:srgbClr val="FFB900"/>
+            <a:pPr algn="l"/>
+            <a:r>
+              <a:rPr sz="1733" b="0" i="0">
+                <a:solidFill>
+                  <a:srgbClr val="B8CFE8"/>
                 </a:solidFill>
               </a:rPr>
-              <a:t>Weeks 4-9</a:t>
-            </a:r>
-          </a:p>
-        </p:txBody>
-      </p:sp>
-      <p:sp>
-        <p:nvSpPr>
-          <p:cNvPr id="25" name="TextBox 24"/>
-          <p:cNvSpPr txBox="1"/>
-          <p:nvPr/>
-        </p:nvSpPr>
-        <p:spPr>
-          <a:xfrm>
-            <a:off x="6296000" y="3100000"/>
-            <a:ext cx="2400000" cy="2000000"/>
-          </a:xfrm>
-          <a:prstGeom prst="rect">
-            <a:avLst/>
-          </a:prstGeom>
-          <a:noFill/>
-        </p:spPr>
-        <p:txBody>
-          <a:bodyPr wrap="square">
-            <a:spAutoFit/>
-          </a:bodyPr>
-          <a:lstStyle/>
-          <a:p>
-            <a:pPr algn="l">
-              <a:spcAft>
-                <a:spcPts val="400"/>
-              </a:spcAft>
-            </a:pPr>
-            <a:r>
-              <a:rPr sz="1000" b="0">
-                <a:solidFill>
-                  <a:srgbClr val="B8CFE8"/>
-                </a:solidFill>
-              </a:rPr>
-              <a:t>End-to-end working prototype: SAP data → Fabric</a:t>
-            </a:r>
-          </a:p>
-          <a:p>
-            <a:pPr algn="l">
-              <a:spcAft>
-                <a:spcPts val="400"/>
-              </a:spcAft>
-            </a:pPr>
-            <a:r>
-              <a:rPr sz="1000" b="0">
-                <a:solidFill>
-                  <a:srgbClr val="B8CFE8"/>
-                </a:solidFill>
-              </a:rPr>
-              <a:t>→ AI model → Copilot bot. With live SAP data,</a:t>
-            </a:r>
-          </a:p>
-          <a:p>
-            <a:pPr algn="l">
-              <a:spcAft>
-                <a:spcPts val="400"/>
-              </a:spcAft>
-            </a:pPr>
-            <a:r>
-              <a:rPr sz="1000" b="0">
-                <a:solidFill>
-                  <a:srgbClr val="B8CFE8"/>
-                </a:solidFill>
-              </a:rPr>
-              <a:t>not synthetic. Measurable accuracy baseline.</a:t>
-            </a:r>
-          </a:p>
-        </p:txBody>
-      </p:sp>
-      <p:sp>
-        <p:nvSpPr>
-          <p:cNvPr id="26" name="Rounded Rectangle 25"/>
+              <a:t>How we move from presentation to production</a:t>
+            </a:r>
+          </a:p>
+        </p:txBody>
+      </p:sp>
+      <p:sp>
+        <p:nvSpPr>
+          <p:cNvPr id="5" name="Rounded Rectangle 4"/>
           <p:cNvSpPr/>
           <p:nvPr/>
         </p:nvSpPr>
         <p:spPr>
           <a:xfrm>
-            <a:off x="8996000" y="1500000"/>
+            <a:off x="596000" y="1500000"/>
             <a:ext cx="2600000" cy="3800000"/>
           </a:xfrm>
           <a:prstGeom prst="roundRect">
@@ -37816,20 +38391,20 @@
       </p:sp>
       <p:sp>
         <p:nvSpPr>
-          <p:cNvPr id="27" name="Rounded Rectangle 26"/>
+          <p:cNvPr id="6" name="Rounded Rectangle 5"/>
           <p:cNvSpPr/>
           <p:nvPr/>
         </p:nvSpPr>
         <p:spPr>
           <a:xfrm>
-            <a:off x="8996000" y="1500000"/>
+            <a:off x="596000" y="1500000"/>
             <a:ext cx="2600000" cy="60000"/>
           </a:xfrm>
           <a:prstGeom prst="roundRect">
             <a:avLst/>
           </a:prstGeom>
           <a:solidFill>
-            <a:srgbClr val="FF8C00"/>
+            <a:srgbClr val="0078D4"/>
           </a:solidFill>
           <a:ln>
             <a:noFill/>
@@ -37859,20 +38434,20 @@
       </p:sp>
       <p:sp>
         <p:nvSpPr>
-          <p:cNvPr id="28" name="Oval 27"/>
+          <p:cNvPr id="7" name="Oval 6"/>
           <p:cNvSpPr/>
           <p:nvPr/>
         </p:nvSpPr>
         <p:spPr>
           <a:xfrm>
-            <a:off x="10046000" y="1700000"/>
+            <a:off x="1646000" y="1700000"/>
             <a:ext cx="500000" cy="500000"/>
           </a:xfrm>
           <a:prstGeom prst="ellipse">
             <a:avLst/>
           </a:prstGeom>
           <a:solidFill>
-            <a:srgbClr val="FF8C00"/>
+            <a:srgbClr val="0078D4"/>
           </a:solidFill>
           <a:ln>
             <a:noFill/>
@@ -37902,13 +38477,13 @@
       </p:sp>
       <p:sp>
         <p:nvSpPr>
-          <p:cNvPr id="29" name="TextBox 28"/>
+          <p:cNvPr id="8" name="TextBox 7"/>
           <p:cNvSpPr txBox="1"/>
           <p:nvPr/>
         </p:nvSpPr>
         <p:spPr>
           <a:xfrm>
-            <a:off x="10046000" y="1760000"/>
+            <a:off x="1646000" y="1760000"/>
             <a:ext cx="500000" cy="400000"/>
           </a:xfrm>
           <a:prstGeom prst="rect">
@@ -37929,20 +38504,20 @@
                   <a:srgbClr val="FFFFFF"/>
                 </a:solidFill>
               </a:rPr>
-              <a:t>04</a:t>
-            </a:r>
-          </a:p>
-        </p:txBody>
-      </p:sp>
-      <p:sp>
-        <p:nvSpPr>
-          <p:cNvPr id="30" name="TextBox 29"/>
+              <a:t>01</a:t>
+            </a:r>
+          </a:p>
+        </p:txBody>
+      </p:sp>
+      <p:sp>
+        <p:nvSpPr>
+          <p:cNvPr id="9" name="TextBox 8"/>
           <p:cNvSpPr txBox="1"/>
           <p:nvPr/>
         </p:nvSpPr>
         <p:spPr>
           <a:xfrm>
-            <a:off x="9096000" y="2300000"/>
+            <a:off x="696000" y="2300000"/>
             <a:ext cx="2400000" cy="400000"/>
           </a:xfrm>
           <a:prstGeom prst="rect">
@@ -37963,20 +38538,20 @@
                   <a:srgbClr val="FFFFFF"/>
                 </a:solidFill>
               </a:rPr>
-              <a:t>Scale &amp; Productionise</a:t>
-            </a:r>
-          </a:p>
-        </p:txBody>
-      </p:sp>
-      <p:sp>
-        <p:nvSpPr>
-          <p:cNvPr id="31" name="TextBox 30"/>
+              <a:t>Discovery Workshop</a:t>
+            </a:r>
+          </a:p>
+        </p:txBody>
+      </p:sp>
+      <p:sp>
+        <p:nvSpPr>
+          <p:cNvPr id="10" name="TextBox 9"/>
           <p:cNvSpPr txBox="1"/>
           <p:nvPr/>
         </p:nvSpPr>
         <p:spPr>
           <a:xfrm>
-            <a:off x="9096000" y="2700000"/>
+            <a:off x="696000" y="2700000"/>
             <a:ext cx="2400000" cy="300000"/>
           </a:xfrm>
           <a:prstGeom prst="rect">
@@ -37994,23 +38569,23 @@
             <a:r>
               <a:rPr sz="1333" b="1" i="0">
                 <a:solidFill>
-                  <a:srgbClr val="FF8C00"/>
+                  <a:srgbClr val="0078D4"/>
                 </a:solidFill>
               </a:rPr>
-              <a:t>Weeks 10-16</a:t>
-            </a:r>
-          </a:p>
-        </p:txBody>
-      </p:sp>
-      <p:sp>
-        <p:nvSpPr>
-          <p:cNvPr id="32" name="TextBox 31"/>
+              <a:t>Week 1-2</a:t>
+            </a:r>
+          </a:p>
+        </p:txBody>
+      </p:sp>
+      <p:sp>
+        <p:nvSpPr>
+          <p:cNvPr id="11" name="TextBox 10"/>
           <p:cNvSpPr txBox="1"/>
           <p:nvPr/>
         </p:nvSpPr>
         <p:spPr>
           <a:xfrm>
-            <a:off x="9096000" y="3100000"/>
+            <a:off x="696000" y="3100000"/>
             <a:ext cx="2400000" cy="2000000"/>
           </a:xfrm>
           <a:prstGeom prst="rect">
@@ -38035,7 +38610,7 @@
                   <a:srgbClr val="B8CFE8"/>
                 </a:solidFill>
               </a:rPr>
-              <a:t>Expand to remaining use cases. Full security,</a:t>
+              <a:t>2-day workshop to map your SAP landscape,</a:t>
             </a:r>
           </a:p>
           <a:p>
@@ -38050,7 +38625,7 @@
                   <a:srgbClr val="B8CFE8"/>
                 </a:solidFill>
               </a:rPr>
-              <a:t>governance, and operational readiness.</a:t>
+              <a:t>prioritise use cases, and define success metrics.</a:t>
             </a:r>
           </a:p>
           <a:p>
@@ -38060,32 +38635,32 @@
               </a:spcAft>
             </a:pPr>
             <a:r>
-              <a:rPr sz="1010" b="0">
+              <a:rPr sz="1000" b="0">
                 <a:solidFill>
                   <a:srgbClr val="B8CFE8"/>
                 </a:solidFill>
               </a:rPr>
-              <a:t>Handover with training &amp; runbooks.</a:t>
-            </a:r>
-          </a:p>
-        </p:txBody>
-      </p:sp>
-      <p:sp>
-        <p:nvSpPr>
-          <p:cNvPr id="33" name="Rounded Rectangle 32"/>
+              <a:t>Includes stakeholder interviews &amp; data audit.</a:t>
+            </a:r>
+          </a:p>
+        </p:txBody>
+      </p:sp>
+      <p:sp>
+        <p:nvSpPr>
+          <p:cNvPr id="12" name="Rounded Rectangle 11"/>
           <p:cNvSpPr/>
           <p:nvPr/>
         </p:nvSpPr>
         <p:spPr>
           <a:xfrm>
-            <a:off x="596000" y="5700000"/>
-            <a:ext cx="11000000" cy="700000"/>
+            <a:off x="3396000" y="1500000"/>
+            <a:ext cx="2600000" cy="3800000"/>
           </a:xfrm>
           <a:prstGeom prst="roundRect">
             <a:avLst/>
           </a:prstGeom>
           <a:solidFill>
-            <a:srgbClr val="0078D4"/>
+            <a:srgbClr val="0F1F38"/>
           </a:solidFill>
           <a:ln>
             <a:noFill/>
@@ -38115,6 +38690,903 @@
       </p:sp>
       <p:sp>
         <p:nvSpPr>
+          <p:cNvPr id="13" name="Rounded Rectangle 12"/>
+          <p:cNvSpPr/>
+          <p:nvPr/>
+        </p:nvSpPr>
+        <p:spPr>
+          <a:xfrm>
+            <a:off x="3396000" y="1500000"/>
+            <a:ext cx="2600000" cy="60000"/>
+          </a:xfrm>
+          <a:prstGeom prst="roundRect">
+            <a:avLst/>
+          </a:prstGeom>
+          <a:solidFill>
+            <a:srgbClr val="00B294"/>
+          </a:solidFill>
+          <a:ln>
+            <a:noFill/>
+          </a:ln>
+        </p:spPr>
+        <p:style>
+          <a:lnRef idx="1">
+            <a:schemeClr val="accent1"/>
+          </a:lnRef>
+          <a:fillRef idx="3">
+            <a:schemeClr val="accent1"/>
+          </a:fillRef>
+          <a:effectRef idx="2">
+            <a:schemeClr val="accent1"/>
+          </a:effectRef>
+          <a:fontRef idx="minor">
+            <a:schemeClr val="lt1"/>
+          </a:fontRef>
+        </p:style>
+        <p:txBody>
+          <a:bodyPr rtlCol="0" anchor="ctr"/>
+          <a:lstStyle/>
+          <a:p>
+            <a:pPr algn="ctr"/>
+          </a:p>
+        </p:txBody>
+      </p:sp>
+      <p:sp>
+        <p:nvSpPr>
+          <p:cNvPr id="14" name="Oval 13"/>
+          <p:cNvSpPr/>
+          <p:nvPr/>
+        </p:nvSpPr>
+        <p:spPr>
+          <a:xfrm>
+            <a:off x="4446000" y="1700000"/>
+            <a:ext cx="500000" cy="500000"/>
+          </a:xfrm>
+          <a:prstGeom prst="ellipse">
+            <a:avLst/>
+          </a:prstGeom>
+          <a:solidFill>
+            <a:srgbClr val="00B294"/>
+          </a:solidFill>
+          <a:ln>
+            <a:noFill/>
+          </a:ln>
+        </p:spPr>
+        <p:style>
+          <a:lnRef idx="1">
+            <a:schemeClr val="accent1"/>
+          </a:lnRef>
+          <a:fillRef idx="3">
+            <a:schemeClr val="accent1"/>
+          </a:fillRef>
+          <a:effectRef idx="2">
+            <a:schemeClr val="accent1"/>
+          </a:effectRef>
+          <a:fontRef idx="minor">
+            <a:schemeClr val="lt1"/>
+          </a:fontRef>
+        </p:style>
+        <p:txBody>
+          <a:bodyPr rtlCol="0" anchor="ctr"/>
+          <a:lstStyle/>
+          <a:p>
+            <a:pPr algn="ctr"/>
+          </a:p>
+        </p:txBody>
+      </p:sp>
+      <p:sp>
+        <p:nvSpPr>
+          <p:cNvPr id="15" name="TextBox 14"/>
+          <p:cNvSpPr txBox="1"/>
+          <p:nvPr/>
+        </p:nvSpPr>
+        <p:spPr>
+          <a:xfrm>
+            <a:off x="4446000" y="1760000"/>
+            <a:ext cx="500000" cy="400000"/>
+          </a:xfrm>
+          <a:prstGeom prst="rect">
+            <a:avLst/>
+          </a:prstGeom>
+          <a:noFill/>
+        </p:spPr>
+        <p:txBody>
+          <a:bodyPr wrap="square">
+            <a:spAutoFit/>
+          </a:bodyPr>
+          <a:lstStyle/>
+          <a:p>
+            <a:pPr algn="ctr"/>
+            <a:r>
+              <a:rPr sz="1600" b="1" i="0">
+                <a:solidFill>
+                  <a:srgbClr val="FFFFFF"/>
+                </a:solidFill>
+              </a:rPr>
+              <a:t>02</a:t>
+            </a:r>
+          </a:p>
+        </p:txBody>
+      </p:sp>
+      <p:sp>
+        <p:nvSpPr>
+          <p:cNvPr id="16" name="TextBox 15"/>
+          <p:cNvSpPr txBox="1"/>
+          <p:nvPr/>
+        </p:nvSpPr>
+        <p:spPr>
+          <a:xfrm>
+            <a:off x="3496000" y="2300000"/>
+            <a:ext cx="2400000" cy="400000"/>
+          </a:xfrm>
+          <a:prstGeom prst="rect">
+            <a:avLst/>
+          </a:prstGeom>
+          <a:noFill/>
+        </p:spPr>
+        <p:txBody>
+          <a:bodyPr wrap="square">
+            <a:spAutoFit/>
+          </a:bodyPr>
+          <a:lstStyle/>
+          <a:p>
+            <a:pPr algn="ctr"/>
+            <a:r>
+              <a:rPr sz="1600" b="1" i="0">
+                <a:solidFill>
+                  <a:srgbClr val="FFFFFF"/>
+                </a:solidFill>
+              </a:rPr>
+              <a:t>POC Scope &amp; Agreement</a:t>
+            </a:r>
+          </a:p>
+        </p:txBody>
+      </p:sp>
+      <p:sp>
+        <p:nvSpPr>
+          <p:cNvPr id="17" name="TextBox 16"/>
+          <p:cNvSpPr txBox="1"/>
+          <p:nvPr/>
+        </p:nvSpPr>
+        <p:spPr>
+          <a:xfrm>
+            <a:off x="3496000" y="2700000"/>
+            <a:ext cx="2400000" cy="300000"/>
+          </a:xfrm>
+          <a:prstGeom prst="rect">
+            <a:avLst/>
+          </a:prstGeom>
+          <a:noFill/>
+        </p:spPr>
+        <p:txBody>
+          <a:bodyPr wrap="square">
+            <a:spAutoFit/>
+          </a:bodyPr>
+          <a:lstStyle/>
+          <a:p>
+            <a:pPr algn="ctr"/>
+            <a:r>
+              <a:rPr sz="1333" b="1" i="0">
+                <a:solidFill>
+                  <a:srgbClr val="00B294"/>
+                </a:solidFill>
+              </a:rPr>
+              <a:t>Week 3</a:t>
+            </a:r>
+          </a:p>
+        </p:txBody>
+      </p:sp>
+      <p:sp>
+        <p:nvSpPr>
+          <p:cNvPr id="18" name="TextBox 17"/>
+          <p:cNvSpPr txBox="1"/>
+          <p:nvPr/>
+        </p:nvSpPr>
+        <p:spPr>
+          <a:xfrm>
+            <a:off x="3496000" y="3100000"/>
+            <a:ext cx="2400000" cy="2000000"/>
+          </a:xfrm>
+          <a:prstGeom prst="rect">
+            <a:avLst/>
+          </a:prstGeom>
+          <a:noFill/>
+        </p:spPr>
+        <p:txBody>
+          <a:bodyPr wrap="square">
+            <a:spAutoFit/>
+          </a:bodyPr>
+          <a:lstStyle/>
+          <a:p>
+            <a:pPr algn="l">
+              <a:spcAft>
+                <a:spcPts val="400"/>
+              </a:spcAft>
+            </a:pPr>
+            <a:r>
+              <a:rPr sz="1000" b="0">
+                <a:solidFill>
+                  <a:srgbClr val="B8CFE8"/>
+                </a:solidFill>
+              </a:rPr>
+              <a:t>Define POC boundaries — typically 1 use case</a:t>
+            </a:r>
+          </a:p>
+          <a:p>
+            <a:pPr algn="l">
+              <a:spcAft>
+                <a:spcPts val="400"/>
+              </a:spcAft>
+            </a:pPr>
+            <a:r>
+              <a:rPr sz="1000" b="0">
+                <a:solidFill>
+                  <a:srgbClr val="B8CFE8"/>
+                </a:solidFill>
+              </a:rPr>
+              <a:t>(Demand Forecasting recommended as highest ROI).</a:t>
+            </a:r>
+          </a:p>
+          <a:p>
+            <a:pPr algn="l">
+              <a:spcAft>
+                <a:spcPts val="400"/>
+              </a:spcAft>
+            </a:pPr>
+            <a:r>
+              <a:rPr sz="1333" b="0">
+                <a:solidFill>
+                  <a:srgbClr val="B8CFE8"/>
+                </a:solidFill>
+              </a:rPr>
+              <a:t>Fixed-price, 6-week delivery.</a:t>
+            </a:r>
+          </a:p>
+        </p:txBody>
+      </p:sp>
+      <p:sp>
+        <p:nvSpPr>
+          <p:cNvPr id="19" name="Rounded Rectangle 18"/>
+          <p:cNvSpPr/>
+          <p:nvPr/>
+        </p:nvSpPr>
+        <p:spPr>
+          <a:xfrm>
+            <a:off x="6196000" y="1500000"/>
+            <a:ext cx="2600000" cy="3800000"/>
+          </a:xfrm>
+          <a:prstGeom prst="roundRect">
+            <a:avLst/>
+          </a:prstGeom>
+          <a:solidFill>
+            <a:srgbClr val="0F1F38"/>
+          </a:solidFill>
+          <a:ln>
+            <a:noFill/>
+          </a:ln>
+        </p:spPr>
+        <p:style>
+          <a:lnRef idx="1">
+            <a:schemeClr val="accent1"/>
+          </a:lnRef>
+          <a:fillRef idx="3">
+            <a:schemeClr val="accent1"/>
+          </a:fillRef>
+          <a:effectRef idx="2">
+            <a:schemeClr val="accent1"/>
+          </a:effectRef>
+          <a:fontRef idx="minor">
+            <a:schemeClr val="lt1"/>
+          </a:fontRef>
+        </p:style>
+        <p:txBody>
+          <a:bodyPr rtlCol="0" anchor="ctr"/>
+          <a:lstStyle/>
+          <a:p>
+            <a:pPr algn="ctr"/>
+          </a:p>
+        </p:txBody>
+      </p:sp>
+      <p:sp>
+        <p:nvSpPr>
+          <p:cNvPr id="20" name="Rounded Rectangle 19"/>
+          <p:cNvSpPr/>
+          <p:nvPr/>
+        </p:nvSpPr>
+        <p:spPr>
+          <a:xfrm>
+            <a:off x="6196000" y="1500000"/>
+            <a:ext cx="2600000" cy="60000"/>
+          </a:xfrm>
+          <a:prstGeom prst="roundRect">
+            <a:avLst/>
+          </a:prstGeom>
+          <a:solidFill>
+            <a:srgbClr val="FFB900"/>
+          </a:solidFill>
+          <a:ln>
+            <a:noFill/>
+          </a:ln>
+        </p:spPr>
+        <p:style>
+          <a:lnRef idx="1">
+            <a:schemeClr val="accent1"/>
+          </a:lnRef>
+          <a:fillRef idx="3">
+            <a:schemeClr val="accent1"/>
+          </a:fillRef>
+          <a:effectRef idx="2">
+            <a:schemeClr val="accent1"/>
+          </a:effectRef>
+          <a:fontRef idx="minor">
+            <a:schemeClr val="lt1"/>
+          </a:fontRef>
+        </p:style>
+        <p:txBody>
+          <a:bodyPr rtlCol="0" anchor="ctr"/>
+          <a:lstStyle/>
+          <a:p>
+            <a:pPr algn="ctr"/>
+          </a:p>
+        </p:txBody>
+      </p:sp>
+      <p:sp>
+        <p:nvSpPr>
+          <p:cNvPr id="21" name="Oval 20"/>
+          <p:cNvSpPr/>
+          <p:nvPr/>
+        </p:nvSpPr>
+        <p:spPr>
+          <a:xfrm>
+            <a:off x="7246000" y="1700000"/>
+            <a:ext cx="500000" cy="500000"/>
+          </a:xfrm>
+          <a:prstGeom prst="ellipse">
+            <a:avLst/>
+          </a:prstGeom>
+          <a:solidFill>
+            <a:srgbClr val="FFB900"/>
+          </a:solidFill>
+          <a:ln>
+            <a:noFill/>
+          </a:ln>
+        </p:spPr>
+        <p:style>
+          <a:lnRef idx="1">
+            <a:schemeClr val="accent1"/>
+          </a:lnRef>
+          <a:fillRef idx="3">
+            <a:schemeClr val="accent1"/>
+          </a:fillRef>
+          <a:effectRef idx="2">
+            <a:schemeClr val="accent1"/>
+          </a:effectRef>
+          <a:fontRef idx="minor">
+            <a:schemeClr val="lt1"/>
+          </a:fontRef>
+        </p:style>
+        <p:txBody>
+          <a:bodyPr rtlCol="0" anchor="ctr"/>
+          <a:lstStyle/>
+          <a:p>
+            <a:pPr algn="ctr"/>
+          </a:p>
+        </p:txBody>
+      </p:sp>
+      <p:sp>
+        <p:nvSpPr>
+          <p:cNvPr id="22" name="TextBox 21"/>
+          <p:cNvSpPr txBox="1"/>
+          <p:nvPr/>
+        </p:nvSpPr>
+        <p:spPr>
+          <a:xfrm>
+            <a:off x="7246000" y="1760000"/>
+            <a:ext cx="500000" cy="400000"/>
+          </a:xfrm>
+          <a:prstGeom prst="rect">
+            <a:avLst/>
+          </a:prstGeom>
+          <a:noFill/>
+        </p:spPr>
+        <p:txBody>
+          <a:bodyPr wrap="square">
+            <a:spAutoFit/>
+          </a:bodyPr>
+          <a:lstStyle/>
+          <a:p>
+            <a:pPr algn="ctr"/>
+            <a:r>
+              <a:rPr sz="1600" b="1" i="0">
+                <a:solidFill>
+                  <a:srgbClr val="FFFFFF"/>
+                </a:solidFill>
+              </a:rPr>
+              <a:t>03</a:t>
+            </a:r>
+          </a:p>
+        </p:txBody>
+      </p:sp>
+      <p:sp>
+        <p:nvSpPr>
+          <p:cNvPr id="23" name="TextBox 22"/>
+          <p:cNvSpPr txBox="1"/>
+          <p:nvPr/>
+        </p:nvSpPr>
+        <p:spPr>
+          <a:xfrm>
+            <a:off x="6296000" y="2300000"/>
+            <a:ext cx="2400000" cy="400000"/>
+          </a:xfrm>
+          <a:prstGeom prst="rect">
+            <a:avLst/>
+          </a:prstGeom>
+          <a:noFill/>
+        </p:spPr>
+        <p:txBody>
+          <a:bodyPr wrap="square">
+            <a:spAutoFit/>
+          </a:bodyPr>
+          <a:lstStyle/>
+          <a:p>
+            <a:pPr algn="ctr"/>
+            <a:r>
+              <a:rPr sz="1600" b="1" i="0">
+                <a:solidFill>
+                  <a:srgbClr val="FFFFFF"/>
+                </a:solidFill>
+              </a:rPr>
+              <a:t>POC Delivery</a:t>
+            </a:r>
+          </a:p>
+        </p:txBody>
+      </p:sp>
+      <p:sp>
+        <p:nvSpPr>
+          <p:cNvPr id="24" name="TextBox 23"/>
+          <p:cNvSpPr txBox="1"/>
+          <p:nvPr/>
+        </p:nvSpPr>
+        <p:spPr>
+          <a:xfrm>
+            <a:off x="6296000" y="2700000"/>
+            <a:ext cx="2400000" cy="300000"/>
+          </a:xfrm>
+          <a:prstGeom prst="rect">
+            <a:avLst/>
+          </a:prstGeom>
+          <a:noFill/>
+        </p:spPr>
+        <p:txBody>
+          <a:bodyPr wrap="square">
+            <a:spAutoFit/>
+          </a:bodyPr>
+          <a:lstStyle/>
+          <a:p>
+            <a:pPr algn="ctr"/>
+            <a:r>
+              <a:rPr sz="1333" b="1" i="0">
+                <a:solidFill>
+                  <a:srgbClr val="FFB900"/>
+                </a:solidFill>
+              </a:rPr>
+              <a:t>Weeks 4-9</a:t>
+            </a:r>
+          </a:p>
+        </p:txBody>
+      </p:sp>
+      <p:sp>
+        <p:nvSpPr>
+          <p:cNvPr id="25" name="TextBox 24"/>
+          <p:cNvSpPr txBox="1"/>
+          <p:nvPr/>
+        </p:nvSpPr>
+        <p:spPr>
+          <a:xfrm>
+            <a:off x="6296000" y="3100000"/>
+            <a:ext cx="2400000" cy="2000000"/>
+          </a:xfrm>
+          <a:prstGeom prst="rect">
+            <a:avLst/>
+          </a:prstGeom>
+          <a:noFill/>
+        </p:spPr>
+        <p:txBody>
+          <a:bodyPr wrap="square">
+            <a:spAutoFit/>
+          </a:bodyPr>
+          <a:lstStyle/>
+          <a:p>
+            <a:pPr algn="l">
+              <a:spcAft>
+                <a:spcPts val="400"/>
+              </a:spcAft>
+            </a:pPr>
+            <a:r>
+              <a:rPr sz="1000" b="0">
+                <a:solidFill>
+                  <a:srgbClr val="B8CFE8"/>
+                </a:solidFill>
+              </a:rPr>
+              <a:t>End-to-end working prototype: SAP data → Fabric</a:t>
+            </a:r>
+          </a:p>
+          <a:p>
+            <a:pPr algn="l">
+              <a:spcAft>
+                <a:spcPts val="400"/>
+              </a:spcAft>
+            </a:pPr>
+            <a:r>
+              <a:rPr sz="1000" b="0">
+                <a:solidFill>
+                  <a:srgbClr val="B8CFE8"/>
+                </a:solidFill>
+              </a:rPr>
+              <a:t>→ AI model → Copilot bot. With live SAP data,</a:t>
+            </a:r>
+          </a:p>
+          <a:p>
+            <a:pPr algn="l">
+              <a:spcAft>
+                <a:spcPts val="400"/>
+              </a:spcAft>
+            </a:pPr>
+            <a:r>
+              <a:rPr sz="1000" b="0">
+                <a:solidFill>
+                  <a:srgbClr val="B8CFE8"/>
+                </a:solidFill>
+              </a:rPr>
+              <a:t>not synthetic. Measurable accuracy baseline.</a:t>
+            </a:r>
+          </a:p>
+        </p:txBody>
+      </p:sp>
+      <p:sp>
+        <p:nvSpPr>
+          <p:cNvPr id="26" name="Rounded Rectangle 25"/>
+          <p:cNvSpPr/>
+          <p:nvPr/>
+        </p:nvSpPr>
+        <p:spPr>
+          <a:xfrm>
+            <a:off x="8996000" y="1500000"/>
+            <a:ext cx="2600000" cy="3800000"/>
+          </a:xfrm>
+          <a:prstGeom prst="roundRect">
+            <a:avLst/>
+          </a:prstGeom>
+          <a:solidFill>
+            <a:srgbClr val="0F1F38"/>
+          </a:solidFill>
+          <a:ln>
+            <a:noFill/>
+          </a:ln>
+        </p:spPr>
+        <p:style>
+          <a:lnRef idx="1">
+            <a:schemeClr val="accent1"/>
+          </a:lnRef>
+          <a:fillRef idx="3">
+            <a:schemeClr val="accent1"/>
+          </a:fillRef>
+          <a:effectRef idx="2">
+            <a:schemeClr val="accent1"/>
+          </a:effectRef>
+          <a:fontRef idx="minor">
+            <a:schemeClr val="lt1"/>
+          </a:fontRef>
+        </p:style>
+        <p:txBody>
+          <a:bodyPr rtlCol="0" anchor="ctr"/>
+          <a:lstStyle/>
+          <a:p>
+            <a:pPr algn="ctr"/>
+          </a:p>
+        </p:txBody>
+      </p:sp>
+      <p:sp>
+        <p:nvSpPr>
+          <p:cNvPr id="27" name="Rounded Rectangle 26"/>
+          <p:cNvSpPr/>
+          <p:nvPr/>
+        </p:nvSpPr>
+        <p:spPr>
+          <a:xfrm>
+            <a:off x="8996000" y="1500000"/>
+            <a:ext cx="2600000" cy="60000"/>
+          </a:xfrm>
+          <a:prstGeom prst="roundRect">
+            <a:avLst/>
+          </a:prstGeom>
+          <a:solidFill>
+            <a:srgbClr val="FF8C00"/>
+          </a:solidFill>
+          <a:ln>
+            <a:noFill/>
+          </a:ln>
+        </p:spPr>
+        <p:style>
+          <a:lnRef idx="1">
+            <a:schemeClr val="accent1"/>
+          </a:lnRef>
+          <a:fillRef idx="3">
+            <a:schemeClr val="accent1"/>
+          </a:fillRef>
+          <a:effectRef idx="2">
+            <a:schemeClr val="accent1"/>
+          </a:effectRef>
+          <a:fontRef idx="minor">
+            <a:schemeClr val="lt1"/>
+          </a:fontRef>
+        </p:style>
+        <p:txBody>
+          <a:bodyPr rtlCol="0" anchor="ctr"/>
+          <a:lstStyle/>
+          <a:p>
+            <a:pPr algn="ctr"/>
+          </a:p>
+        </p:txBody>
+      </p:sp>
+      <p:sp>
+        <p:nvSpPr>
+          <p:cNvPr id="28" name="Oval 27"/>
+          <p:cNvSpPr/>
+          <p:nvPr/>
+        </p:nvSpPr>
+        <p:spPr>
+          <a:xfrm>
+            <a:off x="10046000" y="1700000"/>
+            <a:ext cx="500000" cy="500000"/>
+          </a:xfrm>
+          <a:prstGeom prst="ellipse">
+            <a:avLst/>
+          </a:prstGeom>
+          <a:solidFill>
+            <a:srgbClr val="FF8C00"/>
+          </a:solidFill>
+          <a:ln>
+            <a:noFill/>
+          </a:ln>
+        </p:spPr>
+        <p:style>
+          <a:lnRef idx="1">
+            <a:schemeClr val="accent1"/>
+          </a:lnRef>
+          <a:fillRef idx="3">
+            <a:schemeClr val="accent1"/>
+          </a:fillRef>
+          <a:effectRef idx="2">
+            <a:schemeClr val="accent1"/>
+          </a:effectRef>
+          <a:fontRef idx="minor">
+            <a:schemeClr val="lt1"/>
+          </a:fontRef>
+        </p:style>
+        <p:txBody>
+          <a:bodyPr rtlCol="0" anchor="ctr"/>
+          <a:lstStyle/>
+          <a:p>
+            <a:pPr algn="ctr"/>
+          </a:p>
+        </p:txBody>
+      </p:sp>
+      <p:sp>
+        <p:nvSpPr>
+          <p:cNvPr id="29" name="TextBox 28"/>
+          <p:cNvSpPr txBox="1"/>
+          <p:nvPr/>
+        </p:nvSpPr>
+        <p:spPr>
+          <a:xfrm>
+            <a:off x="10046000" y="1760000"/>
+            <a:ext cx="500000" cy="400000"/>
+          </a:xfrm>
+          <a:prstGeom prst="rect">
+            <a:avLst/>
+          </a:prstGeom>
+          <a:noFill/>
+        </p:spPr>
+        <p:txBody>
+          <a:bodyPr wrap="square">
+            <a:spAutoFit/>
+          </a:bodyPr>
+          <a:lstStyle/>
+          <a:p>
+            <a:pPr algn="ctr"/>
+            <a:r>
+              <a:rPr sz="1600" b="1" i="0">
+                <a:solidFill>
+                  <a:srgbClr val="FFFFFF"/>
+                </a:solidFill>
+              </a:rPr>
+              <a:t>04</a:t>
+            </a:r>
+          </a:p>
+        </p:txBody>
+      </p:sp>
+      <p:sp>
+        <p:nvSpPr>
+          <p:cNvPr id="30" name="TextBox 29"/>
+          <p:cNvSpPr txBox="1"/>
+          <p:nvPr/>
+        </p:nvSpPr>
+        <p:spPr>
+          <a:xfrm>
+            <a:off x="9096000" y="2300000"/>
+            <a:ext cx="2400000" cy="400000"/>
+          </a:xfrm>
+          <a:prstGeom prst="rect">
+            <a:avLst/>
+          </a:prstGeom>
+          <a:noFill/>
+        </p:spPr>
+        <p:txBody>
+          <a:bodyPr wrap="square">
+            <a:spAutoFit/>
+          </a:bodyPr>
+          <a:lstStyle/>
+          <a:p>
+            <a:pPr algn="ctr"/>
+            <a:r>
+              <a:rPr sz="1600" b="1" i="0">
+                <a:solidFill>
+                  <a:srgbClr val="FFFFFF"/>
+                </a:solidFill>
+              </a:rPr>
+              <a:t>Scale &amp; Productionise</a:t>
+            </a:r>
+          </a:p>
+        </p:txBody>
+      </p:sp>
+      <p:sp>
+        <p:nvSpPr>
+          <p:cNvPr id="31" name="TextBox 30"/>
+          <p:cNvSpPr txBox="1"/>
+          <p:nvPr/>
+        </p:nvSpPr>
+        <p:spPr>
+          <a:xfrm>
+            <a:off x="9096000" y="2700000"/>
+            <a:ext cx="2400000" cy="300000"/>
+          </a:xfrm>
+          <a:prstGeom prst="rect">
+            <a:avLst/>
+          </a:prstGeom>
+          <a:noFill/>
+        </p:spPr>
+        <p:txBody>
+          <a:bodyPr wrap="square">
+            <a:spAutoFit/>
+          </a:bodyPr>
+          <a:lstStyle/>
+          <a:p>
+            <a:pPr algn="ctr"/>
+            <a:r>
+              <a:rPr sz="1333" b="1" i="0">
+                <a:solidFill>
+                  <a:srgbClr val="FF8C00"/>
+                </a:solidFill>
+              </a:rPr>
+              <a:t>Weeks 10-16</a:t>
+            </a:r>
+          </a:p>
+        </p:txBody>
+      </p:sp>
+      <p:sp>
+        <p:nvSpPr>
+          <p:cNvPr id="32" name="TextBox 31"/>
+          <p:cNvSpPr txBox="1"/>
+          <p:nvPr/>
+        </p:nvSpPr>
+        <p:spPr>
+          <a:xfrm>
+            <a:off x="9096000" y="3100000"/>
+            <a:ext cx="2400000" cy="2000000"/>
+          </a:xfrm>
+          <a:prstGeom prst="rect">
+            <a:avLst/>
+          </a:prstGeom>
+          <a:noFill/>
+        </p:spPr>
+        <p:txBody>
+          <a:bodyPr wrap="square">
+            <a:spAutoFit/>
+          </a:bodyPr>
+          <a:lstStyle/>
+          <a:p>
+            <a:pPr algn="l">
+              <a:spcAft>
+                <a:spcPts val="400"/>
+              </a:spcAft>
+            </a:pPr>
+            <a:r>
+              <a:rPr sz="1000" b="0">
+                <a:solidFill>
+                  <a:srgbClr val="B8CFE8"/>
+                </a:solidFill>
+              </a:rPr>
+              <a:t>Expand to remaining use cases. Full security,</a:t>
+            </a:r>
+          </a:p>
+          <a:p>
+            <a:pPr algn="l">
+              <a:spcAft>
+                <a:spcPts val="400"/>
+              </a:spcAft>
+            </a:pPr>
+            <a:r>
+              <a:rPr sz="1000" b="0">
+                <a:solidFill>
+                  <a:srgbClr val="B8CFE8"/>
+                </a:solidFill>
+              </a:rPr>
+              <a:t>governance, and operational readiness.</a:t>
+            </a:r>
+          </a:p>
+          <a:p>
+            <a:pPr algn="l">
+              <a:spcAft>
+                <a:spcPts val="400"/>
+              </a:spcAft>
+            </a:pPr>
+            <a:r>
+              <a:rPr sz="1010" b="0">
+                <a:solidFill>
+                  <a:srgbClr val="B8CFE8"/>
+                </a:solidFill>
+              </a:rPr>
+              <a:t>Handover with training &amp; runbooks.</a:t>
+            </a:r>
+          </a:p>
+        </p:txBody>
+      </p:sp>
+      <p:sp>
+        <p:nvSpPr>
+          <p:cNvPr id="33" name="Rounded Rectangle 32"/>
+          <p:cNvSpPr/>
+          <p:nvPr/>
+        </p:nvSpPr>
+        <p:spPr>
+          <a:xfrm>
+            <a:off x="596000" y="5700000"/>
+            <a:ext cx="11000000" cy="700000"/>
+          </a:xfrm>
+          <a:prstGeom prst="roundRect">
+            <a:avLst/>
+          </a:prstGeom>
+          <a:solidFill>
+            <a:srgbClr val="0078D4"/>
+          </a:solidFill>
+          <a:ln>
+            <a:noFill/>
+          </a:ln>
+        </p:spPr>
+        <p:style>
+          <a:lnRef idx="1">
+            <a:schemeClr val="accent1"/>
+          </a:lnRef>
+          <a:fillRef idx="3">
+            <a:schemeClr val="accent1"/>
+          </a:fillRef>
+          <a:effectRef idx="2">
+            <a:schemeClr val="accent1"/>
+          </a:effectRef>
+          <a:fontRef idx="minor">
+            <a:schemeClr val="lt1"/>
+          </a:fontRef>
+        </p:style>
+        <p:txBody>
+          <a:bodyPr rtlCol="0" anchor="ctr"/>
+          <a:lstStyle/>
+          <a:p>
+            <a:pPr algn="ctr"/>
+          </a:p>
+        </p:txBody>
+      </p:sp>
+      <p:sp>
+        <p:nvSpPr>
           <p:cNvPr id="34" name="TextBox 33"/>
           <p:cNvSpPr txBox="1"/>
           <p:nvPr/>
@@ -38189,7 +39661,7 @@
 </p:sld>
 </file>
 
-<file path=ppt/slides/slide16.xml><?xml version="1.0" encoding="utf-8"?>
+<file path=ppt/slides/slide17.xml><?xml version="1.0" encoding="utf-8"?>
 <p:sld xmlns:a="http://schemas.openxmlformats.org/drawingml/2006/main" xmlns:r="http://schemas.openxmlformats.org/officeDocument/2006/relationships" xmlns:p="http://schemas.openxmlformats.org/presentationml/2006/main">
   <p:cSld>
     <p:spTree>
@@ -38701,7 +40173,7 @@
 </p:sld>
 </file>
 
-<file path=ppt/slides/slide17.xml><?xml version="1.0" encoding="utf-8"?>
+<file path=ppt/slides/slide18.xml><?xml version="1.0" encoding="utf-8"?>
 <p:sld xmlns:a="http://schemas.openxmlformats.org/drawingml/2006/main" xmlns:r="http://schemas.openxmlformats.org/officeDocument/2006/relationships" xmlns:p="http://schemas.openxmlformats.org/presentationml/2006/main">
   <p:cSld>
     <p:spTree>
@@ -39789,7 +41261,7 @@
             <a:avLst/>
           </a:prstGeom>
           <a:solidFill>
-            <a:srgbClr val="0078D4"/>
+            <a:srgbClr val="50E6FF"/>
           </a:solidFill>
           <a:ln>
             <a:noFill/>
@@ -39880,7 +41352,7 @@
                   <a:srgbClr val="FFFFFF"/>
                 </a:solidFill>
               </a:rPr>
-              <a:t>ROI &amp; Business Case</a:t>
+              <a:t>Why NTT DATA Business Solutions?</a:t>
             </a:r>
           </a:p>
         </p:txBody>
@@ -39914,7 +41386,7 @@
                   <a:srgbClr val="B8CFE8"/>
                 </a:solidFill>
               </a:rPr>
-              <a:t>Consolidated impact across all use cases</a:t>
+              <a:t>SAP + AI + Automotive domain expertise</a:t>
             </a:r>
           </a:p>
         </p:txBody>
@@ -39934,7 +41406,7 @@
             <a:avLst/>
           </a:prstGeom>
           <a:solidFill>
-            <a:srgbClr val="0078D4"/>
+            <a:srgbClr val="50E6FF"/>
           </a:solidFill>
           <a:ln>
             <a:noFill/>
@@ -39977,7 +41449,7 @@
             <a:avLst/>
           </a:prstGeom>
           <a:solidFill>
-            <a:srgbClr val="00B294"/>
+            <a:srgbClr val="0078D4"/>
           </a:solidFill>
           <a:ln>
             <a:noFill/>
@@ -40068,7 +41540,7 @@
                   <a:srgbClr val="FFFFFF"/>
                 </a:solidFill>
               </a:rPr>
-              <a:t>Implementation Roadmap</a:t>
+              <a:t>ROI &amp; Business Case</a:t>
             </a:r>
           </a:p>
         </p:txBody>
@@ -40102,7 +41574,7 @@
                   <a:srgbClr val="B8CFE8"/>
                 </a:solidFill>
               </a:rPr>
-              <a:t>12-week phased delivery plan</a:t>
+              <a:t>Consolidated impact across all use cases</a:t>
             </a:r>
           </a:p>
         </p:txBody>
@@ -40122,7 +41594,7 @@
             <a:avLst/>
           </a:prstGeom>
           <a:solidFill>
-            <a:srgbClr val="00B294"/>
+            <a:srgbClr val="0078D4"/>
           </a:solidFill>
           <a:ln>
             <a:noFill/>
@@ -40165,7 +41637,7 @@
             <a:avLst/>
           </a:prstGeom>
           <a:solidFill>
-            <a:srgbClr val="FFB900"/>
+            <a:srgbClr val="00B294"/>
           </a:solidFill>
           <a:ln>
             <a:noFill/>
@@ -40256,7 +41728,7 @@
                   <a:srgbClr val="FFFFFF"/>
                 </a:solidFill>
               </a:rPr>
-              <a:t>Next Steps</a:t>
+              <a:t>Implementation Roadmap</a:t>
             </a:r>
           </a:p>
         </p:txBody>
@@ -40290,7 +41762,7 @@
                   <a:srgbClr val="B8CFE8"/>
                 </a:solidFill>
               </a:rPr>
-              <a:t>Discovery workshop &amp; POC proposal</a:t>
+              <a:t>12-week phased delivery plan</a:t>
             </a:r>
           </a:p>
         </p:txBody>
@@ -40304,6 +41776,194 @@
         <p:spPr>
           <a:xfrm>
             <a:off x="6800000" y="5960000"/>
+            <a:ext cx="4800000" cy="3000"/>
+          </a:xfrm>
+          <a:prstGeom prst="roundRect">
+            <a:avLst/>
+          </a:prstGeom>
+          <a:solidFill>
+            <a:srgbClr val="00B294"/>
+          </a:solidFill>
+          <a:ln>
+            <a:noFill/>
+          </a:ln>
+        </p:spPr>
+        <p:style>
+          <a:lnRef idx="1">
+            <a:schemeClr val="accent1"/>
+          </a:lnRef>
+          <a:fillRef idx="3">
+            <a:schemeClr val="accent1"/>
+          </a:fillRef>
+          <a:effectRef idx="2">
+            <a:schemeClr val="accent1"/>
+          </a:effectRef>
+          <a:fontRef idx="minor">
+            <a:schemeClr val="lt1"/>
+          </a:fontRef>
+        </p:style>
+        <p:txBody>
+          <a:bodyPr rtlCol="0" anchor="ctr"/>
+          <a:lstStyle/>
+          <a:p>
+            <a:pPr algn="ctr"/>
+          </a:p>
+        </p:txBody>
+      </p:sp>
+      <p:sp>
+        <p:nvSpPr>
+          <p:cNvPr id="45" name="Oval 44"/>
+          <p:cNvSpPr/>
+          <p:nvPr/>
+        </p:nvSpPr>
+        <p:spPr>
+          <a:xfrm>
+            <a:off x="700000" y="6510000"/>
+            <a:ext cx="430000" cy="430000"/>
+          </a:xfrm>
+          <a:prstGeom prst="ellipse">
+            <a:avLst/>
+          </a:prstGeom>
+          <a:solidFill>
+            <a:srgbClr val="FFB900"/>
+          </a:solidFill>
+          <a:ln>
+            <a:noFill/>
+          </a:ln>
+        </p:spPr>
+        <p:style>
+          <a:lnRef idx="1">
+            <a:schemeClr val="accent1"/>
+          </a:lnRef>
+          <a:fillRef idx="3">
+            <a:schemeClr val="accent1"/>
+          </a:fillRef>
+          <a:effectRef idx="2">
+            <a:schemeClr val="accent1"/>
+          </a:effectRef>
+          <a:fontRef idx="minor">
+            <a:schemeClr val="lt1"/>
+          </a:fontRef>
+        </p:style>
+        <p:txBody>
+          <a:bodyPr rtlCol="0" anchor="ctr"/>
+          <a:lstStyle/>
+          <a:p>
+            <a:pPr algn="ctr"/>
+          </a:p>
+        </p:txBody>
+      </p:sp>
+      <p:sp>
+        <p:nvSpPr>
+          <p:cNvPr id="46" name="TextBox 45"/>
+          <p:cNvSpPr txBox="1"/>
+          <p:nvPr/>
+        </p:nvSpPr>
+        <p:spPr>
+          <a:xfrm>
+            <a:off x="700000" y="6560000"/>
+            <a:ext cx="430000" cy="350000"/>
+          </a:xfrm>
+          <a:prstGeom prst="rect">
+            <a:avLst/>
+          </a:prstGeom>
+          <a:noFill/>
+        </p:spPr>
+        <p:txBody>
+          <a:bodyPr wrap="square">
+            <a:spAutoFit/>
+          </a:bodyPr>
+          <a:lstStyle/>
+          <a:p>
+            <a:pPr algn="ctr"/>
+            <a:r>
+              <a:rPr sz="1467" b="1" i="0">
+                <a:solidFill>
+                  <a:srgbClr val="FFFFFF"/>
+                </a:solidFill>
+              </a:rPr>
+              <a:t>09</a:t>
+            </a:r>
+          </a:p>
+        </p:txBody>
+      </p:sp>
+      <p:sp>
+        <p:nvSpPr>
+          <p:cNvPr id="47" name="TextBox 46"/>
+          <p:cNvSpPr txBox="1"/>
+          <p:nvPr/>
+        </p:nvSpPr>
+        <p:spPr>
+          <a:xfrm>
+            <a:off x="1300000" y="6490000"/>
+            <a:ext cx="5000000" cy="350000"/>
+          </a:xfrm>
+          <a:prstGeom prst="rect">
+            <a:avLst/>
+          </a:prstGeom>
+          <a:noFill/>
+        </p:spPr>
+        <p:txBody>
+          <a:bodyPr wrap="square">
+            <a:spAutoFit/>
+          </a:bodyPr>
+          <a:lstStyle/>
+          <a:p>
+            <a:pPr algn="l"/>
+            <a:r>
+              <a:rPr sz="1600" b="1" i="0">
+                <a:solidFill>
+                  <a:srgbClr val="FFFFFF"/>
+                </a:solidFill>
+              </a:rPr>
+              <a:t>Next Steps</a:t>
+            </a:r>
+          </a:p>
+        </p:txBody>
+      </p:sp>
+      <p:sp>
+        <p:nvSpPr>
+          <p:cNvPr id="48" name="TextBox 47"/>
+          <p:cNvSpPr txBox="1"/>
+          <p:nvPr/>
+        </p:nvSpPr>
+        <p:spPr>
+          <a:xfrm>
+            <a:off x="1300000" y="6780000"/>
+            <a:ext cx="5000000" cy="300000"/>
+          </a:xfrm>
+          <a:prstGeom prst="rect">
+            <a:avLst/>
+          </a:prstGeom>
+          <a:noFill/>
+        </p:spPr>
+        <p:txBody>
+          <a:bodyPr wrap="square">
+            <a:spAutoFit/>
+          </a:bodyPr>
+          <a:lstStyle/>
+          <a:p>
+            <a:pPr algn="l"/>
+            <a:r>
+              <a:rPr sz="1333" b="0" i="0">
+                <a:solidFill>
+                  <a:srgbClr val="B8CFE8"/>
+                </a:solidFill>
+              </a:rPr>
+              <a:t>Discovery workshop &amp; POC proposal</a:t>
+            </a:r>
+          </a:p>
+        </p:txBody>
+      </p:sp>
+      <p:sp>
+        <p:nvSpPr>
+          <p:cNvPr id="49" name="Rounded Rectangle 48"/>
+          <p:cNvSpPr/>
+          <p:nvPr/>
+        </p:nvSpPr>
+        <p:spPr>
+          <a:xfrm>
+            <a:off x="6800000" y="6580000"/>
             <a:ext cx="4800000" cy="3000"/>
           </a:xfrm>
           <a:prstGeom prst="roundRect">
@@ -42045,12 +43705,12 @@
               </a:spcAft>
             </a:pPr>
             <a:r>
-              <a:rPr sz="1041" b="0">
+              <a:rPr sz="1333" b="0">
                 <a:solidFill>
                   <a:srgbClr val="B8CFE8"/>
                 </a:solidFill>
               </a:rPr>
-              <a:t>RAV4 sales down 74% in early 2026</a:t>
+              <a:t>RAV4 sales down 74% in early</a:t>
             </a:r>
           </a:p>
           <a:p>
@@ -42065,7 +43725,7 @@
                   <a:srgbClr val="B8CFE8"/>
                 </a:solidFill>
               </a:rPr>
-              <a:t>due to model transition gaps.</a:t>
+              <a:t>2026 due to model transition</a:t>
             </a:r>
           </a:p>
           <a:p>
@@ -42080,7 +43740,7 @@
                   <a:srgbClr val="B8CFE8"/>
                 </a:solidFill>
               </a:rPr>
-              <a:t/>
+              <a:t>gaps. [1]</a:t>
             </a:r>
           </a:p>
           <a:p>
@@ -42095,7 +43755,7 @@
                   <a:srgbClr val="B8CFE8"/>
                 </a:solidFill>
               </a:rPr>
-              <a:t>3–6 month wait times persist</a:t>
+              <a:t/>
             </a:r>
           </a:p>
           <a:p>
@@ -42110,7 +43770,7 @@
                   <a:srgbClr val="B8CFE8"/>
                 </a:solidFill>
               </a:rPr>
-              <a:t>across the range. 200K+ unit</a:t>
+              <a:t>3–6 month wait times persist</a:t>
             </a:r>
           </a:p>
           <a:p>
@@ -42125,7 +43785,7 @@
                   <a:srgbClr val="B8CFE8"/>
                 </a:solidFill>
               </a:rPr>
-              <a:t>target at risk without better</a:t>
+              <a:t>across the range. 200K+ unit</a:t>
             </a:r>
           </a:p>
           <a:p>
@@ -42140,7 +43800,22 @@
                   <a:srgbClr val="B8CFE8"/>
                 </a:solidFill>
               </a:rPr>
-              <a:t>demand visibility.</a:t>
+              <a:t>target at risk without better</a:t>
+            </a:r>
+          </a:p>
+          <a:p>
+            <a:pPr algn="l">
+              <a:spcAft>
+                <a:spcPts val="400"/>
+              </a:spcAft>
+            </a:pPr>
+            <a:r>
+              <a:rPr sz="1333" b="0">
+                <a:solidFill>
+                  <a:srgbClr val="B8CFE8"/>
+                </a:solidFill>
+              </a:rPr>
+              <a:t>demand visibility. [2]</a:t>
             </a:r>
           </a:p>
         </p:txBody>
@@ -42329,7 +44004,7 @@
                   <a:srgbClr val="B8CFE8"/>
                 </a:solidFill>
               </a:rPr>
-              <a:t/>
+              <a:t>[3]</a:t>
             </a:r>
           </a:p>
           <a:p>
@@ -42344,7 +44019,7 @@
                   <a:srgbClr val="B8CFE8"/>
                 </a:solidFill>
               </a:rPr>
-              <a:t>Cannot distinguish real demand</a:t>
+              <a:t/>
             </a:r>
           </a:p>
           <a:p>
@@ -42359,7 +44034,7 @@
                   <a:srgbClr val="B8CFE8"/>
                 </a:solidFill>
               </a:rPr>
-              <a:t>from stock replenishment.</a:t>
+              <a:t>Cannot distinguish real demand</a:t>
             </a:r>
           </a:p>
           <a:p>
@@ -42374,7 +44049,7 @@
                   <a:srgbClr val="B8CFE8"/>
                 </a:solidFill>
               </a:rPr>
-              <a:t>Parts forecasting still relies</a:t>
+              <a:t>from stock replenishment.</a:t>
             </a:r>
           </a:p>
           <a:p>
@@ -42389,7 +44064,37 @@
                   <a:srgbClr val="B8CFE8"/>
                 </a:solidFill>
               </a:rPr>
+              <a:t>Parts forecasting still relies</a:t>
+            </a:r>
+          </a:p>
+          <a:p>
+            <a:pPr algn="l">
+              <a:spcAft>
+                <a:spcPts val="400"/>
+              </a:spcAft>
+            </a:pPr>
+            <a:r>
+              <a:rPr sz="1333" b="0">
+                <a:solidFill>
+                  <a:srgbClr val="B8CFE8"/>
+                </a:solidFill>
+              </a:rPr>
               <a:t>on Excel and manual overrides.</a:t>
+            </a:r>
+          </a:p>
+          <a:p>
+            <a:pPr algn="l">
+              <a:spcAft>
+                <a:spcPts val="400"/>
+              </a:spcAft>
+            </a:pPr>
+            <a:r>
+              <a:rPr sz="1333" b="0">
+                <a:solidFill>
+                  <a:srgbClr val="B8CFE8"/>
+                </a:solidFill>
+              </a:rPr>
+              <a:t>[3]</a:t>
             </a:r>
           </a:p>
         </p:txBody>
@@ -42578,7 +44283,7 @@
                   <a:srgbClr val="B8CFE8"/>
                 </a:solidFill>
               </a:rPr>
-              <a:t/>
+              <a:t>[4]</a:t>
             </a:r>
           </a:p>
           <a:p>
@@ -42593,7 +44298,7 @@
                   <a:srgbClr val="B8CFE8"/>
                 </a:solidFill>
               </a:rPr>
-              <a:t>Aisin magnet &amp; Denso inverter</a:t>
+              <a:t/>
             </a:r>
           </a:p>
           <a:p>
@@ -42608,7 +44313,7 @@
                   <a:srgbClr val="B8CFE8"/>
                 </a:solidFill>
               </a:rPr>
-              <a:t>bottlenecks. All components</a:t>
+              <a:t>Aisin magnet &amp; Denso inverter</a:t>
             </a:r>
           </a:p>
           <a:p>
@@ -42623,7 +44328,7 @@
                   <a:srgbClr val="B8CFE8"/>
                 </a:solidFill>
               </a:rPr>
-              <a:t>shipped from Japan — logistics</a:t>
+              <a:t>bottlenecks. All components</a:t>
             </a:r>
           </a:p>
           <a:p>
@@ -42638,7 +44343,37 @@
                   <a:srgbClr val="B8CFE8"/>
                 </a:solidFill>
               </a:rPr>
+              <a:t>shipped from Japan — logistics</a:t>
+            </a:r>
+          </a:p>
+          <a:p>
+            <a:pPr algn="l">
+              <a:spcAft>
+                <a:spcPts val="400"/>
+              </a:spcAft>
+            </a:pPr>
+            <a:r>
+              <a:rPr sz="1333" b="0">
+                <a:solidFill>
+                  <a:srgbClr val="B8CFE8"/>
+                </a:solidFill>
+              </a:rPr>
               <a:t>delays compound the problem.</a:t>
+            </a:r>
+          </a:p>
+          <a:p>
+            <a:pPr algn="l">
+              <a:spcAft>
+                <a:spcPts val="400"/>
+              </a:spcAft>
+            </a:pPr>
+            <a:r>
+              <a:rPr sz="1333" b="0">
+                <a:solidFill>
+                  <a:srgbClr val="B8CFE8"/>
+                </a:solidFill>
+              </a:rPr>
+              <a:t>[4][5]</a:t>
             </a:r>
           </a:p>
         </p:txBody>
@@ -42842,7 +44577,7 @@
                   <a:srgbClr val="B8CFE8"/>
                 </a:solidFill>
               </a:rPr>
-              <a:t/>
+              <a:t>[6]</a:t>
             </a:r>
           </a:p>
           <a:p>
@@ -42857,7 +44592,7 @@
                   <a:srgbClr val="B8CFE8"/>
                 </a:solidFill>
               </a:rPr>
-              <a:t>Model transitions (Fortuner</a:t>
+              <a:t/>
             </a:r>
           </a:p>
           <a:p>
@@ -42872,7 +44607,7 @@
                   <a:srgbClr val="B8CFE8"/>
                 </a:solidFill>
               </a:rPr>
-              <a:t>exit, new-gen RAV4 &amp; HiLux)</a:t>
+              <a:t>Model transitions (Fortuner</a:t>
             </a:r>
           </a:p>
           <a:p>
@@ -42887,7 +44622,37 @@
                   <a:srgbClr val="B8CFE8"/>
                 </a:solidFill>
               </a:rPr>
+              <a:t>exit, new-gen RAV4 &amp; HiLux)</a:t>
+            </a:r>
+          </a:p>
+          <a:p>
+            <a:pPr algn="l">
+              <a:spcAft>
+                <a:spcPts val="400"/>
+              </a:spcAft>
+            </a:pPr>
+            <a:r>
+              <a:rPr sz="1333" b="0">
+                <a:solidFill>
+                  <a:srgbClr val="B8CFE8"/>
+                </a:solidFill>
+              </a:rPr>
               <a:t>need dynamic stock rebalancing.</a:t>
+            </a:r>
+          </a:p>
+          <a:p>
+            <a:pPr algn="l">
+              <a:spcAft>
+                <a:spcPts val="400"/>
+              </a:spcAft>
+            </a:pPr>
+            <a:r>
+              <a:rPr sz="1333" b="0">
+                <a:solidFill>
+                  <a:srgbClr val="B8CFE8"/>
+                </a:solidFill>
+              </a:rPr>
+              <a:t>[1]</a:t>
             </a:r>
           </a:p>
         </p:txBody>
@@ -42900,8 +44665,8 @@
         </p:nvSpPr>
         <p:spPr>
           <a:xfrm>
-            <a:off x="400000" y="5000000"/>
-            <a:ext cx="11400000" cy="700000"/>
+            <a:off x="400000" y="4900000"/>
+            <a:ext cx="11400000" cy="600000"/>
           </a:xfrm>
           <a:prstGeom prst="roundRect">
             <a:avLst/>
@@ -42943,8 +44708,8 @@
         </p:nvSpPr>
         <p:spPr>
           <a:xfrm>
-            <a:off x="600000" y="5050000"/>
-            <a:ext cx="1800000" cy="400000"/>
+            <a:off x="600000" y="4930000"/>
+            <a:ext cx="1800000" cy="350000"/>
           </a:xfrm>
           <a:prstGeom prst="rect">
             <a:avLst/>
@@ -42977,8 +44742,8 @@
         </p:nvSpPr>
         <p:spPr>
           <a:xfrm>
-            <a:off x="2500000" y="5050000"/>
-            <a:ext cx="9000000" cy="600000"/>
+            <a:off x="2500000" y="4930000"/>
+            <a:ext cx="9000000" cy="500000"/>
           </a:xfrm>
           <a:prstGeom prst="rect">
             <a:avLst/>
@@ -42999,6 +44764,153 @@
                 </a:solidFill>
               </a:rPr>
               <a:t>Toyota AU's SAP ECC6 holds years of order, parts and logistics data — but no AI layer to predict, optimise and act autonomously. This is exactly what NDBS delivers.</a:t>
+            </a:r>
+          </a:p>
+        </p:txBody>
+      </p:sp>
+      <p:sp>
+        <p:nvSpPr>
+          <p:cNvPr id="24" name="TextBox 23"/>
+          <p:cNvSpPr txBox="1"/>
+          <p:nvPr/>
+        </p:nvSpPr>
+        <p:spPr>
+          <a:xfrm>
+            <a:off x="400000" y="5550000"/>
+            <a:ext cx="5500000" cy="200000"/>
+          </a:xfrm>
+          <a:prstGeom prst="rect">
+            <a:avLst/>
+          </a:prstGeom>
+          <a:noFill/>
+        </p:spPr>
+        <p:txBody>
+          <a:bodyPr wrap="square">
+            <a:spAutoFit/>
+          </a:bodyPr>
+          <a:lstStyle/>
+          <a:p>
+            <a:pPr algn="l"/>
+            <a:r>
+              <a:rPr sz="700" b="1" i="0">
+                <a:solidFill>
+                  <a:srgbClr val="B8CFE8"/>
+                </a:solidFill>
+              </a:rPr>
+              <a:t>Sources:</a:t>
+            </a:r>
+          </a:p>
+        </p:txBody>
+      </p:sp>
+      <p:sp>
+        <p:nvSpPr>
+          <p:cNvPr id="25" name="TextBox 24"/>
+          <p:cNvSpPr txBox="1"/>
+          <p:nvPr/>
+        </p:nvSpPr>
+        <p:spPr>
+          <a:xfrm>
+            <a:off x="400000" y="5700000"/>
+            <a:ext cx="11400000" cy="1000000"/>
+          </a:xfrm>
+          <a:prstGeom prst="rect">
+            <a:avLst/>
+          </a:prstGeom>
+          <a:noFill/>
+        </p:spPr>
+        <p:txBody>
+          <a:bodyPr wrap="square">
+            <a:spAutoFit/>
+          </a:bodyPr>
+          <a:lstStyle/>
+          <a:p>
+            <a:pPr algn="l">
+              <a:spcAft>
+                <a:spcPts val="400"/>
+              </a:spcAft>
+            </a:pPr>
+            <a:r>
+              <a:rPr sz="700" b="0">
+                <a:solidFill>
+                  <a:srgbClr val="8899AA"/>
+                </a:solidFill>
+              </a:rPr>
+              <a:t>[1] CarsGuide — Toyota wait times &amp; RAV4 sales 2026</a:t>
+            </a:r>
+          </a:p>
+          <a:p>
+            <a:pPr algn="l">
+              <a:spcAft>
+                <a:spcPts val="400"/>
+              </a:spcAft>
+            </a:pPr>
+            <a:r>
+              <a:rPr sz="700" b="0">
+                <a:solidFill>
+                  <a:srgbClr val="8899AA"/>
+                </a:solidFill>
+              </a:rPr>
+              <a:t>[2] CarsGuide — Toyota wait times in Australia 2025</a:t>
+            </a:r>
+          </a:p>
+          <a:p>
+            <a:pPr algn="l">
+              <a:spcAft>
+                <a:spcPts val="400"/>
+              </a:spcAft>
+            </a:pPr>
+            <a:r>
+              <a:rPr sz="700" b="0">
+                <a:solidFill>
+                  <a:srgbClr val="8899AA"/>
+                </a:solidFill>
+              </a:rPr>
+              <a:t>[3] Automotive Logistics — Toyota 'holy grail' of predictability</a:t>
+            </a:r>
+          </a:p>
+          <a:p>
+            <a:pPr algn="l">
+              <a:spcAft>
+                <a:spcPts val="400"/>
+              </a:spcAft>
+            </a:pPr>
+            <a:r>
+              <a:rPr sz="700" b="0">
+                <a:solidFill>
+                  <a:srgbClr val="8899AA"/>
+                </a:solidFill>
+              </a:rPr>
+              <a:t>[4] CBT News — Toyota struggles to meet surging hybrid demand</a:t>
+            </a:r>
+          </a:p>
+          <a:p>
+            <a:pPr algn="l">
+              <a:spcAft>
+                <a:spcPts val="400"/>
+              </a:spcAft>
+            </a:pPr>
+            <a:r>
+              <a:rPr sz="700" b="0">
+                <a:solidFill>
+                  <a:srgbClr val="8899AA"/>
+                </a:solidFill>
+              </a:rPr>
+              <a:t>[5] FreightAmigo — Toyota recovery from chip shortages case study</a:t>
+            </a:r>
+          </a:p>
+          <a:p>
+            <a:pPr algn="l">
+              <a:spcAft>
+                <a:spcPts val="400"/>
+              </a:spcAft>
+            </a:pPr>
+            <a:r>
+              <a:rPr sz="700" b="0">
+                <a:solidFill>
+                  <a:srgbClr val="8899AA"/>
+                </a:solidFill>
+              </a:rPr>
+              <a:t>[6] Toyota Australia — Dealer network &amp; corporate overview</a:t>
             </a:r>
           </a:p>
         </p:txBody>
